--- a/docs/whatcom-coops-four-lenses.pptx
+++ b/docs/whatcom-coops-four-lenses.pptx
@@ -17,6 +17,11 @@
     <p:sldId id="265" r:id="rId16"/>
     <p:sldId id="266" r:id="rId17"/>
     <p:sldId id="267" r:id="rId18"/>
+    <p:sldId id="268" r:id="rId19"/>
+    <p:sldId id="269" r:id="rId20"/>
+    <p:sldId id="270" r:id="rId21"/>
+    <p:sldId id="271" r:id="rId22"/>
+    <p:sldId id="272" r:id="rId23"/>
   </p:sldIdLst>
   <p:sldSz cx="12188952" cy="6858000" type="screen4x3"/>
   <p:notesSz cx="6858000" cy="9144000"/>
@@ -3528,7 +3533,7 @@
                 </a:solidFill>
                 <a:latin typeface="Calibri"/>
               </a:rPr>
-              <a:t>One dataset, four RCN lenses:</a:t>
+              <a:t>One dataset, four RCN lenses —</a:t>
             </a:r>
           </a:p>
           <a:p>
@@ -3544,7 +3549,23 @@
                 </a:solidFill>
                 <a:latin typeface="Calibri"/>
               </a:rPr>
-              <a:t>Map · Graph · Timeline · Table</a:t>
+              <a:t>Map · Graph · Timeline · Table —</a:t>
+            </a:r>
+          </a:p>
+          <a:p>
+            <a:pPr algn="l">
+              <a:lnSpc>
+                <a:spcPct val="105000"/>
+              </a:lnSpc>
+            </a:pPr>
+            <a:r>
+              <a:rPr sz="2000" b="0" i="0">
+                <a:solidFill>
+                  <a:srgbClr val="CBD5E1"/>
+                </a:solidFill>
+                <a:latin typeface="Calibri"/>
+              </a:rPr>
+              <a:t>and a FedWiki page for every co-op</a:t>
             </a:r>
           </a:p>
         </p:txBody>
@@ -3557,7 +3578,7 @@
         </p:nvSpPr>
         <p:spPr>
           <a:xfrm>
-            <a:off x="640080" y="4709160"/>
+            <a:off x="640080" y="4937760"/>
             <a:ext cx="5120640" cy="365760"/>
           </a:xfrm>
           <a:prstGeom prst="rect">
@@ -3784,7 +3805,7 @@
         <p:spPr>
           <a:xfrm>
             <a:off x="521207" y="1453896"/>
-            <a:ext cx="8055864" cy="4737383"/>
+            <a:ext cx="7945142" cy="4672583"/>
           </a:xfrm>
           <a:prstGeom prst="rect">
             <a:avLst/>
@@ -3836,7 +3857,7 @@
         <p:spPr>
           <a:xfrm>
             <a:off x="548640" y="1481328"/>
-            <a:ext cx="8001000" cy="4682519"/>
+            <a:ext cx="7890278" cy="4617720"/>
           </a:xfrm>
           <a:prstGeom prst="rect">
             <a:avLst/>
@@ -3970,7 +3991,7 @@
         </p:nvSpPr>
         <p:spPr>
           <a:xfrm>
-            <a:off x="548640" y="6255287"/>
+            <a:off x="548640" y="6190488"/>
             <a:ext cx="8001000" cy="274320"/>
           </a:xfrm>
           <a:prstGeom prst="rect">
@@ -4120,7 +4141,7 @@
             <a:avLst/>
           </a:prstGeom>
           <a:solidFill>
-            <a:srgbClr val="D4A017"/>
+            <a:srgbClr val="B45309"/>
           </a:solidFill>
           <a:ln>
             <a:noFill/>
@@ -4179,11 +4200,11 @@
             <a:r>
               <a:rPr sz="1200" b="1" i="0">
                 <a:solidFill>
-                  <a:srgbClr val="D4A017"/>
-                </a:solidFill>
-                <a:latin typeface="Calibri"/>
-              </a:rPr>
-              <a:t>CONTACTS</a:t>
+                  <a:srgbClr val="B45309"/>
+                </a:solidFill>
+                <a:latin typeface="Calibri"/>
+              </a:rPr>
+              <a:t>FEDWIKI</a:t>
             </a:r>
           </a:p>
         </p:txBody>
@@ -4222,7 +4243,7 @@
                 </a:solidFill>
                 <a:latin typeface="Calibri"/>
               </a:rPr>
-              <a:t>What the contact check found — and what to verify before calling</a:t>
+              <a:t>A FedWiki page for every co-op</a:t>
             </a:r>
           </a:p>
         </p:txBody>
@@ -4235,8 +4256,1941 @@
         </p:nvSpPr>
         <p:spPr>
           <a:xfrm>
+            <a:off x="521207" y="1453896"/>
+            <a:ext cx="5384714" cy="4672583"/>
+          </a:xfrm>
+          <a:prstGeom prst="rect">
+            <a:avLst/>
+          </a:prstGeom>
+          <a:solidFill>
+            <a:srgbClr val="E2E8F0"/>
+          </a:solidFill>
+          <a:ln>
+            <a:noFill/>
+          </a:ln>
+          <a:effectLst/>
+        </p:spPr>
+        <p:style>
+          <a:lnRef idx="1">
+            <a:schemeClr val="accent1"/>
+          </a:lnRef>
+          <a:fillRef idx="3">
+            <a:schemeClr val="accent1"/>
+          </a:fillRef>
+          <a:effectRef idx="2">
+            <a:schemeClr val="accent1"/>
+          </a:effectRef>
+          <a:fontRef idx="minor">
+            <a:schemeClr val="lt1"/>
+          </a:fontRef>
+        </p:style>
+        <p:txBody>
+          <a:bodyPr rtlCol="0" anchor="ctr"/>
+          <a:lstStyle/>
+          <a:p>
+            <a:pPr algn="ctr"/>
+          </a:p>
+        </p:txBody>
+      </p:sp>
+      <p:pic>
+        <p:nvPicPr>
+          <p:cNvPr id="6" name="Picture 5" descr="09-wiki-lineup.jpg"/>
+          <p:cNvPicPr>
+            <a:picLocks noChangeAspect="1"/>
+          </p:cNvPicPr>
+          <p:nvPr/>
+        </p:nvPicPr>
+        <p:blipFill>
+          <a:blip r:embed="rId2"/>
+          <a:stretch>
+            <a:fillRect/>
+          </a:stretch>
+        </p:blipFill>
+        <p:spPr>
+          <a:xfrm>
+            <a:off x="548640" y="1481328"/>
+            <a:ext cx="5329850" cy="4617720"/>
+          </a:xfrm>
+          <a:prstGeom prst="rect">
+            <a:avLst/>
+          </a:prstGeom>
+        </p:spPr>
+      </p:pic>
+      <p:sp>
+        <p:nvSpPr>
+          <p:cNvPr id="7" name="TextBox 6"/>
+          <p:cNvSpPr txBox="1"/>
+          <p:nvPr/>
+        </p:nvSpPr>
+        <p:spPr>
+          <a:xfrm>
+            <a:off x="8869680" y="1481328"/>
+            <a:ext cx="2926080" cy="274320"/>
+          </a:xfrm>
+          <a:prstGeom prst="rect">
+            <a:avLst/>
+          </a:prstGeom>
+          <a:noFill/>
+        </p:spPr>
+        <p:txBody>
+          <a:bodyPr wrap="square" anchor="t">
+            <a:spAutoFit/>
+          </a:bodyPr>
+          <a:lstStyle/>
+          <a:p>
+            <a:pPr algn="l">
+              <a:lnSpc>
+                <a:spcPct val="105000"/>
+              </a:lnSpc>
+            </a:pPr>
+            <a:r>
+              <a:rPr sz="1100" b="1" i="0">
+                <a:solidFill>
+                  <a:srgbClr val="B45309"/>
+                </a:solidFill>
+                <a:latin typeface="Calibri"/>
+              </a:rPr>
+              <a:t>WHAT YOU ARE SEEING</a:t>
+            </a:r>
+          </a:p>
+        </p:txBody>
+      </p:sp>
+      <p:sp>
+        <p:nvSpPr>
+          <p:cNvPr id="8" name="TextBox 7"/>
+          <p:cNvSpPr txBox="1"/>
+          <p:nvPr/>
+        </p:nvSpPr>
+        <p:spPr>
+          <a:xfrm>
+            <a:off x="8869680" y="1810512"/>
+            <a:ext cx="2834640" cy="4206240"/>
+          </a:xfrm>
+          <a:prstGeom prst="rect">
+            <a:avLst/>
+          </a:prstGeom>
+          <a:noFill/>
+        </p:spPr>
+        <p:txBody>
+          <a:bodyPr wrap="square">
+            <a:spAutoFit/>
+          </a:bodyPr>
+          <a:lstStyle/>
+          <a:p>
+            <a:pPr>
+              <a:lnSpc>
+                <a:spcPct val="110000"/>
+              </a:lnSpc>
+              <a:spcAft>
+                <a:spcPts val="800"/>
+              </a:spcAft>
+            </a:pPr>
+            <a:r>
+              <a:rPr sz="1400">
+                <a:solidFill>
+                  <a:srgbClr val="475569"/>
+                </a:solidFill>
+                <a:latin typeface="Calibri"/>
+              </a:rPr>
+              <a:t>—  23 pages — an index and one per co-op — in one drop file. Drag it onto any lineup, click a page, fork it.</a:t>
+            </a:r>
+          </a:p>
+          <a:p>
+            <a:pPr>
+              <a:lnSpc>
+                <a:spcPct val="110000"/>
+              </a:lnSpc>
+              <a:spcAft>
+                <a:spcPts val="800"/>
+              </a:spcAft>
+            </a:pPr>
+            <a:r>
+              <a:rPr sz="1400">
+                <a:solidFill>
+                  <a:srgbClr val="475569"/>
+                </a:solidFill>
+                <a:latin typeface="Calibri"/>
+              </a:rPr>
+              <a:t>—  Each page holds the record, the contact block with when and where it was checked, and the ties as wiki links, each with its source.</a:t>
+            </a:r>
+          </a:p>
+          <a:p>
+            <a:pPr>
+              <a:lnSpc>
+                <a:spcPct val="110000"/>
+              </a:lnSpc>
+              <a:spcAft>
+                <a:spcPts val="800"/>
+              </a:spcAft>
+            </a:pPr>
+            <a:r>
+              <a:rPr sz="1400">
+                <a:solidFill>
+                  <a:srgbClr val="475569"/>
+                </a:solidFill>
+                <a:latin typeface="Calibri"/>
+              </a:rPr>
+              <a:t>—  The index sits on the left; clicking a co-op opens its page beside it, the ordinary FedWiki way.</a:t>
+            </a:r>
+          </a:p>
+        </p:txBody>
+      </p:sp>
+      <p:sp>
+        <p:nvSpPr>
+          <p:cNvPr id="9" name="TextBox 8"/>
+          <p:cNvSpPr txBox="1"/>
+          <p:nvPr/>
+        </p:nvSpPr>
+        <p:spPr>
+          <a:xfrm>
+            <a:off x="548640" y="6190488"/>
+            <a:ext cx="8001000" cy="274320"/>
+          </a:xfrm>
+          <a:prstGeom prst="rect">
+            <a:avLst/>
+          </a:prstGeom>
+          <a:noFill/>
+        </p:spPr>
+        <p:txBody>
+          <a:bodyPr wrap="square" anchor="t">
+            <a:spAutoFit/>
+          </a:bodyPr>
+          <a:lstStyle/>
+          <a:p>
+            <a:pPr algn="l">
+              <a:lnSpc>
+                <a:spcPct val="105000"/>
+              </a:lnSpc>
+            </a:pPr>
+            <a:r>
+              <a:rPr sz="1000" b="0" i="1">
+                <a:solidFill>
+                  <a:srgbClr val="94A3B8"/>
+                </a:solidFill>
+                <a:latin typeface="Calibri"/>
+              </a:rPr>
+              <a:t>Screenshot · local wiki coops.localhost, index and Community Food Co-op</a:t>
+            </a:r>
+          </a:p>
+        </p:txBody>
+      </p:sp>
+      <p:sp>
+        <p:nvSpPr>
+          <p:cNvPr id="10" name="TextBox 9"/>
+          <p:cNvSpPr txBox="1"/>
+          <p:nvPr/>
+        </p:nvSpPr>
+        <p:spPr>
+          <a:xfrm>
+            <a:off x="548640" y="6446520"/>
+            <a:ext cx="5486400" cy="274320"/>
+          </a:xfrm>
+          <a:prstGeom prst="rect">
+            <a:avLst/>
+          </a:prstGeom>
+          <a:noFill/>
+        </p:spPr>
+        <p:txBody>
+          <a:bodyPr wrap="square" anchor="t">
+            <a:spAutoFit/>
+          </a:bodyPr>
+          <a:lstStyle/>
+          <a:p>
+            <a:pPr algn="l">
+              <a:lnSpc>
+                <a:spcPct val="105000"/>
+              </a:lnSpc>
+            </a:pPr>
+            <a:r>
+              <a:rPr sz="900" b="0" i="0">
+                <a:solidFill>
+                  <a:srgbClr val="94A3B8"/>
+                </a:solidFill>
+                <a:latin typeface="Calibri"/>
+              </a:rPr>
+              <a:t>Co-ops of Whatcom County · RCN</a:t>
+            </a:r>
+          </a:p>
+        </p:txBody>
+      </p:sp>
+      <p:sp>
+        <p:nvSpPr>
+          <p:cNvPr id="11" name="TextBox 10"/>
+          <p:cNvSpPr txBox="1"/>
+          <p:nvPr/>
+        </p:nvSpPr>
+        <p:spPr>
+          <a:xfrm>
+            <a:off x="11247120" y="6446520"/>
+            <a:ext cx="365760" cy="274320"/>
+          </a:xfrm>
+          <a:prstGeom prst="rect">
+            <a:avLst/>
+          </a:prstGeom>
+          <a:noFill/>
+        </p:spPr>
+        <p:txBody>
+          <a:bodyPr wrap="square" anchor="t">
+            <a:spAutoFit/>
+          </a:bodyPr>
+          <a:lstStyle/>
+          <a:p>
+            <a:pPr algn="r">
+              <a:lnSpc>
+                <a:spcPct val="105000"/>
+              </a:lnSpc>
+            </a:pPr>
+            <a:r>
+              <a:rPr sz="900" b="0" i="0">
+                <a:solidFill>
+                  <a:srgbClr val="94A3B8"/>
+                </a:solidFill>
+                <a:latin typeface="Calibri"/>
+              </a:rPr>
+              <a:t>11</a:t>
+            </a:r>
+          </a:p>
+        </p:txBody>
+      </p:sp>
+    </p:spTree>
+  </p:cSld>
+  <p:clrMapOvr>
+    <a:masterClrMapping/>
+  </p:clrMapOvr>
+</p:sld>
+</file>
+
+<file path=ppt/slides/slide12.xml><?xml version="1.0" encoding="utf-8"?>
+<p:sld xmlns:a="http://schemas.openxmlformats.org/drawingml/2006/main" xmlns:p="http://schemas.openxmlformats.org/presentationml/2006/main" xmlns:r="http://schemas.openxmlformats.org/officeDocument/2006/relationships">
+  <p:cSld>
+    <p:bg>
+      <p:bgPr>
+        <a:solidFill>
+          <a:srgbClr val="F8FAFC"/>
+        </a:solidFill>
+        <a:effectLst/>
+      </p:bgPr>
+    </p:bg>
+    <p:spTree>
+      <p:nvGrpSpPr>
+        <p:cNvPr id="1" name=""/>
+        <p:cNvGrpSpPr/>
+        <p:nvPr/>
+      </p:nvGrpSpPr>
+      <p:grpSpPr/>
+      <p:sp>
+        <p:nvSpPr>
+          <p:cNvPr id="2" name="Rectangle 1"/>
+          <p:cNvSpPr/>
+          <p:nvPr/>
+        </p:nvSpPr>
+        <p:spPr>
+          <a:xfrm>
+            <a:off x="548640" y="384048"/>
+            <a:ext cx="82296" cy="274320"/>
+          </a:xfrm>
+          <a:prstGeom prst="rect">
+            <a:avLst/>
+          </a:prstGeom>
+          <a:solidFill>
+            <a:srgbClr val="B45309"/>
+          </a:solidFill>
+          <a:ln>
+            <a:noFill/>
+          </a:ln>
+          <a:effectLst/>
+        </p:spPr>
+        <p:style>
+          <a:lnRef idx="1">
+            <a:schemeClr val="accent1"/>
+          </a:lnRef>
+          <a:fillRef idx="3">
+            <a:schemeClr val="accent1"/>
+          </a:fillRef>
+          <a:effectRef idx="2">
+            <a:schemeClr val="accent1"/>
+          </a:effectRef>
+          <a:fontRef idx="minor">
+            <a:schemeClr val="lt1"/>
+          </a:fontRef>
+        </p:style>
+        <p:txBody>
+          <a:bodyPr rtlCol="0" anchor="ctr"/>
+          <a:lstStyle/>
+          <a:p>
+            <a:pPr algn="ctr"/>
+          </a:p>
+        </p:txBody>
+      </p:sp>
+      <p:sp>
+        <p:nvSpPr>
+          <p:cNvPr id="3" name="TextBox 2"/>
+          <p:cNvSpPr txBox="1"/>
+          <p:nvPr/>
+        </p:nvSpPr>
+        <p:spPr>
+          <a:xfrm>
+            <a:off x="731520" y="365760"/>
+            <a:ext cx="7315200" cy="320040"/>
+          </a:xfrm>
+          <a:prstGeom prst="rect">
+            <a:avLst/>
+          </a:prstGeom>
+          <a:noFill/>
+        </p:spPr>
+        <p:txBody>
+          <a:bodyPr wrap="square" anchor="t">
+            <a:spAutoFit/>
+          </a:bodyPr>
+          <a:lstStyle/>
+          <a:p>
+            <a:pPr algn="l">
+              <a:lnSpc>
+                <a:spcPct val="105000"/>
+              </a:lnSpc>
+            </a:pPr>
+            <a:r>
+              <a:rPr sz="1200" b="1" i="0">
+                <a:solidFill>
+                  <a:srgbClr val="B45309"/>
+                </a:solidFill>
+                <a:latin typeface="Calibri"/>
+              </a:rPr>
+              <a:t>FEDWIKI — RCN GRAPH TOOL</a:t>
+            </a:r>
+          </a:p>
+        </p:txBody>
+      </p:sp>
+      <p:sp>
+        <p:nvSpPr>
+          <p:cNvPr id="4" name="TextBox 3"/>
+          <p:cNvSpPr txBox="1"/>
+          <p:nvPr/>
+        </p:nvSpPr>
+        <p:spPr>
+          <a:xfrm>
+            <a:off x="548640" y="713232"/>
+            <a:ext cx="11155680" cy="640080"/>
+          </a:xfrm>
+          <a:prstGeom prst="rect">
+            <a:avLst/>
+          </a:prstGeom>
+          <a:noFill/>
+        </p:spPr>
+        <p:txBody>
+          <a:bodyPr wrap="square" anchor="t">
+            <a:spAutoFit/>
+          </a:bodyPr>
+          <a:lstStyle/>
+          <a:p>
+            <a:pPr algn="l">
+              <a:lnSpc>
+                <a:spcPct val="105000"/>
+              </a:lnSpc>
+            </a:pPr>
+            <a:r>
+              <a:rPr sz="2800" b="1" i="0">
+                <a:solidFill>
+                  <a:srgbClr val="0F172A"/>
+                </a:solidFill>
+                <a:latin typeface="Calibri"/>
+              </a:rPr>
+              <a:t>Click a co-op in its graph and its page opens beside it</a:t>
+            </a:r>
+          </a:p>
+        </p:txBody>
+      </p:sp>
+      <p:sp>
+        <p:nvSpPr>
+          <p:cNvPr id="5" name="Rectangle 4"/>
+          <p:cNvSpPr/>
+          <p:nvPr/>
+        </p:nvSpPr>
+        <p:spPr>
+          <a:xfrm>
+            <a:off x="521207" y="1453896"/>
+            <a:ext cx="7804844" cy="4672583"/>
+          </a:xfrm>
+          <a:prstGeom prst="rect">
+            <a:avLst/>
+          </a:prstGeom>
+          <a:solidFill>
+            <a:srgbClr val="E2E8F0"/>
+          </a:solidFill>
+          <a:ln>
+            <a:noFill/>
+          </a:ln>
+          <a:effectLst/>
+        </p:spPr>
+        <p:style>
+          <a:lnRef idx="1">
+            <a:schemeClr val="accent1"/>
+          </a:lnRef>
+          <a:fillRef idx="3">
+            <a:schemeClr val="accent1"/>
+          </a:fillRef>
+          <a:effectRef idx="2">
+            <a:schemeClr val="accent1"/>
+          </a:effectRef>
+          <a:fontRef idx="minor">
+            <a:schemeClr val="lt1"/>
+          </a:fontRef>
+        </p:style>
+        <p:txBody>
+          <a:bodyPr rtlCol="0" anchor="ctr"/>
+          <a:lstStyle/>
+          <a:p>
+            <a:pPr algn="ctr"/>
+          </a:p>
+        </p:txBody>
+      </p:sp>
+      <p:pic>
+        <p:nvPicPr>
+          <p:cNvPr id="6" name="Picture 5" descr="10-wiki-graph-click.jpg"/>
+          <p:cNvPicPr>
+            <a:picLocks noChangeAspect="1"/>
+          </p:cNvPicPr>
+          <p:nvPr/>
+        </p:nvPicPr>
+        <p:blipFill>
+          <a:blip r:embed="rId2"/>
+          <a:stretch>
+            <a:fillRect/>
+          </a:stretch>
+        </p:blipFill>
+        <p:spPr>
+          <a:xfrm>
+            <a:off x="548640" y="1481328"/>
+            <a:ext cx="7749980" cy="4617720"/>
+          </a:xfrm>
+          <a:prstGeom prst="rect">
+            <a:avLst/>
+          </a:prstGeom>
+        </p:spPr>
+      </p:pic>
+      <p:sp>
+        <p:nvSpPr>
+          <p:cNvPr id="7" name="TextBox 6"/>
+          <p:cNvSpPr txBox="1"/>
+          <p:nvPr/>
+        </p:nvSpPr>
+        <p:spPr>
+          <a:xfrm>
+            <a:off x="8869680" y="1481328"/>
+            <a:ext cx="2926080" cy="274320"/>
+          </a:xfrm>
+          <a:prstGeom prst="rect">
+            <a:avLst/>
+          </a:prstGeom>
+          <a:noFill/>
+        </p:spPr>
+        <p:txBody>
+          <a:bodyPr wrap="square" anchor="t">
+            <a:spAutoFit/>
+          </a:bodyPr>
+          <a:lstStyle/>
+          <a:p>
+            <a:pPr algn="l">
+              <a:lnSpc>
+                <a:spcPct val="105000"/>
+              </a:lnSpc>
+            </a:pPr>
+            <a:r>
+              <a:rPr sz="1100" b="1" i="0">
+                <a:solidFill>
+                  <a:srgbClr val="B45309"/>
+                </a:solidFill>
+                <a:latin typeface="Calibri"/>
+              </a:rPr>
+              <a:t>WHAT YOU ARE SEEING</a:t>
+            </a:r>
+          </a:p>
+        </p:txBody>
+      </p:sp>
+      <p:sp>
+        <p:nvSpPr>
+          <p:cNvPr id="8" name="TextBox 7"/>
+          <p:cNvSpPr txBox="1"/>
+          <p:nvPr/>
+        </p:nvSpPr>
+        <p:spPr>
+          <a:xfrm>
+            <a:off x="8869680" y="1810512"/>
+            <a:ext cx="2834640" cy="4206240"/>
+          </a:xfrm>
+          <a:prstGeom prst="rect">
+            <a:avLst/>
+          </a:prstGeom>
+          <a:noFill/>
+        </p:spPr>
+        <p:txBody>
+          <a:bodyPr wrap="square">
+            <a:spAutoFit/>
+          </a:bodyPr>
+          <a:lstStyle/>
+          <a:p>
+            <a:pPr>
+              <a:lnSpc>
+                <a:spcPct val="110000"/>
+              </a:lnSpc>
+              <a:spcAft>
+                <a:spcPts val="800"/>
+              </a:spcAft>
+            </a:pPr>
+            <a:r>
+              <a:rPr sz="1400">
+                <a:solidFill>
+                  <a:srgbClr val="475569"/>
+                </a:solidFill>
+                <a:latin typeface="Calibri"/>
+              </a:rPr>
+              <a:t>—  Every page carries an rcngraph item: the co-op and its nearest neighbours, cut from Marc’s layout.</a:t>
+            </a:r>
+          </a:p>
+          <a:p>
+            <a:pPr>
+              <a:lnSpc>
+                <a:spcPct val="110000"/>
+              </a:lnSpc>
+              <a:spcAft>
+                <a:spcPts val="800"/>
+              </a:spcAft>
+            </a:pPr>
+            <a:r>
+              <a:rPr sz="1400">
+                <a:solidFill>
+                  <a:srgbClr val="475569"/>
+                </a:solidFill>
+                <a:latin typeface="Calibri"/>
+              </a:rPr>
+              <a:t>—  Every box is a wiki link. Here Cascade Cooperatives was clicked in the Food Co-op’s graph and opened on the right.</a:t>
+            </a:r>
+          </a:p>
+          <a:p>
+            <a:pPr>
+              <a:lnSpc>
+                <a:spcPct val="110000"/>
+              </a:lnSpc>
+              <a:spcAft>
+                <a:spcPts val="800"/>
+              </a:spcAft>
+            </a:pPr>
+            <a:r>
+              <a:rPr sz="1400">
+                <a:solidFill>
+                  <a:srgbClr val="475569"/>
+                </a:solidFill>
+                <a:latin typeface="Calibri"/>
+              </a:rPr>
+              <a:t>—  “Edit in Graph Tool” reopens the model; hover a box for its contact details, which travel in the model.</a:t>
+            </a:r>
+          </a:p>
+        </p:txBody>
+      </p:sp>
+      <p:sp>
+        <p:nvSpPr>
+          <p:cNvPr id="9" name="TextBox 8"/>
+          <p:cNvSpPr txBox="1"/>
+          <p:nvPr/>
+        </p:nvSpPr>
+        <p:spPr>
+          <a:xfrm>
+            <a:off x="548640" y="6190488"/>
+            <a:ext cx="8001000" cy="274320"/>
+          </a:xfrm>
+          <a:prstGeom prst="rect">
+            <a:avLst/>
+          </a:prstGeom>
+          <a:noFill/>
+        </p:spPr>
+        <p:txBody>
+          <a:bodyPr wrap="square" anchor="t">
+            <a:spAutoFit/>
+          </a:bodyPr>
+          <a:lstStyle/>
+          <a:p>
+            <a:pPr algn="l">
+              <a:lnSpc>
+                <a:spcPct val="105000"/>
+              </a:lnSpc>
+            </a:pPr>
+            <a:r>
+              <a:rPr sz="1000" b="0" i="1">
+                <a:solidFill>
+                  <a:srgbClr val="94A3B8"/>
+                </a:solidFill>
+                <a:latin typeface="Calibri"/>
+              </a:rPr>
+              <a:t>Screenshot · click on Cascade Cooperatives in the Food Co-op’s graph</a:t>
+            </a:r>
+          </a:p>
+        </p:txBody>
+      </p:sp>
+      <p:sp>
+        <p:nvSpPr>
+          <p:cNvPr id="10" name="TextBox 9"/>
+          <p:cNvSpPr txBox="1"/>
+          <p:nvPr/>
+        </p:nvSpPr>
+        <p:spPr>
+          <a:xfrm>
+            <a:off x="548640" y="6446520"/>
+            <a:ext cx="5486400" cy="274320"/>
+          </a:xfrm>
+          <a:prstGeom prst="rect">
+            <a:avLst/>
+          </a:prstGeom>
+          <a:noFill/>
+        </p:spPr>
+        <p:txBody>
+          <a:bodyPr wrap="square" anchor="t">
+            <a:spAutoFit/>
+          </a:bodyPr>
+          <a:lstStyle/>
+          <a:p>
+            <a:pPr algn="l">
+              <a:lnSpc>
+                <a:spcPct val="105000"/>
+              </a:lnSpc>
+            </a:pPr>
+            <a:r>
+              <a:rPr sz="900" b="0" i="0">
+                <a:solidFill>
+                  <a:srgbClr val="94A3B8"/>
+                </a:solidFill>
+                <a:latin typeface="Calibri"/>
+              </a:rPr>
+              <a:t>Co-ops of Whatcom County · RCN</a:t>
+            </a:r>
+          </a:p>
+        </p:txBody>
+      </p:sp>
+      <p:sp>
+        <p:nvSpPr>
+          <p:cNvPr id="11" name="TextBox 10"/>
+          <p:cNvSpPr txBox="1"/>
+          <p:nvPr/>
+        </p:nvSpPr>
+        <p:spPr>
+          <a:xfrm>
+            <a:off x="11247120" y="6446520"/>
+            <a:ext cx="365760" cy="274320"/>
+          </a:xfrm>
+          <a:prstGeom prst="rect">
+            <a:avLst/>
+          </a:prstGeom>
+          <a:noFill/>
+        </p:spPr>
+        <p:txBody>
+          <a:bodyPr wrap="square" anchor="t">
+            <a:spAutoFit/>
+          </a:bodyPr>
+          <a:lstStyle/>
+          <a:p>
+            <a:pPr algn="r">
+              <a:lnSpc>
+                <a:spcPct val="105000"/>
+              </a:lnSpc>
+            </a:pPr>
+            <a:r>
+              <a:rPr sz="900" b="0" i="0">
+                <a:solidFill>
+                  <a:srgbClr val="94A3B8"/>
+                </a:solidFill>
+                <a:latin typeface="Calibri"/>
+              </a:rPr>
+              <a:t>12</a:t>
+            </a:r>
+          </a:p>
+        </p:txBody>
+      </p:sp>
+    </p:spTree>
+  </p:cSld>
+  <p:clrMapOvr>
+    <a:masterClrMapping/>
+  </p:clrMapOvr>
+</p:sld>
+</file>
+
+<file path=ppt/slides/slide13.xml><?xml version="1.0" encoding="utf-8"?>
+<p:sld xmlns:a="http://schemas.openxmlformats.org/drawingml/2006/main" xmlns:p="http://schemas.openxmlformats.org/presentationml/2006/main" xmlns:r="http://schemas.openxmlformats.org/officeDocument/2006/relationships">
+  <p:cSld>
+    <p:bg>
+      <p:bgPr>
+        <a:solidFill>
+          <a:srgbClr val="F8FAFC"/>
+        </a:solidFill>
+        <a:effectLst/>
+      </p:bgPr>
+    </p:bg>
+    <p:spTree>
+      <p:nvGrpSpPr>
+        <p:cNvPr id="1" name=""/>
+        <p:cNvGrpSpPr/>
+        <p:nvPr/>
+      </p:nvGrpSpPr>
+      <p:grpSpPr/>
+      <p:sp>
+        <p:nvSpPr>
+          <p:cNvPr id="2" name="Rectangle 1"/>
+          <p:cNvSpPr/>
+          <p:nvPr/>
+        </p:nvSpPr>
+        <p:spPr>
+          <a:xfrm>
+            <a:off x="548640" y="384048"/>
+            <a:ext cx="82296" cy="274320"/>
+          </a:xfrm>
+          <a:prstGeom prst="rect">
+            <a:avLst/>
+          </a:prstGeom>
+          <a:solidFill>
+            <a:srgbClr val="B45309"/>
+          </a:solidFill>
+          <a:ln>
+            <a:noFill/>
+          </a:ln>
+          <a:effectLst/>
+        </p:spPr>
+        <p:style>
+          <a:lnRef idx="1">
+            <a:schemeClr val="accent1"/>
+          </a:lnRef>
+          <a:fillRef idx="3">
+            <a:schemeClr val="accent1"/>
+          </a:fillRef>
+          <a:effectRef idx="2">
+            <a:schemeClr val="accent1"/>
+          </a:effectRef>
+          <a:fontRef idx="minor">
+            <a:schemeClr val="lt1"/>
+          </a:fontRef>
+        </p:style>
+        <p:txBody>
+          <a:bodyPr rtlCol="0" anchor="ctr"/>
+          <a:lstStyle/>
+          <a:p>
+            <a:pPr algn="ctr"/>
+          </a:p>
+        </p:txBody>
+      </p:sp>
+      <p:sp>
+        <p:nvSpPr>
+          <p:cNvPr id="3" name="TextBox 2"/>
+          <p:cNvSpPr txBox="1"/>
+          <p:nvPr/>
+        </p:nvSpPr>
+        <p:spPr>
+          <a:xfrm>
+            <a:off x="731520" y="365760"/>
+            <a:ext cx="7315200" cy="320040"/>
+          </a:xfrm>
+          <a:prstGeom prst="rect">
+            <a:avLst/>
+          </a:prstGeom>
+          <a:noFill/>
+        </p:spPr>
+        <p:txBody>
+          <a:bodyPr wrap="square" anchor="t">
+            <a:spAutoFit/>
+          </a:bodyPr>
+          <a:lstStyle/>
+          <a:p>
+            <a:pPr algn="l">
+              <a:lnSpc>
+                <a:spcPct val="105000"/>
+              </a:lnSpc>
+            </a:pPr>
+            <a:r>
+              <a:rPr sz="1200" b="1" i="0">
+                <a:solidFill>
+                  <a:srgbClr val="B45309"/>
+                </a:solidFill>
+                <a:latin typeface="Calibri"/>
+              </a:rPr>
+              <a:t>FEDWIKI — MAP AND FRAME PLUGINS</a:t>
+            </a:r>
+          </a:p>
+        </p:txBody>
+      </p:sp>
+      <p:sp>
+        <p:nvSpPr>
+          <p:cNvPr id="4" name="TextBox 3"/>
+          <p:cNvSpPr txBox="1"/>
+          <p:nvPr/>
+        </p:nvSpPr>
+        <p:spPr>
+          <a:xfrm>
+            <a:off x="548640" y="713232"/>
+            <a:ext cx="11155680" cy="640080"/>
+          </a:xfrm>
+          <a:prstGeom prst="rect">
+            <a:avLst/>
+          </a:prstGeom>
+          <a:noFill/>
+        </p:spPr>
+        <p:txBody>
+          <a:bodyPr wrap="square" anchor="t">
+            <a:spAutoFit/>
+          </a:bodyPr>
+          <a:lstStyle/>
+          <a:p>
+            <a:pPr algn="l">
+              <a:lnSpc>
+                <a:spcPct val="105000"/>
+              </a:lnSpc>
+            </a:pPr>
+            <a:r>
+              <a:rPr sz="2800" b="1" i="0">
+                <a:solidFill>
+                  <a:srgbClr val="0F172A"/>
+                </a:solidFill>
+                <a:latin typeface="Calibri"/>
+              </a:rPr>
+              <a:t>Its map and its own website, inside the page</a:t>
+            </a:r>
+          </a:p>
+        </p:txBody>
+      </p:sp>
+      <p:sp>
+        <p:nvSpPr>
+          <p:cNvPr id="5" name="Rectangle 4"/>
+          <p:cNvSpPr/>
+          <p:nvPr/>
+        </p:nvSpPr>
+        <p:spPr>
+          <a:xfrm>
+            <a:off x="521207" y="1453896"/>
+            <a:ext cx="2743403" cy="4672583"/>
+          </a:xfrm>
+          <a:prstGeom prst="rect">
+            <a:avLst/>
+          </a:prstGeom>
+          <a:solidFill>
+            <a:srgbClr val="E2E8F0"/>
+          </a:solidFill>
+          <a:ln>
+            <a:noFill/>
+          </a:ln>
+          <a:effectLst/>
+        </p:spPr>
+        <p:style>
+          <a:lnRef idx="1">
+            <a:schemeClr val="accent1"/>
+          </a:lnRef>
+          <a:fillRef idx="3">
+            <a:schemeClr val="accent1"/>
+          </a:fillRef>
+          <a:effectRef idx="2">
+            <a:schemeClr val="accent1"/>
+          </a:effectRef>
+          <a:fontRef idx="minor">
+            <a:schemeClr val="lt1"/>
+          </a:fontRef>
+        </p:style>
+        <p:txBody>
+          <a:bodyPr rtlCol="0" anchor="ctr"/>
+          <a:lstStyle/>
+          <a:p>
+            <a:pPr algn="ctr"/>
+          </a:p>
+        </p:txBody>
+      </p:sp>
+      <p:pic>
+        <p:nvPicPr>
+          <p:cNvPr id="6" name="Picture 5" descr="11-wiki-map-site.jpg"/>
+          <p:cNvPicPr>
+            <a:picLocks noChangeAspect="1"/>
+          </p:cNvPicPr>
+          <p:nvPr/>
+        </p:nvPicPr>
+        <p:blipFill>
+          <a:blip r:embed="rId2"/>
+          <a:stretch>
+            <a:fillRect/>
+          </a:stretch>
+        </p:blipFill>
+        <p:spPr>
+          <a:xfrm>
+            <a:off x="548640" y="1481328"/>
+            <a:ext cx="2688539" cy="4617720"/>
+          </a:xfrm>
+          <a:prstGeom prst="rect">
+            <a:avLst/>
+          </a:prstGeom>
+        </p:spPr>
+      </p:pic>
+      <p:sp>
+        <p:nvSpPr>
+          <p:cNvPr id="7" name="TextBox 6"/>
+          <p:cNvSpPr txBox="1"/>
+          <p:nvPr/>
+        </p:nvSpPr>
+        <p:spPr>
+          <a:xfrm>
+            <a:off x="4023360" y="1481328"/>
+            <a:ext cx="7315200" cy="274320"/>
+          </a:xfrm>
+          <a:prstGeom prst="rect">
+            <a:avLst/>
+          </a:prstGeom>
+          <a:noFill/>
+        </p:spPr>
+        <p:txBody>
+          <a:bodyPr wrap="square" anchor="t">
+            <a:spAutoFit/>
+          </a:bodyPr>
+          <a:lstStyle/>
+          <a:p>
+            <a:pPr algn="l">
+              <a:lnSpc>
+                <a:spcPct val="105000"/>
+              </a:lnSpc>
+            </a:pPr>
+            <a:r>
+              <a:rPr sz="1100" b="1" i="0">
+                <a:solidFill>
+                  <a:srgbClr val="B45309"/>
+                </a:solidFill>
+                <a:latin typeface="Calibri"/>
+              </a:rPr>
+              <a:t>WHAT YOU ARE SEEING</a:t>
+            </a:r>
+          </a:p>
+        </p:txBody>
+      </p:sp>
+      <p:sp>
+        <p:nvSpPr>
+          <p:cNvPr id="8" name="TextBox 7"/>
+          <p:cNvSpPr txBox="1"/>
+          <p:nvPr/>
+        </p:nvSpPr>
+        <p:spPr>
+          <a:xfrm>
+            <a:off x="4023360" y="1810512"/>
+            <a:ext cx="7589520" cy="4206240"/>
+          </a:xfrm>
+          <a:prstGeom prst="rect">
+            <a:avLst/>
+          </a:prstGeom>
+          <a:noFill/>
+        </p:spPr>
+        <p:txBody>
+          <a:bodyPr wrap="square">
+            <a:spAutoFit/>
+          </a:bodyPr>
+          <a:lstStyle/>
+          <a:p>
+            <a:pPr>
+              <a:lnSpc>
+                <a:spcPct val="110000"/>
+              </a:lnSpc>
+              <a:spcAft>
+                <a:spcPts val="800"/>
+              </a:spcAft>
+            </a:pPr>
+            <a:r>
+              <a:rPr sz="1500">
+                <a:solidFill>
+                  <a:srgbClr val="475569"/>
+                </a:solidFill>
+                <a:latin typeface="Calibri"/>
+              </a:rPr>
+              <a:t>—  A Map item — FedWiki’s own map plugin — shows this co-op and the co-ops it is tied to. Each point is a wiki link to that co-op’s page.</a:t>
+            </a:r>
+          </a:p>
+          <a:p>
+            <a:pPr>
+              <a:lnSpc>
+                <a:spcPct val="110000"/>
+              </a:lnSpc>
+              <a:spcAft>
+                <a:spcPts val="800"/>
+              </a:spcAft>
+            </a:pPr>
+            <a:r>
+              <a:rPr sz="1500">
+                <a:solidFill>
+                  <a:srgbClr val="475569"/>
+                </a:solidFill>
+                <a:latin typeface="Calibri"/>
+              </a:rPr>
+              <a:t>—  The map is plain text, one line per point, so anyone can edit it in the page. It works on any wiki with nothing uploaded.</a:t>
+            </a:r>
+          </a:p>
+          <a:p>
+            <a:pPr>
+              <a:lnSpc>
+                <a:spcPct val="110000"/>
+              </a:lnSpc>
+              <a:spcAft>
+                <a:spcPts val="800"/>
+              </a:spcAft>
+            </a:pPr>
+            <a:r>
+              <a:rPr sz="1500">
+                <a:solidFill>
+                  <a:srgbClr val="475569"/>
+                </a:solidFill>
+                <a:latin typeface="Calibri"/>
+              </a:rPr>
+              <a:t>—  It draws points, not ties; the graph just above carries the ties. The table’s Map button draws them on a map.</a:t>
+            </a:r>
+          </a:p>
+          <a:p>
+            <a:pPr>
+              <a:lnSpc>
+                <a:spcPct val="110000"/>
+              </a:lnSpc>
+              <a:spcAft>
+                <a:spcPts val="800"/>
+              </a:spcAft>
+            </a:pPr>
+            <a:r>
+              <a:rPr sz="1500">
+                <a:solidFill>
+                  <a:srgbClr val="475569"/>
+                </a:solidFill>
+                <a:latin typeface="Calibri"/>
+              </a:rPr>
+              <a:t>—  A Frame item — used only for this — shows the co-op’s own website, live, under the map.</a:t>
+            </a:r>
+          </a:p>
+          <a:p>
+            <a:pPr>
+              <a:lnSpc>
+                <a:spcPct val="110000"/>
+              </a:lnSpc>
+              <a:spcAft>
+                <a:spcPts val="800"/>
+              </a:spcAft>
+            </a:pPr>
+            <a:r>
+              <a:rPr sz="1500">
+                <a:solidFill>
+                  <a:srgbClr val="475569"/>
+                </a:solidFill>
+                <a:latin typeface="Calibri"/>
+              </a:rPr>
+              <a:t>—  11 of the 22 sites show inside the page. The other 11 refuse to be framed, put up a bot check, are down, or have no site; those pages link out and say why.</a:t>
+            </a:r>
+          </a:p>
+        </p:txBody>
+      </p:sp>
+      <p:sp>
+        <p:nvSpPr>
+          <p:cNvPr id="9" name="TextBox 8"/>
+          <p:cNvSpPr txBox="1"/>
+          <p:nvPr/>
+        </p:nvSpPr>
+        <p:spPr>
+          <a:xfrm>
+            <a:off x="548640" y="6190488"/>
+            <a:ext cx="7315200" cy="274320"/>
+          </a:xfrm>
+          <a:prstGeom prst="rect">
+            <a:avLst/>
+          </a:prstGeom>
+          <a:noFill/>
+        </p:spPr>
+        <p:txBody>
+          <a:bodyPr wrap="square" anchor="t">
+            <a:spAutoFit/>
+          </a:bodyPr>
+          <a:lstStyle/>
+          <a:p>
+            <a:pPr algn="l">
+              <a:lnSpc>
+                <a:spcPct val="105000"/>
+              </a:lnSpc>
+            </a:pPr>
+            <a:r>
+              <a:rPr sz="1000" b="0" i="1">
+                <a:solidFill>
+                  <a:srgbClr val="94A3B8"/>
+                </a:solidFill>
+                <a:latin typeface="Calibri"/>
+              </a:rPr>
+              <a:t>Screenshot · Community Food Co-op, scrolled to its map and website</a:t>
+            </a:r>
+          </a:p>
+        </p:txBody>
+      </p:sp>
+      <p:sp>
+        <p:nvSpPr>
+          <p:cNvPr id="10" name="TextBox 9"/>
+          <p:cNvSpPr txBox="1"/>
+          <p:nvPr/>
+        </p:nvSpPr>
+        <p:spPr>
+          <a:xfrm>
+            <a:off x="548640" y="6446520"/>
+            <a:ext cx="5486400" cy="274320"/>
+          </a:xfrm>
+          <a:prstGeom prst="rect">
+            <a:avLst/>
+          </a:prstGeom>
+          <a:noFill/>
+        </p:spPr>
+        <p:txBody>
+          <a:bodyPr wrap="square" anchor="t">
+            <a:spAutoFit/>
+          </a:bodyPr>
+          <a:lstStyle/>
+          <a:p>
+            <a:pPr algn="l">
+              <a:lnSpc>
+                <a:spcPct val="105000"/>
+              </a:lnSpc>
+            </a:pPr>
+            <a:r>
+              <a:rPr sz="900" b="0" i="0">
+                <a:solidFill>
+                  <a:srgbClr val="94A3B8"/>
+                </a:solidFill>
+                <a:latin typeface="Calibri"/>
+              </a:rPr>
+              <a:t>Co-ops of Whatcom County · RCN</a:t>
+            </a:r>
+          </a:p>
+        </p:txBody>
+      </p:sp>
+      <p:sp>
+        <p:nvSpPr>
+          <p:cNvPr id="11" name="TextBox 10"/>
+          <p:cNvSpPr txBox="1"/>
+          <p:nvPr/>
+        </p:nvSpPr>
+        <p:spPr>
+          <a:xfrm>
+            <a:off x="11247120" y="6446520"/>
+            <a:ext cx="365760" cy="274320"/>
+          </a:xfrm>
+          <a:prstGeom prst="rect">
+            <a:avLst/>
+          </a:prstGeom>
+          <a:noFill/>
+        </p:spPr>
+        <p:txBody>
+          <a:bodyPr wrap="square" anchor="t">
+            <a:spAutoFit/>
+          </a:bodyPr>
+          <a:lstStyle/>
+          <a:p>
+            <a:pPr algn="r">
+              <a:lnSpc>
+                <a:spcPct val="105000"/>
+              </a:lnSpc>
+            </a:pPr>
+            <a:r>
+              <a:rPr sz="900" b="0" i="0">
+                <a:solidFill>
+                  <a:srgbClr val="94A3B8"/>
+                </a:solidFill>
+                <a:latin typeface="Calibri"/>
+              </a:rPr>
+              <a:t>13</a:t>
+            </a:r>
+          </a:p>
+        </p:txBody>
+      </p:sp>
+    </p:spTree>
+  </p:cSld>
+  <p:clrMapOvr>
+    <a:masterClrMapping/>
+  </p:clrMapOvr>
+</p:sld>
+</file>
+
+<file path=ppt/slides/slide14.xml><?xml version="1.0" encoding="utf-8"?>
+<p:sld xmlns:a="http://schemas.openxmlformats.org/drawingml/2006/main" xmlns:p="http://schemas.openxmlformats.org/presentationml/2006/main" xmlns:r="http://schemas.openxmlformats.org/officeDocument/2006/relationships">
+  <p:cSld>
+    <p:bg>
+      <p:bgPr>
+        <a:solidFill>
+          <a:srgbClr val="F8FAFC"/>
+        </a:solidFill>
+        <a:effectLst/>
+      </p:bgPr>
+    </p:bg>
+    <p:spTree>
+      <p:nvGrpSpPr>
+        <p:cNvPr id="1" name=""/>
+        <p:cNvGrpSpPr/>
+        <p:nvPr/>
+      </p:nvGrpSpPr>
+      <p:grpSpPr/>
+      <p:sp>
+        <p:nvSpPr>
+          <p:cNvPr id="2" name="Rectangle 1"/>
+          <p:cNvSpPr/>
+          <p:nvPr/>
+        </p:nvSpPr>
+        <p:spPr>
+          <a:xfrm>
+            <a:off x="548640" y="384048"/>
+            <a:ext cx="82296" cy="274320"/>
+          </a:xfrm>
+          <a:prstGeom prst="rect">
+            <a:avLst/>
+          </a:prstGeom>
+          <a:solidFill>
+            <a:srgbClr val="B45309"/>
+          </a:solidFill>
+          <a:ln>
+            <a:noFill/>
+          </a:ln>
+          <a:effectLst/>
+        </p:spPr>
+        <p:style>
+          <a:lnRef idx="1">
+            <a:schemeClr val="accent1"/>
+          </a:lnRef>
+          <a:fillRef idx="3">
+            <a:schemeClr val="accent1"/>
+          </a:fillRef>
+          <a:effectRef idx="2">
+            <a:schemeClr val="accent1"/>
+          </a:effectRef>
+          <a:fontRef idx="minor">
+            <a:schemeClr val="lt1"/>
+          </a:fontRef>
+        </p:style>
+        <p:txBody>
+          <a:bodyPr rtlCol="0" anchor="ctr"/>
+          <a:lstStyle/>
+          <a:p>
+            <a:pPr algn="ctr"/>
+          </a:p>
+        </p:txBody>
+      </p:sp>
+      <p:sp>
+        <p:nvSpPr>
+          <p:cNvPr id="3" name="TextBox 2"/>
+          <p:cNvSpPr txBox="1"/>
+          <p:nvPr/>
+        </p:nvSpPr>
+        <p:spPr>
+          <a:xfrm>
+            <a:off x="731520" y="365760"/>
+            <a:ext cx="7315200" cy="320040"/>
+          </a:xfrm>
+          <a:prstGeom prst="rect">
+            <a:avLst/>
+          </a:prstGeom>
+          <a:noFill/>
+        </p:spPr>
+        <p:txBody>
+          <a:bodyPr wrap="square" anchor="t">
+            <a:spAutoFit/>
+          </a:bodyPr>
+          <a:lstStyle/>
+          <a:p>
+            <a:pPr algn="l">
+              <a:lnSpc>
+                <a:spcPct val="105000"/>
+              </a:lnSpc>
+            </a:pPr>
+            <a:r>
+              <a:rPr sz="1200" b="1" i="0">
+                <a:solidFill>
+                  <a:srgbClr val="B45309"/>
+                </a:solidFill>
+                <a:latin typeface="Calibri"/>
+              </a:rPr>
+              <a:t>FEDWIKI — TABLE PLUGIN</a:t>
+            </a:r>
+          </a:p>
+        </p:txBody>
+      </p:sp>
+      <p:sp>
+        <p:nvSpPr>
+          <p:cNvPr id="4" name="TextBox 3"/>
+          <p:cNvSpPr txBox="1"/>
+          <p:nvPr/>
+        </p:nvSpPr>
+        <p:spPr>
+          <a:xfrm>
+            <a:off x="548640" y="713232"/>
+            <a:ext cx="11155680" cy="640080"/>
+          </a:xfrm>
+          <a:prstGeom prst="rect">
+            <a:avLst/>
+          </a:prstGeom>
+          <a:noFill/>
+        </p:spPr>
+        <p:txBody>
+          <a:bodyPr wrap="square" anchor="t">
+            <a:spAutoFit/>
+          </a:bodyPr>
+          <a:lstStyle/>
+          <a:p>
+            <a:pPr algn="l">
+              <a:lnSpc>
+                <a:spcPct val="105000"/>
+              </a:lnSpc>
+            </a:pPr>
+            <a:r>
+              <a:rPr sz="2800" b="1" i="0">
+                <a:solidFill>
+                  <a:srgbClr val="0F172A"/>
+                </a:solidFill>
+                <a:latin typeface="Calibri"/>
+              </a:rPr>
+              <a:t>The FedWiki table plugin: all 22 co-ops on the index page</a:t>
+            </a:r>
+          </a:p>
+        </p:txBody>
+      </p:sp>
+      <p:sp>
+        <p:nvSpPr>
+          <p:cNvPr id="5" name="Rectangle 4"/>
+          <p:cNvSpPr/>
+          <p:nvPr/>
+        </p:nvSpPr>
+        <p:spPr>
+          <a:xfrm>
+            <a:off x="521207" y="1453896"/>
+            <a:ext cx="3255264" cy="2138845"/>
+          </a:xfrm>
+          <a:prstGeom prst="rect">
+            <a:avLst/>
+          </a:prstGeom>
+          <a:solidFill>
+            <a:srgbClr val="E2E8F0"/>
+          </a:solidFill>
+          <a:ln>
+            <a:noFill/>
+          </a:ln>
+          <a:effectLst/>
+        </p:spPr>
+        <p:style>
+          <a:lnRef idx="1">
+            <a:schemeClr val="accent1"/>
+          </a:lnRef>
+          <a:fillRef idx="3">
+            <a:schemeClr val="accent1"/>
+          </a:fillRef>
+          <a:effectRef idx="2">
+            <a:schemeClr val="accent1"/>
+          </a:effectRef>
+          <a:fontRef idx="minor">
+            <a:schemeClr val="lt1"/>
+          </a:fontRef>
+        </p:style>
+        <p:txBody>
+          <a:bodyPr rtlCol="0" anchor="ctr"/>
+          <a:lstStyle/>
+          <a:p>
+            <a:pPr algn="ctr"/>
+          </a:p>
+        </p:txBody>
+      </p:sp>
+      <p:pic>
+        <p:nvPicPr>
+          <p:cNvPr id="6" name="Picture 5" descr="12-wiki-table-item.jpg"/>
+          <p:cNvPicPr>
+            <a:picLocks noChangeAspect="1"/>
+          </p:cNvPicPr>
+          <p:nvPr/>
+        </p:nvPicPr>
+        <p:blipFill>
+          <a:blip r:embed="rId2"/>
+          <a:stretch>
+            <a:fillRect/>
+          </a:stretch>
+        </p:blipFill>
+        <p:spPr>
+          <a:xfrm>
+            <a:off x="548640" y="1481328"/>
+            <a:ext cx="3200400" cy="2083981"/>
+          </a:xfrm>
+          <a:prstGeom prst="rect">
+            <a:avLst/>
+          </a:prstGeom>
+        </p:spPr>
+      </p:pic>
+      <p:sp>
+        <p:nvSpPr>
+          <p:cNvPr id="7" name="TextBox 6"/>
+          <p:cNvSpPr txBox="1"/>
+          <p:nvPr/>
+        </p:nvSpPr>
+        <p:spPr>
+          <a:xfrm>
+            <a:off x="548640" y="3638461"/>
+            <a:ext cx="3840480" cy="274320"/>
+          </a:xfrm>
+          <a:prstGeom prst="rect">
+            <a:avLst/>
+          </a:prstGeom>
+          <a:noFill/>
+        </p:spPr>
+        <p:txBody>
+          <a:bodyPr wrap="square" anchor="t">
+            <a:spAutoFit/>
+          </a:bodyPr>
+          <a:lstStyle/>
+          <a:p>
+            <a:pPr algn="l">
+              <a:lnSpc>
+                <a:spcPct val="105000"/>
+              </a:lnSpc>
+            </a:pPr>
+            <a:r>
+              <a:rPr sz="1000" b="0" i="1">
+                <a:solidFill>
+                  <a:srgbClr val="94A3B8"/>
+                </a:solidFill>
+                <a:latin typeface="Calibri"/>
+              </a:rPr>
+              <a:t>The rcntable item on the index page</a:t>
+            </a:r>
+          </a:p>
+        </p:txBody>
+      </p:sp>
+      <p:sp>
+        <p:nvSpPr>
+          <p:cNvPr id="8" name="TextBox 7"/>
+          <p:cNvSpPr txBox="1"/>
+          <p:nvPr/>
+        </p:nvSpPr>
+        <p:spPr>
+          <a:xfrm>
+            <a:off x="548640" y="3976789"/>
+            <a:ext cx="3931920" cy="2651760"/>
+          </a:xfrm>
+          <a:prstGeom prst="rect">
+            <a:avLst/>
+          </a:prstGeom>
+          <a:noFill/>
+        </p:spPr>
+        <p:txBody>
+          <a:bodyPr wrap="square">
+            <a:spAutoFit/>
+          </a:bodyPr>
+          <a:lstStyle/>
+          <a:p>
+            <a:pPr>
+              <a:lnSpc>
+                <a:spcPct val="110000"/>
+              </a:lnSpc>
+              <a:spcAft>
+                <a:spcPts val="300"/>
+              </a:spcAft>
+            </a:pPr>
+            <a:r>
+              <a:rPr sz="1200">
+                <a:solidFill>
+                  <a:srgbClr val="475569"/>
+                </a:solidFill>
+                <a:latin typeface="Calibri"/>
+              </a:rPr>
+              <a:t>—  The item names the records: database whatcomcoops, kind Coop.</a:t>
+            </a:r>
+          </a:p>
+          <a:p>
+            <a:pPr>
+              <a:lnSpc>
+                <a:spcPct val="110000"/>
+              </a:lnSpc>
+              <a:spcAft>
+                <a:spcPts val="300"/>
+              </a:spcAft>
+            </a:pPr>
+            <a:r>
+              <a:rPr sz="1200">
+                <a:solidFill>
+                  <a:srgbClr val="475569"/>
+                </a:solidFill>
+                <a:latin typeface="Calibri"/>
+              </a:rPr>
+              <a:t>—  Open Table ↗ opens the RCN Table beside the wiki — the same table as slide 9.</a:t>
+            </a:r>
+          </a:p>
+          <a:p>
+            <a:pPr>
+              <a:lnSpc>
+                <a:spcPct val="110000"/>
+              </a:lnSpc>
+              <a:spcAft>
+                <a:spcPts val="300"/>
+              </a:spcAft>
+            </a:pPr>
+            <a:r>
+              <a:rPr sz="1200">
+                <a:solidFill>
+                  <a:srgbClr val="475569"/>
+                </a:solidFill>
+                <a:latin typeface="Calibri"/>
+              </a:rPr>
+              <a:t>—  At home it reads Neo4j live through substrate/api.py. On a hosted wiki it reads the exported folder in the site’s own assets, so each site is its own database.</a:t>
+            </a:r>
+          </a:p>
+          <a:p>
+            <a:pPr>
+              <a:lnSpc>
+                <a:spcPct val="110000"/>
+              </a:lnSpc>
+              <a:spcAft>
+                <a:spcPts val="300"/>
+              </a:spcAft>
+            </a:pPr>
+            <a:r>
+              <a:rPr sz="1200">
+                <a:solidFill>
+                  <a:srgbClr val="475569"/>
+                </a:solidFill>
+                <a:latin typeface="Calibri"/>
+              </a:rPr>
+              <a:t>—  Every name in the table opens that co-op’s page in the lineup.</a:t>
+            </a:r>
+          </a:p>
+        </p:txBody>
+      </p:sp>
+      <p:sp>
+        <p:nvSpPr>
+          <p:cNvPr id="9" name="Rectangle 8"/>
+          <p:cNvSpPr/>
+          <p:nvPr/>
+        </p:nvSpPr>
+        <p:spPr>
+          <a:xfrm>
+            <a:off x="4727448" y="1453896"/>
+            <a:ext cx="6912864" cy="4068451"/>
+          </a:xfrm>
+          <a:prstGeom prst="rect">
+            <a:avLst/>
+          </a:prstGeom>
+          <a:solidFill>
+            <a:srgbClr val="E2E8F0"/>
+          </a:solidFill>
+          <a:ln>
+            <a:noFill/>
+          </a:ln>
+          <a:effectLst/>
+        </p:spPr>
+        <p:style>
+          <a:lnRef idx="1">
+            <a:schemeClr val="accent1"/>
+          </a:lnRef>
+          <a:fillRef idx="3">
+            <a:schemeClr val="accent1"/>
+          </a:fillRef>
+          <a:effectRef idx="2">
+            <a:schemeClr val="accent1"/>
+          </a:effectRef>
+          <a:fontRef idx="minor">
+            <a:schemeClr val="lt1"/>
+          </a:fontRef>
+        </p:style>
+        <p:txBody>
+          <a:bodyPr rtlCol="0" anchor="ctr"/>
+          <a:lstStyle/>
+          <a:p>
+            <a:pPr algn="ctr"/>
+          </a:p>
+        </p:txBody>
+      </p:sp>
+      <p:pic>
+        <p:nvPicPr>
+          <p:cNvPr id="10" name="Picture 9" descr="07-table.jpg"/>
+          <p:cNvPicPr>
+            <a:picLocks noChangeAspect="1"/>
+          </p:cNvPicPr>
+          <p:nvPr/>
+        </p:nvPicPr>
+        <p:blipFill>
+          <a:blip r:embed="rId3"/>
+          <a:stretch>
+            <a:fillRect/>
+          </a:stretch>
+        </p:blipFill>
+        <p:spPr>
+          <a:xfrm>
+            <a:off x="4754880" y="1481328"/>
+            <a:ext cx="6858000" cy="4013587"/>
+          </a:xfrm>
+          <a:prstGeom prst="rect">
+            <a:avLst/>
+          </a:prstGeom>
+        </p:spPr>
+      </p:pic>
+      <p:sp>
+        <p:nvSpPr>
+          <p:cNvPr id="11" name="TextBox 10"/>
+          <p:cNvSpPr txBox="1"/>
+          <p:nvPr/>
+        </p:nvSpPr>
+        <p:spPr>
+          <a:xfrm>
+            <a:off x="4754880" y="5568067"/>
+            <a:ext cx="6858000" cy="274320"/>
+          </a:xfrm>
+          <a:prstGeom prst="rect">
+            <a:avLst/>
+          </a:prstGeom>
+          <a:noFill/>
+        </p:spPr>
+        <p:txBody>
+          <a:bodyPr wrap="square" anchor="t">
+            <a:spAutoFit/>
+          </a:bodyPr>
+          <a:lstStyle/>
+          <a:p>
+            <a:pPr algn="l">
+              <a:lnSpc>
+                <a:spcPct val="105000"/>
+              </a:lnSpc>
+            </a:pPr>
+            <a:r>
+              <a:rPr sz="1000" b="0" i="1">
+                <a:solidFill>
+                  <a:srgbClr val="94A3B8"/>
+                </a:solidFill>
+                <a:latin typeface="Calibri"/>
+              </a:rPr>
+              <a:t>What Open Table shows</a:t>
+            </a:r>
+          </a:p>
+        </p:txBody>
+      </p:sp>
+      <p:sp>
+        <p:nvSpPr>
+          <p:cNvPr id="12" name="TextBox 11"/>
+          <p:cNvSpPr txBox="1"/>
+          <p:nvPr/>
+        </p:nvSpPr>
+        <p:spPr>
+          <a:xfrm>
+            <a:off x="548640" y="6446520"/>
+            <a:ext cx="5486400" cy="274320"/>
+          </a:xfrm>
+          <a:prstGeom prst="rect">
+            <a:avLst/>
+          </a:prstGeom>
+          <a:noFill/>
+        </p:spPr>
+        <p:txBody>
+          <a:bodyPr wrap="square" anchor="t">
+            <a:spAutoFit/>
+          </a:bodyPr>
+          <a:lstStyle/>
+          <a:p>
+            <a:pPr algn="l">
+              <a:lnSpc>
+                <a:spcPct val="105000"/>
+              </a:lnSpc>
+            </a:pPr>
+            <a:r>
+              <a:rPr sz="900" b="0" i="0">
+                <a:solidFill>
+                  <a:srgbClr val="94A3B8"/>
+                </a:solidFill>
+                <a:latin typeface="Calibri"/>
+              </a:rPr>
+              <a:t>Co-ops of Whatcom County · RCN</a:t>
+            </a:r>
+          </a:p>
+        </p:txBody>
+      </p:sp>
+      <p:sp>
+        <p:nvSpPr>
+          <p:cNvPr id="13" name="TextBox 12"/>
+          <p:cNvSpPr txBox="1"/>
+          <p:nvPr/>
+        </p:nvSpPr>
+        <p:spPr>
+          <a:xfrm>
+            <a:off x="11247120" y="6446520"/>
+            <a:ext cx="365760" cy="274320"/>
+          </a:xfrm>
+          <a:prstGeom prst="rect">
+            <a:avLst/>
+          </a:prstGeom>
+          <a:noFill/>
+        </p:spPr>
+        <p:txBody>
+          <a:bodyPr wrap="square" anchor="t">
+            <a:spAutoFit/>
+          </a:bodyPr>
+          <a:lstStyle/>
+          <a:p>
+            <a:pPr algn="r">
+              <a:lnSpc>
+                <a:spcPct val="105000"/>
+              </a:lnSpc>
+            </a:pPr>
+            <a:r>
+              <a:rPr sz="900" b="0" i="0">
+                <a:solidFill>
+                  <a:srgbClr val="94A3B8"/>
+                </a:solidFill>
+                <a:latin typeface="Calibri"/>
+              </a:rPr>
+              <a:t>14</a:t>
+            </a:r>
+          </a:p>
+        </p:txBody>
+      </p:sp>
+    </p:spTree>
+  </p:cSld>
+  <p:clrMapOvr>
+    <a:masterClrMapping/>
+  </p:clrMapOvr>
+</p:sld>
+</file>
+
+<file path=ppt/slides/slide15.xml><?xml version="1.0" encoding="utf-8"?>
+<p:sld xmlns:a="http://schemas.openxmlformats.org/drawingml/2006/main" xmlns:p="http://schemas.openxmlformats.org/presentationml/2006/main" xmlns:r="http://schemas.openxmlformats.org/officeDocument/2006/relationships">
+  <p:cSld>
+    <p:bg>
+      <p:bgPr>
+        <a:solidFill>
+          <a:srgbClr val="F8FAFC"/>
+        </a:solidFill>
+        <a:effectLst/>
+      </p:bgPr>
+    </p:bg>
+    <p:spTree>
+      <p:nvGrpSpPr>
+        <p:cNvPr id="1" name=""/>
+        <p:cNvGrpSpPr/>
+        <p:nvPr/>
+      </p:nvGrpSpPr>
+      <p:grpSpPr/>
+      <p:sp>
+        <p:nvSpPr>
+          <p:cNvPr id="2" name="Rectangle 1"/>
+          <p:cNvSpPr/>
+          <p:nvPr/>
+        </p:nvSpPr>
+        <p:spPr>
+          <a:xfrm>
+            <a:off x="548640" y="384048"/>
+            <a:ext cx="82296" cy="274320"/>
+          </a:xfrm>
+          <a:prstGeom prst="rect">
+            <a:avLst/>
+          </a:prstGeom>
+          <a:solidFill>
+            <a:srgbClr val="B45309"/>
+          </a:solidFill>
+          <a:ln>
+            <a:noFill/>
+          </a:ln>
+          <a:effectLst/>
+        </p:spPr>
+        <p:style>
+          <a:lnRef idx="1">
+            <a:schemeClr val="accent1"/>
+          </a:lnRef>
+          <a:fillRef idx="3">
+            <a:schemeClr val="accent1"/>
+          </a:fillRef>
+          <a:effectRef idx="2">
+            <a:schemeClr val="accent1"/>
+          </a:effectRef>
+          <a:fontRef idx="minor">
+            <a:schemeClr val="lt1"/>
+          </a:fontRef>
+        </p:style>
+        <p:txBody>
+          <a:bodyPr rtlCol="0" anchor="ctr"/>
+          <a:lstStyle/>
+          <a:p>
+            <a:pPr algn="ctr"/>
+          </a:p>
+        </p:txBody>
+      </p:sp>
+      <p:sp>
+        <p:nvSpPr>
+          <p:cNvPr id="3" name="TextBox 2"/>
+          <p:cNvSpPr txBox="1"/>
+          <p:nvPr/>
+        </p:nvSpPr>
+        <p:spPr>
+          <a:xfrm>
+            <a:off x="731520" y="365760"/>
+            <a:ext cx="7315200" cy="320040"/>
+          </a:xfrm>
+          <a:prstGeom prst="rect">
+            <a:avLst/>
+          </a:prstGeom>
+          <a:noFill/>
+        </p:spPr>
+        <p:txBody>
+          <a:bodyPr wrap="square" anchor="t">
+            <a:spAutoFit/>
+          </a:bodyPr>
+          <a:lstStyle/>
+          <a:p>
+            <a:pPr algn="l">
+              <a:lnSpc>
+                <a:spcPct val="105000"/>
+              </a:lnSpc>
+            </a:pPr>
+            <a:r>
+              <a:rPr sz="1200" b="1" i="0">
+                <a:solidFill>
+                  <a:srgbClr val="B45309"/>
+                </a:solidFill>
+                <a:latin typeface="Calibri"/>
+              </a:rPr>
+              <a:t>FEDWIKI — HOW IT WENT</a:t>
+            </a:r>
+          </a:p>
+        </p:txBody>
+      </p:sp>
+      <p:sp>
+        <p:nvSpPr>
+          <p:cNvPr id="4" name="TextBox 3"/>
+          <p:cNvSpPr txBox="1"/>
+          <p:nvPr/>
+        </p:nvSpPr>
+        <p:spPr>
+          <a:xfrm>
+            <a:off x="548640" y="713232"/>
+            <a:ext cx="11155680" cy="640080"/>
+          </a:xfrm>
+          <a:prstGeom prst="rect">
+            <a:avLst/>
+          </a:prstGeom>
+          <a:noFill/>
+        </p:spPr>
+        <p:txBody>
+          <a:bodyPr wrap="square" anchor="t">
+            <a:spAutoFit/>
+          </a:bodyPr>
+          <a:lstStyle/>
+          <a:p>
+            <a:pPr algn="l">
+              <a:lnSpc>
+                <a:spcPct val="105000"/>
+              </a:lnSpc>
+            </a:pPr>
+            <a:r>
+              <a:rPr sz="2800" b="1" i="0">
+                <a:solidFill>
+                  <a:srgbClr val="0F172A"/>
+                </a:solidFill>
+                <a:latin typeface="Calibri"/>
+              </a:rPr>
+              <a:t>Making it work: what broke, and what it cannot do</a:t>
+            </a:r>
+          </a:p>
+        </p:txBody>
+      </p:sp>
+      <p:sp>
+        <p:nvSpPr>
+          <p:cNvPr id="5" name="Rectangle 4"/>
+          <p:cNvSpPr/>
+          <p:nvPr/>
+        </p:nvSpPr>
+        <p:spPr>
+          <a:xfrm>
             <a:off x="548640" y="1554480"/>
-            <a:ext cx="5486400" cy="3108960"/>
+            <a:ext cx="5486400" cy="3017520"/>
           </a:xfrm>
           <a:prstGeom prst="rect">
             <a:avLst/>
@@ -4307,7 +6261,7 @@
                 </a:solidFill>
                 <a:latin typeface="Calibri"/>
               </a:rPr>
-              <a:t>CORRECTED IN THE DATA</a:t>
+              <a:t>FIXED</a:t>
             </a:r>
           </a:p>
         </p:txBody>
@@ -4321,7 +6275,7 @@
         <p:spPr>
           <a:xfrm>
             <a:off x="777240" y="2011680"/>
-            <a:ext cx="5029200" cy="2560320"/>
+            <a:ext cx="5029200" cy="2468880"/>
           </a:xfrm>
           <a:prstGeom prst="rect">
             <a:avLst/>
@@ -4349,7 +6303,7 @@
                 </a:solidFill>
                 <a:latin typeface="Calibri"/>
               </a:rPr>
-              <a:t>—  Community to Community has moved: 1319 Cornwall Ave, Suite 101 (the map pin is moved).</a:t>
+              <a:t>—  Clicking a two-line name in a graph did nothing, or reloaded the wiki. Each co-op box is now one link. The real fix belongs in the Graph Tool, for every diagram.</a:t>
             </a:r>
           </a:p>
           <a:p>
@@ -4368,7 +6322,7 @@
                 </a:solidFill>
                 <a:latin typeface="Calibri"/>
               </a:rPr>
-              <a:t>—  Cascade Cooperatives incorporated in January 2022, not 2019; it began in 2014 as the Co-op Education Project.</a:t>
+              <a:t>—  The maps first ran the RCN Map inside Frame items. That tied the pages to one wiki and needed files uploaded, so they now use FedWiki’s own Map plugin; Frame is kept for the websites only.</a:t>
             </a:r>
           </a:p>
           <a:p>
@@ -4387,45 +6341,7 @@
                 </a:solidFill>
                 <a:latin typeface="Calibri"/>
               </a:rPr>
-              <a:t>—  CHS Northwest in Lynden is at 402 Main St.</a:t>
-            </a:r>
-          </a:p>
-          <a:p>
-            <a:pPr>
-              <a:lnSpc>
-                <a:spcPct val="110000"/>
-              </a:lnSpc>
-              <a:spcAft>
-                <a:spcPts val="600"/>
-              </a:spcAft>
-            </a:pPr>
-            <a:r>
-              <a:rPr sz="1300">
-                <a:solidFill>
-                  <a:srgbClr val="475569"/>
-                </a:solidFill>
-                <a:latin typeface="Calibri"/>
-              </a:rPr>
-              <a:t>—  Industrial Credit Union’s website is industrialcu.com.</a:t>
-            </a:r>
-          </a:p>
-          <a:p>
-            <a:pPr>
-              <a:lnSpc>
-                <a:spcPct val="110000"/>
-              </a:lnSpc>
-              <a:spcAft>
-                <a:spcPts val="600"/>
-              </a:spcAft>
-            </a:pPr>
-            <a:r>
-              <a:rPr sz="1300">
-                <a:solidFill>
-                  <a:srgbClr val="475569"/>
-                </a:solidFill>
-                <a:latin typeface="Calibri"/>
-              </a:rPr>
-              <a:t>—  Yellow Cab Co-op has its own site, yellowcabcoop.com.</a:t>
+              <a:t>—  Along the way the table’s map learned to load on its own and to use the Esri basemap, so it also works when framed.</a:t>
             </a:r>
           </a:p>
         </p:txBody>
@@ -4439,7 +6355,7 @@
         <p:spPr>
           <a:xfrm>
             <a:off x="6263640" y="1554480"/>
-            <a:ext cx="5394960" cy="3108960"/>
+            <a:ext cx="5394960" cy="3017520"/>
           </a:xfrm>
           <a:prstGeom prst="rect">
             <a:avLst/>
@@ -4510,7 +6426,7 @@
                 </a:solidFill>
                 <a:latin typeface="Calibri"/>
               </a:rPr>
-              <a:t>VERIFY BEFORE RELYING ON IT</a:t>
+              <a:t>LIMITS</a:t>
             </a:r>
           </a:p>
         </p:txBody>
@@ -4524,7 +6440,7 @@
         <p:spPr>
           <a:xfrm>
             <a:off x="6492240" y="2011680"/>
-            <a:ext cx="4937760" cy="2560320"/>
+            <a:ext cx="4937760" cy="2468880"/>
           </a:xfrm>
           <a:prstGeom prst="rect">
             <a:avLst/>
@@ -4552,7 +6468,7 @@
                 </a:solidFill>
                 <a:latin typeface="Calibri"/>
               </a:rPr>
-              <a:t>—  Community Media Cooperative — media-coop.com no longer resolves; it may have closed.</a:t>
+              <a:t>—  The per-page map shows points, not ties: we found no way in its text format to draw a line between two points. An RCN map plugin would.</a:t>
             </a:r>
           </a:p>
           <a:p>
@@ -4571,64 +6487,7 @@
                 </a:solidFill>
                 <a:latin typeface="Calibri"/>
               </a:rPr>
-              <a:t>—  Cascadia Deaf Nation — website answers “Payment Required”; it may have lapsed.</a:t>
-            </a:r>
-          </a:p>
-          <a:p>
-            <a:pPr>
-              <a:lnSpc>
-                <a:spcPct val="110000"/>
-              </a:lnSpc>
-              <a:spcAft>
-                <a:spcPts val="600"/>
-              </a:spcAft>
-            </a:pPr>
-            <a:r>
-              <a:rPr sz="1300">
-                <a:solidFill>
-                  <a:srgbClr val="854D0E"/>
-                </a:solidFill>
-                <a:latin typeface="Calibri"/>
-              </a:rPr>
-              <a:t>—  Bellingham Bay Builders — only the 2004 founders are published, not the current owner-members.</a:t>
-            </a:r>
-          </a:p>
-          <a:p>
-            <a:pPr>
-              <a:lnSpc>
-                <a:spcPct val="110000"/>
-              </a:lnSpc>
-              <a:spcAft>
-                <a:spcPts val="600"/>
-              </a:spcAft>
-            </a:pPr>
-            <a:r>
-              <a:rPr sz="1300">
-                <a:solidFill>
-                  <a:srgbClr val="854D0E"/>
-                </a:solidFill>
-                <a:latin typeface="Calibri"/>
-              </a:rPr>
-              <a:t>—  WestEdge CU, Yellow Cab Co-op, Circle of Life, CHS — no leader named on their own sites.</a:t>
-            </a:r>
-          </a:p>
-          <a:p>
-            <a:pPr>
-              <a:lnSpc>
-                <a:spcPct val="110000"/>
-              </a:lnSpc>
-              <a:spcAft>
-                <a:spcPts val="600"/>
-              </a:spcAft>
-            </a:pPr>
-            <a:r>
-              <a:rPr sz="1300">
-                <a:solidFill>
-                  <a:srgbClr val="854D0E"/>
-                </a:solidFill>
-                <a:latin typeface="Calibri"/>
-              </a:rPr>
-              <a:t>—  Tierra y Libertad — no website of its own; reach it through C2C.</a:t>
+              <a:t>—  Half the co-op websites cannot be shown in a page — ICU, REI, North Coast CU, A1DesignBuild and the Food Hub refuse; Bellingham Bay Builders’ bot check never finishes. Those pages link out.</a:t>
             </a:r>
           </a:p>
         </p:txBody>
@@ -4641,7 +6500,7 @@
         </p:nvSpPr>
         <p:spPr>
           <a:xfrm>
-            <a:off x="548640" y="4983480"/>
+            <a:off x="548640" y="4846320"/>
             <a:ext cx="11064240" cy="731520"/>
           </a:xfrm>
           <a:prstGeom prst="rect">
@@ -4667,7 +6526,7 @@
                 </a:solidFill>
                 <a:latin typeface="Calibri"/>
               </a:rPr>
-              <a:t>Every contact carries “Checked Sep 2026” and the page it was read from. Phones and names change; the date says how far to trust them.</a:t>
+              <a:t>Checked in a real FedWiki (coops.localhost): a graph click opens the page beside, the Food Co-op’s map shows its 6 co-ops, and the websites were tested in the frame plugin’s own sandbox or by their headers — 11 show.</a:t>
             </a:r>
           </a:p>
         </p:txBody>
@@ -4745,7 +6604,7 @@
                 </a:solidFill>
                 <a:latin typeface="Calibri"/>
               </a:rPr>
-              <a:t>11</a:t>
+              <a:t>15</a:t>
             </a:r>
           </a:p>
         </p:txBody>
@@ -4758,7 +6617,678 @@
 </p:sld>
 </file>
 
-<file path=ppt/slides/slide12.xml><?xml version="1.0" encoding="utf-8"?>
+<file path=ppt/slides/slide16.xml><?xml version="1.0" encoding="utf-8"?>
+<p:sld xmlns:a="http://schemas.openxmlformats.org/drawingml/2006/main" xmlns:p="http://schemas.openxmlformats.org/presentationml/2006/main" xmlns:r="http://schemas.openxmlformats.org/officeDocument/2006/relationships">
+  <p:cSld>
+    <p:bg>
+      <p:bgPr>
+        <a:solidFill>
+          <a:srgbClr val="F8FAFC"/>
+        </a:solidFill>
+        <a:effectLst/>
+      </p:bgPr>
+    </p:bg>
+    <p:spTree>
+      <p:nvGrpSpPr>
+        <p:cNvPr id="1" name=""/>
+        <p:cNvGrpSpPr/>
+        <p:nvPr/>
+      </p:nvGrpSpPr>
+      <p:grpSpPr/>
+      <p:sp>
+        <p:nvSpPr>
+          <p:cNvPr id="2" name="Rectangle 1"/>
+          <p:cNvSpPr/>
+          <p:nvPr/>
+        </p:nvSpPr>
+        <p:spPr>
+          <a:xfrm>
+            <a:off x="548640" y="384048"/>
+            <a:ext cx="82296" cy="274320"/>
+          </a:xfrm>
+          <a:prstGeom prst="rect">
+            <a:avLst/>
+          </a:prstGeom>
+          <a:solidFill>
+            <a:srgbClr val="D4A017"/>
+          </a:solidFill>
+          <a:ln>
+            <a:noFill/>
+          </a:ln>
+          <a:effectLst/>
+        </p:spPr>
+        <p:style>
+          <a:lnRef idx="1">
+            <a:schemeClr val="accent1"/>
+          </a:lnRef>
+          <a:fillRef idx="3">
+            <a:schemeClr val="accent1"/>
+          </a:fillRef>
+          <a:effectRef idx="2">
+            <a:schemeClr val="accent1"/>
+          </a:effectRef>
+          <a:fontRef idx="minor">
+            <a:schemeClr val="lt1"/>
+          </a:fontRef>
+        </p:style>
+        <p:txBody>
+          <a:bodyPr rtlCol="0" anchor="ctr"/>
+          <a:lstStyle/>
+          <a:p>
+            <a:pPr algn="ctr"/>
+          </a:p>
+        </p:txBody>
+      </p:sp>
+      <p:sp>
+        <p:nvSpPr>
+          <p:cNvPr id="3" name="TextBox 2"/>
+          <p:cNvSpPr txBox="1"/>
+          <p:nvPr/>
+        </p:nvSpPr>
+        <p:spPr>
+          <a:xfrm>
+            <a:off x="731520" y="365760"/>
+            <a:ext cx="7315200" cy="320040"/>
+          </a:xfrm>
+          <a:prstGeom prst="rect">
+            <a:avLst/>
+          </a:prstGeom>
+          <a:noFill/>
+        </p:spPr>
+        <p:txBody>
+          <a:bodyPr wrap="square" anchor="t">
+            <a:spAutoFit/>
+          </a:bodyPr>
+          <a:lstStyle/>
+          <a:p>
+            <a:pPr algn="l">
+              <a:lnSpc>
+                <a:spcPct val="105000"/>
+              </a:lnSpc>
+            </a:pPr>
+            <a:r>
+              <a:rPr sz="1200" b="1" i="0">
+                <a:solidFill>
+                  <a:srgbClr val="D4A017"/>
+                </a:solidFill>
+                <a:latin typeface="Calibri"/>
+              </a:rPr>
+              <a:t>CONTACTS</a:t>
+            </a:r>
+          </a:p>
+        </p:txBody>
+      </p:sp>
+      <p:sp>
+        <p:nvSpPr>
+          <p:cNvPr id="4" name="TextBox 3"/>
+          <p:cNvSpPr txBox="1"/>
+          <p:nvPr/>
+        </p:nvSpPr>
+        <p:spPr>
+          <a:xfrm>
+            <a:off x="548640" y="713232"/>
+            <a:ext cx="11155680" cy="640080"/>
+          </a:xfrm>
+          <a:prstGeom prst="rect">
+            <a:avLst/>
+          </a:prstGeom>
+          <a:noFill/>
+        </p:spPr>
+        <p:txBody>
+          <a:bodyPr wrap="square" anchor="t">
+            <a:spAutoFit/>
+          </a:bodyPr>
+          <a:lstStyle/>
+          <a:p>
+            <a:pPr algn="l">
+              <a:lnSpc>
+                <a:spcPct val="105000"/>
+              </a:lnSpc>
+            </a:pPr>
+            <a:r>
+              <a:rPr sz="2800" b="1" i="0">
+                <a:solidFill>
+                  <a:srgbClr val="0F172A"/>
+                </a:solidFill>
+                <a:latin typeface="Calibri"/>
+              </a:rPr>
+              <a:t>What the contact check found — and what to verify before calling</a:t>
+            </a:r>
+          </a:p>
+        </p:txBody>
+      </p:sp>
+      <p:sp>
+        <p:nvSpPr>
+          <p:cNvPr id="5" name="Rectangle 4"/>
+          <p:cNvSpPr/>
+          <p:nvPr/>
+        </p:nvSpPr>
+        <p:spPr>
+          <a:xfrm>
+            <a:off x="548640" y="1554480"/>
+            <a:ext cx="5486400" cy="3108960"/>
+          </a:xfrm>
+          <a:prstGeom prst="rect">
+            <a:avLst/>
+          </a:prstGeom>
+          <a:solidFill>
+            <a:srgbClr val="FFFFFF"/>
+          </a:solidFill>
+          <a:ln w="12700">
+            <a:solidFill>
+              <a:srgbClr val="E2E8F0"/>
+            </a:solidFill>
+          </a:ln>
+          <a:effectLst/>
+        </p:spPr>
+        <p:style>
+          <a:lnRef idx="1">
+            <a:schemeClr val="accent1"/>
+          </a:lnRef>
+          <a:fillRef idx="3">
+            <a:schemeClr val="accent1"/>
+          </a:fillRef>
+          <a:effectRef idx="2">
+            <a:schemeClr val="accent1"/>
+          </a:effectRef>
+          <a:fontRef idx="minor">
+            <a:schemeClr val="lt1"/>
+          </a:fontRef>
+        </p:style>
+        <p:txBody>
+          <a:bodyPr rtlCol="0" anchor="ctr"/>
+          <a:lstStyle/>
+          <a:p>
+            <a:pPr algn="ctr"/>
+          </a:p>
+        </p:txBody>
+      </p:sp>
+      <p:sp>
+        <p:nvSpPr>
+          <p:cNvPr id="6" name="TextBox 5"/>
+          <p:cNvSpPr txBox="1"/>
+          <p:nvPr/>
+        </p:nvSpPr>
+        <p:spPr>
+          <a:xfrm>
+            <a:off x="777240" y="1691640"/>
+            <a:ext cx="5029200" cy="274320"/>
+          </a:xfrm>
+          <a:prstGeom prst="rect">
+            <a:avLst/>
+          </a:prstGeom>
+          <a:noFill/>
+        </p:spPr>
+        <p:txBody>
+          <a:bodyPr wrap="square" anchor="t">
+            <a:spAutoFit/>
+          </a:bodyPr>
+          <a:lstStyle/>
+          <a:p>
+            <a:pPr algn="l">
+              <a:lnSpc>
+                <a:spcPct val="105000"/>
+              </a:lnSpc>
+            </a:pPr>
+            <a:r>
+              <a:rPr sz="1100" b="1" i="0">
+                <a:solidFill>
+                  <a:srgbClr val="1A7A4A"/>
+                </a:solidFill>
+                <a:latin typeface="Calibri"/>
+              </a:rPr>
+              <a:t>CORRECTED IN THE DATA</a:t>
+            </a:r>
+          </a:p>
+        </p:txBody>
+      </p:sp>
+      <p:sp>
+        <p:nvSpPr>
+          <p:cNvPr id="7" name="TextBox 6"/>
+          <p:cNvSpPr txBox="1"/>
+          <p:nvPr/>
+        </p:nvSpPr>
+        <p:spPr>
+          <a:xfrm>
+            <a:off x="777240" y="2011680"/>
+            <a:ext cx="5029200" cy="2560320"/>
+          </a:xfrm>
+          <a:prstGeom prst="rect">
+            <a:avLst/>
+          </a:prstGeom>
+          <a:noFill/>
+        </p:spPr>
+        <p:txBody>
+          <a:bodyPr wrap="square">
+            <a:spAutoFit/>
+          </a:bodyPr>
+          <a:lstStyle/>
+          <a:p>
+            <a:pPr>
+              <a:lnSpc>
+                <a:spcPct val="110000"/>
+              </a:lnSpc>
+              <a:spcAft>
+                <a:spcPts val="600"/>
+              </a:spcAft>
+            </a:pPr>
+            <a:r>
+              <a:rPr sz="1300">
+                <a:solidFill>
+                  <a:srgbClr val="475569"/>
+                </a:solidFill>
+                <a:latin typeface="Calibri"/>
+              </a:rPr>
+              <a:t>—  Community to Community has moved: 1319 Cornwall Ave, Suite 101 (the map pin is moved).</a:t>
+            </a:r>
+          </a:p>
+          <a:p>
+            <a:pPr>
+              <a:lnSpc>
+                <a:spcPct val="110000"/>
+              </a:lnSpc>
+              <a:spcAft>
+                <a:spcPts val="600"/>
+              </a:spcAft>
+            </a:pPr>
+            <a:r>
+              <a:rPr sz="1300">
+                <a:solidFill>
+                  <a:srgbClr val="475569"/>
+                </a:solidFill>
+                <a:latin typeface="Calibri"/>
+              </a:rPr>
+              <a:t>—  Cascade Cooperatives incorporated in January 2022, not 2019; it began in 2014 as the Co-op Education Project.</a:t>
+            </a:r>
+          </a:p>
+          <a:p>
+            <a:pPr>
+              <a:lnSpc>
+                <a:spcPct val="110000"/>
+              </a:lnSpc>
+              <a:spcAft>
+                <a:spcPts val="600"/>
+              </a:spcAft>
+            </a:pPr>
+            <a:r>
+              <a:rPr sz="1300">
+                <a:solidFill>
+                  <a:srgbClr val="475569"/>
+                </a:solidFill>
+                <a:latin typeface="Calibri"/>
+              </a:rPr>
+              <a:t>—  CHS Northwest in Lynden is at 402 Main St.</a:t>
+            </a:r>
+          </a:p>
+          <a:p>
+            <a:pPr>
+              <a:lnSpc>
+                <a:spcPct val="110000"/>
+              </a:lnSpc>
+              <a:spcAft>
+                <a:spcPts val="600"/>
+              </a:spcAft>
+            </a:pPr>
+            <a:r>
+              <a:rPr sz="1300">
+                <a:solidFill>
+                  <a:srgbClr val="475569"/>
+                </a:solidFill>
+                <a:latin typeface="Calibri"/>
+              </a:rPr>
+              <a:t>—  Industrial Credit Union’s website is industrialcu.com.</a:t>
+            </a:r>
+          </a:p>
+          <a:p>
+            <a:pPr>
+              <a:lnSpc>
+                <a:spcPct val="110000"/>
+              </a:lnSpc>
+              <a:spcAft>
+                <a:spcPts val="600"/>
+              </a:spcAft>
+            </a:pPr>
+            <a:r>
+              <a:rPr sz="1300">
+                <a:solidFill>
+                  <a:srgbClr val="475569"/>
+                </a:solidFill>
+                <a:latin typeface="Calibri"/>
+              </a:rPr>
+              <a:t>—  Yellow Cab Co-op has its own site, yellowcabcoop.com.</a:t>
+            </a:r>
+          </a:p>
+        </p:txBody>
+      </p:sp>
+      <p:sp>
+        <p:nvSpPr>
+          <p:cNvPr id="8" name="Rectangle 7"/>
+          <p:cNvSpPr/>
+          <p:nvPr/>
+        </p:nvSpPr>
+        <p:spPr>
+          <a:xfrm>
+            <a:off x="6263640" y="1554480"/>
+            <a:ext cx="5394960" cy="3108960"/>
+          </a:xfrm>
+          <a:prstGeom prst="rect">
+            <a:avLst/>
+          </a:prstGeom>
+          <a:solidFill>
+            <a:srgbClr val="FEF3C7"/>
+          </a:solidFill>
+          <a:ln w="12700">
+            <a:solidFill>
+              <a:srgbClr val="FDE047"/>
+            </a:solidFill>
+          </a:ln>
+          <a:effectLst/>
+        </p:spPr>
+        <p:style>
+          <a:lnRef idx="1">
+            <a:schemeClr val="accent1"/>
+          </a:lnRef>
+          <a:fillRef idx="3">
+            <a:schemeClr val="accent1"/>
+          </a:fillRef>
+          <a:effectRef idx="2">
+            <a:schemeClr val="accent1"/>
+          </a:effectRef>
+          <a:fontRef idx="minor">
+            <a:schemeClr val="lt1"/>
+          </a:fontRef>
+        </p:style>
+        <p:txBody>
+          <a:bodyPr rtlCol="0" anchor="ctr"/>
+          <a:lstStyle/>
+          <a:p>
+            <a:pPr algn="ctr"/>
+          </a:p>
+        </p:txBody>
+      </p:sp>
+      <p:sp>
+        <p:nvSpPr>
+          <p:cNvPr id="9" name="TextBox 8"/>
+          <p:cNvSpPr txBox="1"/>
+          <p:nvPr/>
+        </p:nvSpPr>
+        <p:spPr>
+          <a:xfrm>
+            <a:off x="6492240" y="1691640"/>
+            <a:ext cx="4937760" cy="274320"/>
+          </a:xfrm>
+          <a:prstGeom prst="rect">
+            <a:avLst/>
+          </a:prstGeom>
+          <a:noFill/>
+        </p:spPr>
+        <p:txBody>
+          <a:bodyPr wrap="square" anchor="t">
+            <a:spAutoFit/>
+          </a:bodyPr>
+          <a:lstStyle/>
+          <a:p>
+            <a:pPr algn="l">
+              <a:lnSpc>
+                <a:spcPct val="105000"/>
+              </a:lnSpc>
+            </a:pPr>
+            <a:r>
+              <a:rPr sz="1100" b="1" i="0">
+                <a:solidFill>
+                  <a:srgbClr val="854D0E"/>
+                </a:solidFill>
+                <a:latin typeface="Calibri"/>
+              </a:rPr>
+              <a:t>VERIFY BEFORE RELYING ON IT</a:t>
+            </a:r>
+          </a:p>
+        </p:txBody>
+      </p:sp>
+      <p:sp>
+        <p:nvSpPr>
+          <p:cNvPr id="10" name="TextBox 9"/>
+          <p:cNvSpPr txBox="1"/>
+          <p:nvPr/>
+        </p:nvSpPr>
+        <p:spPr>
+          <a:xfrm>
+            <a:off x="6492240" y="2011680"/>
+            <a:ext cx="4937760" cy="2560320"/>
+          </a:xfrm>
+          <a:prstGeom prst="rect">
+            <a:avLst/>
+          </a:prstGeom>
+          <a:noFill/>
+        </p:spPr>
+        <p:txBody>
+          <a:bodyPr wrap="square">
+            <a:spAutoFit/>
+          </a:bodyPr>
+          <a:lstStyle/>
+          <a:p>
+            <a:pPr>
+              <a:lnSpc>
+                <a:spcPct val="110000"/>
+              </a:lnSpc>
+              <a:spcAft>
+                <a:spcPts val="600"/>
+              </a:spcAft>
+            </a:pPr>
+            <a:r>
+              <a:rPr sz="1300">
+                <a:solidFill>
+                  <a:srgbClr val="854D0E"/>
+                </a:solidFill>
+                <a:latin typeface="Calibri"/>
+              </a:rPr>
+              <a:t>—  Community Media Cooperative — media-coop.com no longer resolves; it may have closed.</a:t>
+            </a:r>
+          </a:p>
+          <a:p>
+            <a:pPr>
+              <a:lnSpc>
+                <a:spcPct val="110000"/>
+              </a:lnSpc>
+              <a:spcAft>
+                <a:spcPts val="600"/>
+              </a:spcAft>
+            </a:pPr>
+            <a:r>
+              <a:rPr sz="1300">
+                <a:solidFill>
+                  <a:srgbClr val="854D0E"/>
+                </a:solidFill>
+                <a:latin typeface="Calibri"/>
+              </a:rPr>
+              <a:t>—  Cascadia Deaf Nation — website answers “Payment Required”; it may have lapsed.</a:t>
+            </a:r>
+          </a:p>
+          <a:p>
+            <a:pPr>
+              <a:lnSpc>
+                <a:spcPct val="110000"/>
+              </a:lnSpc>
+              <a:spcAft>
+                <a:spcPts val="600"/>
+              </a:spcAft>
+            </a:pPr>
+            <a:r>
+              <a:rPr sz="1300">
+                <a:solidFill>
+                  <a:srgbClr val="854D0E"/>
+                </a:solidFill>
+                <a:latin typeface="Calibri"/>
+              </a:rPr>
+              <a:t>—  Bellingham Bay Builders — only the 2004 founders are published, not the current owner-members.</a:t>
+            </a:r>
+          </a:p>
+          <a:p>
+            <a:pPr>
+              <a:lnSpc>
+                <a:spcPct val="110000"/>
+              </a:lnSpc>
+              <a:spcAft>
+                <a:spcPts val="600"/>
+              </a:spcAft>
+            </a:pPr>
+            <a:r>
+              <a:rPr sz="1300">
+                <a:solidFill>
+                  <a:srgbClr val="854D0E"/>
+                </a:solidFill>
+                <a:latin typeface="Calibri"/>
+              </a:rPr>
+              <a:t>—  WestEdge CU, Yellow Cab Co-op, Circle of Life, CHS — no leader named on their own sites.</a:t>
+            </a:r>
+          </a:p>
+          <a:p>
+            <a:pPr>
+              <a:lnSpc>
+                <a:spcPct val="110000"/>
+              </a:lnSpc>
+              <a:spcAft>
+                <a:spcPts val="600"/>
+              </a:spcAft>
+            </a:pPr>
+            <a:r>
+              <a:rPr sz="1300">
+                <a:solidFill>
+                  <a:srgbClr val="854D0E"/>
+                </a:solidFill>
+                <a:latin typeface="Calibri"/>
+              </a:rPr>
+              <a:t>—  Tierra y Libertad — no website of its own; reach it through C2C.</a:t>
+            </a:r>
+          </a:p>
+        </p:txBody>
+      </p:sp>
+      <p:sp>
+        <p:nvSpPr>
+          <p:cNvPr id="11" name="TextBox 10"/>
+          <p:cNvSpPr txBox="1"/>
+          <p:nvPr/>
+        </p:nvSpPr>
+        <p:spPr>
+          <a:xfrm>
+            <a:off x="548640" y="4983480"/>
+            <a:ext cx="11064240" cy="731520"/>
+          </a:xfrm>
+          <a:prstGeom prst="rect">
+            <a:avLst/>
+          </a:prstGeom>
+          <a:noFill/>
+        </p:spPr>
+        <p:txBody>
+          <a:bodyPr wrap="square" anchor="t">
+            <a:spAutoFit/>
+          </a:bodyPr>
+          <a:lstStyle/>
+          <a:p>
+            <a:pPr algn="l">
+              <a:lnSpc>
+                <a:spcPct val="105000"/>
+              </a:lnSpc>
+            </a:pPr>
+            <a:r>
+              <a:rPr sz="1500" b="0" i="1">
+                <a:solidFill>
+                  <a:srgbClr val="475569"/>
+                </a:solidFill>
+                <a:latin typeface="Calibri"/>
+              </a:rPr>
+              <a:t>Every contact carries “Checked Sep 2026” and the page it was read from. Phones and names change; the date says how far to trust them.</a:t>
+            </a:r>
+          </a:p>
+        </p:txBody>
+      </p:sp>
+      <p:sp>
+        <p:nvSpPr>
+          <p:cNvPr id="12" name="TextBox 11"/>
+          <p:cNvSpPr txBox="1"/>
+          <p:nvPr/>
+        </p:nvSpPr>
+        <p:spPr>
+          <a:xfrm>
+            <a:off x="548640" y="6446520"/>
+            <a:ext cx="5486400" cy="274320"/>
+          </a:xfrm>
+          <a:prstGeom prst="rect">
+            <a:avLst/>
+          </a:prstGeom>
+          <a:noFill/>
+        </p:spPr>
+        <p:txBody>
+          <a:bodyPr wrap="square" anchor="t">
+            <a:spAutoFit/>
+          </a:bodyPr>
+          <a:lstStyle/>
+          <a:p>
+            <a:pPr algn="l">
+              <a:lnSpc>
+                <a:spcPct val="105000"/>
+              </a:lnSpc>
+            </a:pPr>
+            <a:r>
+              <a:rPr sz="900" b="0" i="0">
+                <a:solidFill>
+                  <a:srgbClr val="94A3B8"/>
+                </a:solidFill>
+                <a:latin typeface="Calibri"/>
+              </a:rPr>
+              <a:t>Co-ops of Whatcom County · RCN</a:t>
+            </a:r>
+          </a:p>
+        </p:txBody>
+      </p:sp>
+      <p:sp>
+        <p:nvSpPr>
+          <p:cNvPr id="13" name="TextBox 12"/>
+          <p:cNvSpPr txBox="1"/>
+          <p:nvPr/>
+        </p:nvSpPr>
+        <p:spPr>
+          <a:xfrm>
+            <a:off x="11247120" y="6446520"/>
+            <a:ext cx="365760" cy="274320"/>
+          </a:xfrm>
+          <a:prstGeom prst="rect">
+            <a:avLst/>
+          </a:prstGeom>
+          <a:noFill/>
+        </p:spPr>
+        <p:txBody>
+          <a:bodyPr wrap="square" anchor="t">
+            <a:spAutoFit/>
+          </a:bodyPr>
+          <a:lstStyle/>
+          <a:p>
+            <a:pPr algn="r">
+              <a:lnSpc>
+                <a:spcPct val="105000"/>
+              </a:lnSpc>
+            </a:pPr>
+            <a:r>
+              <a:rPr sz="900" b="0" i="0">
+                <a:solidFill>
+                  <a:srgbClr val="94A3B8"/>
+                </a:solidFill>
+                <a:latin typeface="Calibri"/>
+              </a:rPr>
+              <a:t>16</a:t>
+            </a:r>
+          </a:p>
+        </p:txBody>
+      </p:sp>
+    </p:spTree>
+  </p:cSld>
+  <p:clrMapOvr>
+    <a:masterClrMapping/>
+  </p:clrMapOvr>
+</p:sld>
+</file>
+
+<file path=ppt/slides/slide17.xml><?xml version="1.0" encoding="utf-8"?>
 <p:sld xmlns:a="http://schemas.openxmlformats.org/drawingml/2006/main" xmlns:p="http://schemas.openxmlformats.org/presentationml/2006/main" xmlns:r="http://schemas.openxmlformats.org/officeDocument/2006/relationships">
   <p:cSld>
     <p:bg>
@@ -4823,7 +7353,7 @@
         </p:nvSpPr>
         <p:spPr>
           <a:xfrm>
-            <a:off x="640080" y="1828800"/>
+            <a:off x="640080" y="1737360"/>
             <a:ext cx="10789920" cy="3291840"/>
           </a:xfrm>
           <a:prstGeom prst="rect">
@@ -4842,11 +7372,11 @@
                 <a:spcPct val="110000"/>
               </a:lnSpc>
               <a:spcAft>
-                <a:spcPts val="1000"/>
+                <a:spcPts val="800"/>
               </a:spcAft>
             </a:pPr>
             <a:r>
-              <a:rPr sz="1700">
+              <a:rPr sz="1600">
                 <a:solidFill>
                   <a:srgbClr val="CBD5E1"/>
                 </a:solidFill>
@@ -4861,17 +7391,17 @@
                 <a:spcPct val="110000"/>
               </a:lnSpc>
               <a:spcAft>
-                <a:spcPts val="1000"/>
+                <a:spcPts val="800"/>
               </a:spcAft>
             </a:pPr>
             <a:r>
-              <a:rPr sz="1700">
+              <a:rPr sz="1600">
                 <a:solidFill>
                   <a:srgbClr val="CBD5E1"/>
                 </a:solidFill>
                 <a:latin typeface="Calibri"/>
               </a:rPr>
-              <a:t>—  Graph: “Open in Graph Tool” from the map legend, or load Co-ops-of-Whatcom-County (1).json.</a:t>
+              <a:t>—  Graph: “Open in Graph Tool” from the map legend, or load tools/whatcom-coops-graph.json (Marc’s layout, with contacts).</a:t>
             </a:r>
           </a:p>
           <a:p>
@@ -4880,11 +7410,11 @@
                 <a:spcPct val="110000"/>
               </a:lnSpc>
               <a:spcAft>
-                <a:spcPts val="1000"/>
+                <a:spcPts val="800"/>
               </a:spcAft>
             </a:pPr>
             <a:r>
-              <a:rPr sz="1700">
+              <a:rPr sz="1600">
                 <a:solidFill>
                   <a:srgbClr val="CBD5E1"/>
                 </a:solidFill>
@@ -4899,11 +7429,11 @@
                 <a:spcPct val="110000"/>
               </a:lnSpc>
               <a:spcAft>
-                <a:spcPts val="1000"/>
+                <a:spcPts val="800"/>
               </a:spcAft>
             </a:pPr>
             <a:r>
-              <a:rPr sz="1700">
+              <a:rPr sz="1600">
                 <a:solidFill>
                   <a:srgbClr val="CBD5E1"/>
                 </a:solidFill>
@@ -4918,17 +7448,36 @@
                 <a:spcPct val="110000"/>
               </a:lnSpc>
               <a:spcAft>
-                <a:spcPts val="1000"/>
+                <a:spcPts val="800"/>
               </a:spcAft>
             </a:pPr>
             <a:r>
-              <a:rPr sz="1700">
+              <a:rPr sz="1600">
                 <a:solidFill>
                   <a:srgbClr val="CBD5E1"/>
                 </a:solidFill>
                 <a:latin typeface="Calibri"/>
               </a:rPr>
-              <a:t>—  To change the data, edit the issue file, then re-run substrate/load_coops.py so Neo4j matches.</a:t>
+              <a:t>—  FedWiki: drag docs/whatcom-coops-wiki/whatcom-coops-wiki.json onto any lineup; upload the rcn-table folder for the table.</a:t>
+            </a:r>
+          </a:p>
+          <a:p>
+            <a:pPr>
+              <a:lnSpc>
+                <a:spcPct val="110000"/>
+              </a:lnSpc>
+              <a:spcAft>
+                <a:spcPts val="800"/>
+              </a:spcAft>
+            </a:pPr>
+            <a:r>
+              <a:rPr sz="1600">
+                <a:solidFill>
+                  <a:srgbClr val="CBD5E1"/>
+                </a:solidFill>
+                <a:latin typeface="Calibri"/>
+              </a:rPr>
+              <a:t>—  To change the data, edit the issue file, then re-run substrate/load_coops.py and build_pages.py so Neo4j and the wiki match.</a:t>
             </a:r>
           </a:p>
         </p:txBody>
@@ -6053,11 +8602,11 @@
                 <a:spcPct val="110000"/>
               </a:lnSpc>
               <a:spcAft>
-                <a:spcPts val="400"/>
+                <a:spcPts val="200"/>
               </a:spcAft>
             </a:pPr>
             <a:r>
-              <a:rPr sz="1400">
+              <a:rPr sz="1300">
                 <a:solidFill>
                   <a:srgbClr val="475569"/>
                 </a:solidFill>
@@ -6072,11 +8621,11 @@
                 <a:spcPct val="110000"/>
               </a:lnSpc>
               <a:spcAft>
-                <a:spcPts val="400"/>
+                <a:spcPts val="200"/>
               </a:spcAft>
             </a:pPr>
             <a:r>
-              <a:rPr sz="1400">
+              <a:rPr sz="1300">
                 <a:solidFill>
                   <a:srgbClr val="475569"/>
                 </a:solidFill>
@@ -6091,11 +8640,11 @@
                 <a:spcPct val="110000"/>
               </a:lnSpc>
               <a:spcAft>
-                <a:spcPts val="400"/>
+                <a:spcPts val="200"/>
               </a:spcAft>
             </a:pPr>
             <a:r>
-              <a:rPr sz="1400">
+              <a:rPr sz="1300">
                 <a:solidFill>
                   <a:srgbClr val="475569"/>
                 </a:solidFill>
@@ -6110,17 +8659,36 @@
                 <a:spcPct val="110000"/>
               </a:lnSpc>
               <a:spcAft>
-                <a:spcPts val="400"/>
+                <a:spcPts val="200"/>
               </a:spcAft>
             </a:pPr>
             <a:r>
-              <a:rPr sz="1400">
+              <a:rPr sz="1300">
                 <a:solidFill>
                   <a:srgbClr val="475569"/>
                 </a:solidFill>
                 <a:latin typeface="Calibri"/>
               </a:rPr>
               <a:t>—  Table — Neo4j database whatcomcoops, loaded from the same issue file by substrate/load_coops.py.</a:t>
+            </a:r>
+          </a:p>
+          <a:p>
+            <a:pPr>
+              <a:lnSpc>
+                <a:spcPct val="110000"/>
+              </a:lnSpc>
+              <a:spcAft>
+                <a:spcPts val="200"/>
+              </a:spcAft>
+            </a:pPr>
+            <a:r>
+              <a:rPr sz="1300">
+                <a:solidFill>
+                  <a:srgbClr val="475569"/>
+                </a:solidFill>
+                <a:latin typeface="Calibri"/>
+              </a:rPr>
+              <a:t>—  FedWiki — one page per co-op: its record, its graph, a map, its website; the table plugin on the index page.</a:t>
             </a:r>
           </a:p>
         </p:txBody>
@@ -6360,7 +8928,7 @@
         <p:spPr>
           <a:xfrm>
             <a:off x="521207" y="1453896"/>
-            <a:ext cx="8055864" cy="4737383"/>
+            <a:ext cx="7945142" cy="4672583"/>
           </a:xfrm>
           <a:prstGeom prst="rect">
             <a:avLst/>
@@ -6412,7 +8980,7 @@
         <p:spPr>
           <a:xfrm>
             <a:off x="548640" y="1481328"/>
-            <a:ext cx="8001000" cy="4682519"/>
+            <a:ext cx="7890278" cy="4617720"/>
           </a:xfrm>
           <a:prstGeom prst="rect">
             <a:avLst/>
@@ -6546,7 +9114,7 @@
         </p:nvSpPr>
         <p:spPr>
           <a:xfrm>
-            <a:off x="548640" y="6255287"/>
+            <a:off x="548640" y="6190488"/>
             <a:ext cx="8001000" cy="274320"/>
           </a:xfrm>
           <a:prstGeom prst="rect">
@@ -6812,7 +9380,7 @@
         <p:spPr>
           <a:xfrm>
             <a:off x="521207" y="1453896"/>
-            <a:ext cx="8055864" cy="4737383"/>
+            <a:ext cx="7945142" cy="4672583"/>
           </a:xfrm>
           <a:prstGeom prst="rect">
             <a:avLst/>
@@ -6864,7 +9432,7 @@
         <p:spPr>
           <a:xfrm>
             <a:off x="548640" y="1481328"/>
-            <a:ext cx="8001000" cy="4682519"/>
+            <a:ext cx="7890278" cy="4617720"/>
           </a:xfrm>
           <a:prstGeom prst="rect">
             <a:avLst/>
@@ -6998,7 +9566,7 @@
         </p:nvSpPr>
         <p:spPr>
           <a:xfrm>
-            <a:off x="548640" y="6255287"/>
+            <a:off x="548640" y="6190488"/>
             <a:ext cx="8001000" cy="274320"/>
           </a:xfrm>
           <a:prstGeom prst="rect">
@@ -7264,7 +9832,7 @@
         <p:spPr>
           <a:xfrm>
             <a:off x="521207" y="1453896"/>
-            <a:ext cx="8055864" cy="4737383"/>
+            <a:ext cx="7945142" cy="4672583"/>
           </a:xfrm>
           <a:prstGeom prst="rect">
             <a:avLst/>
@@ -7316,7 +9884,7 @@
         <p:spPr>
           <a:xfrm>
             <a:off x="548640" y="1481328"/>
-            <a:ext cx="8001000" cy="4682519"/>
+            <a:ext cx="7890278" cy="4617720"/>
           </a:xfrm>
           <a:prstGeom prst="rect">
             <a:avLst/>
@@ -7450,7 +10018,7 @@
         </p:nvSpPr>
         <p:spPr>
           <a:xfrm>
-            <a:off x="548640" y="6255287"/>
+            <a:off x="548640" y="6190488"/>
             <a:ext cx="8001000" cy="274320"/>
           </a:xfrm>
           <a:prstGeom prst="rect">
@@ -7716,7 +10284,7 @@
         <p:spPr>
           <a:xfrm>
             <a:off x="521207" y="1453896"/>
-            <a:ext cx="8055864" cy="4737383"/>
+            <a:ext cx="7945142" cy="4672583"/>
           </a:xfrm>
           <a:prstGeom prst="rect">
             <a:avLst/>
@@ -7768,7 +10336,7 @@
         <p:spPr>
           <a:xfrm>
             <a:off x="548640" y="1481328"/>
-            <a:ext cx="8001000" cy="4682519"/>
+            <a:ext cx="7890278" cy="4617720"/>
           </a:xfrm>
           <a:prstGeom prst="rect">
             <a:avLst/>
@@ -7902,7 +10470,7 @@
         </p:nvSpPr>
         <p:spPr>
           <a:xfrm>
-            <a:off x="548640" y="6255287"/>
+            <a:off x="548640" y="6190488"/>
             <a:ext cx="8001000" cy="274320"/>
           </a:xfrm>
           <a:prstGeom prst="rect">
@@ -8168,7 +10736,7 @@
         <p:spPr>
           <a:xfrm>
             <a:off x="521207" y="1453896"/>
-            <a:ext cx="8055864" cy="4737383"/>
+            <a:ext cx="7945142" cy="4672583"/>
           </a:xfrm>
           <a:prstGeom prst="rect">
             <a:avLst/>
@@ -8220,7 +10788,7 @@
         <p:spPr>
           <a:xfrm>
             <a:off x="548640" y="1481328"/>
-            <a:ext cx="8001000" cy="4682519"/>
+            <a:ext cx="7890278" cy="4617720"/>
           </a:xfrm>
           <a:prstGeom prst="rect">
             <a:avLst/>
@@ -8354,7 +10922,7 @@
         </p:nvSpPr>
         <p:spPr>
           <a:xfrm>
-            <a:off x="548640" y="6255287"/>
+            <a:off x="548640" y="6190488"/>
             <a:ext cx="8001000" cy="274320"/>
           </a:xfrm>
           <a:prstGeom prst="rect">
@@ -8620,7 +11188,7 @@
         <p:spPr>
           <a:xfrm>
             <a:off x="521207" y="1453896"/>
-            <a:ext cx="8055864" cy="4737383"/>
+            <a:ext cx="7945142" cy="4672583"/>
           </a:xfrm>
           <a:prstGeom prst="rect">
             <a:avLst/>
@@ -8672,7 +11240,7 @@
         <p:spPr>
           <a:xfrm>
             <a:off x="548640" y="1481328"/>
-            <a:ext cx="8001000" cy="4682519"/>
+            <a:ext cx="7890278" cy="4617720"/>
           </a:xfrm>
           <a:prstGeom prst="rect">
             <a:avLst/>
@@ -8806,7 +11374,7 @@
         </p:nvSpPr>
         <p:spPr>
           <a:xfrm>
-            <a:off x="548640" y="6255287"/>
+            <a:off x="548640" y="6190488"/>
             <a:ext cx="8001000" cy="274320"/>
           </a:xfrm>
           <a:prstGeom prst="rect">
@@ -9072,7 +11640,7 @@
         <p:spPr>
           <a:xfrm>
             <a:off x="521207" y="1453896"/>
-            <a:ext cx="8055864" cy="4737383"/>
+            <a:ext cx="7945142" cy="4672583"/>
           </a:xfrm>
           <a:prstGeom prst="rect">
             <a:avLst/>
@@ -9124,7 +11692,7 @@
         <p:spPr>
           <a:xfrm>
             <a:off x="548640" y="1481328"/>
-            <a:ext cx="8001000" cy="4682519"/>
+            <a:ext cx="7890278" cy="4617720"/>
           </a:xfrm>
           <a:prstGeom prst="rect">
             <a:avLst/>
@@ -9258,7 +11826,7 @@
         </p:nvSpPr>
         <p:spPr>
           <a:xfrm>
-            <a:off x="548640" y="6255287"/>
+            <a:off x="548640" y="6190488"/>
             <a:ext cx="8001000" cy="274320"/>
           </a:xfrm>
           <a:prstGeom prst="rect">

--- a/docs/whatcom-coops-four-lenses.pptx
+++ b/docs/whatcom-coops-four-lenses.pptx
@@ -22,6 +22,8 @@
     <p:sldId id="270" r:id="rId21"/>
     <p:sldId id="271" r:id="rId22"/>
     <p:sldId id="272" r:id="rId23"/>
+    <p:sldId id="273" r:id="rId24"/>
+    <p:sldId id="274" r:id="rId25"/>
   </p:sldIdLst>
   <p:sldSz cx="12188952" cy="6858000" type="screen4x3"/>
   <p:notesSz cx="6858000" cy="9144000"/>
@@ -5108,7 +5110,7 @@
                 </a:solidFill>
                 <a:latin typeface="Calibri"/>
               </a:rPr>
-              <a:t>FEDWIKI — MAP AND FRAME PLUGINS</a:t>
+              <a:t>FEDWIKI — RCN MAP AND RCN TIMELINE PLUGINS</a:t>
             </a:r>
           </a:p>
         </p:txBody>
@@ -5147,7 +5149,7 @@
                 </a:solidFill>
                 <a:latin typeface="Calibri"/>
               </a:rPr>
-              <a:t>Its map and its own website, inside the page</a:t>
+              <a:t>Its map, with the ties, and its history, with its neighbours</a:t>
             </a:r>
           </a:p>
         </p:txBody>
@@ -5161,7 +5163,7 @@
         <p:spPr>
           <a:xfrm>
             <a:off x="521207" y="1453896"/>
-            <a:ext cx="2743403" cy="4672583"/>
+            <a:ext cx="2675030" cy="4672583"/>
           </a:xfrm>
           <a:prstGeom prst="rect">
             <a:avLst/>
@@ -5198,7 +5200,7 @@
       </p:sp>
       <p:pic>
         <p:nvPicPr>
-          <p:cNvPr id="6" name="Picture 5" descr="11-wiki-map-site.jpg"/>
+          <p:cNvPr id="6" name="Picture 5" descr="13-wiki-map-timeline.jpg"/>
           <p:cNvPicPr>
             <a:picLocks noChangeAspect="1"/>
           </p:cNvPicPr>
@@ -5213,7 +5215,7 @@
         <p:spPr>
           <a:xfrm>
             <a:off x="548640" y="1481328"/>
-            <a:ext cx="2688539" cy="4617720"/>
+            <a:ext cx="2620166" cy="4617720"/>
           </a:xfrm>
           <a:prstGeom prst="rect">
             <a:avLst/>
@@ -5296,7 +5298,7 @@
                 </a:solidFill>
                 <a:latin typeface="Calibri"/>
               </a:rPr>
-              <a:t>—  A Map item — FedWiki’s own map plugin — shows this co-op and the co-ops it is tied to. Each point is a wiki link to that co-op’s page.</a:t>
+              <a:t>—  An RCN Map item draws this co-op and the co-ops it is tied to, with the ties in their colours and line styles. Click a point and its page opens beside this one.</a:t>
             </a:r>
           </a:p>
           <a:p>
@@ -5315,7 +5317,7 @@
                 </a:solidFill>
                 <a:latin typeface="Calibri"/>
               </a:rPr>
-              <a:t>—  The map is plain text, one line per point, so anyone can edit it in the page. It works on any wiki with nothing uploaded.</a:t>
+              <a:t>—  An RCN Timeline item draws the co-op’s own history first, then the history of each co-op it is tied to: the same neighbours as the graph and the map, now in time.</a:t>
             </a:r>
           </a:p>
           <a:p>
@@ -5334,7 +5336,7 @@
                 </a:solidFill>
                 <a:latin typeface="Calibri"/>
               </a:rPr>
-              <a:t>—  It draws points, not ties; the graph just above carries the ties. The table’s Map button draws them on a map.</a:t>
+              <a:t>—  Hover a bar for its dates, how uncertain they are, who says so and how sure. Click it and that co-op’s page opens.</a:t>
             </a:r>
           </a:p>
           <a:p>
@@ -5353,7 +5355,7 @@
                 </a:solidFill>
                 <a:latin typeface="Calibri"/>
               </a:rPr>
-              <a:t>—  A Frame item — used only for this — shows the co-op’s own website, live, under the map.</a:t>
+              <a:t>—  “Open in RCN Timeline ↗” opens the full tool with this timeline in it.</a:t>
             </a:r>
           </a:p>
           <a:p>
@@ -5372,7 +5374,7 @@
                 </a:solidFill>
                 <a:latin typeface="Calibri"/>
               </a:rPr>
-              <a:t>—  11 of the 22 sites show inside the page. The other 11 refuse to be framed, put up a bot check, are down, or have no site; those pages link out and say why.</a:t>
+              <a:t>—  A Frame item, used only for this, shows the co-op’s own website below: 11 of the 22 sites allow it; the rest link out and say why.</a:t>
             </a:r>
           </a:p>
         </p:txBody>
@@ -5411,7 +5413,7 @@
                 </a:solidFill>
                 <a:latin typeface="Calibri"/>
               </a:rPr>
-              <a:t>Screenshot · Community Food Co-op, scrolled to its map and website</a:t>
+              <a:t>Screenshot · North Cascades Meat Producers Cooperative, scrolled to its map and timeline</a:t>
             </a:r>
           </a:p>
         </p:txBody>
@@ -5598,7 +5600,7 @@
                 </a:solidFill>
                 <a:latin typeface="Calibri"/>
               </a:rPr>
-              <a:t>FEDWIKI — TABLE PLUGIN</a:t>
+              <a:t>FEDWIKI — RCN TIMELINE PLUGIN</a:t>
             </a:r>
           </a:p>
         </p:txBody>
@@ -5637,7 +5639,7 @@
                 </a:solidFill>
                 <a:latin typeface="Calibri"/>
               </a:rPr>
-              <a:t>The FedWiki table plugin: all 22 co-ops on the index page</a:t>
+              <a:t>A timeline on 19 co-op pages, and the whole history on the index</a:t>
             </a:r>
           </a:p>
         </p:txBody>
@@ -5651,7 +5653,7 @@
         <p:spPr>
           <a:xfrm>
             <a:off x="521207" y="1453896"/>
-            <a:ext cx="3255264" cy="2138845"/>
+            <a:ext cx="3086100" cy="2935224"/>
           </a:xfrm>
           <a:prstGeom prst="rect">
             <a:avLst/>
@@ -5688,7 +5690,7 @@
       </p:sp>
       <p:pic>
         <p:nvPicPr>
-          <p:cNvPr id="6" name="Picture 5" descr="12-wiki-table-item.jpg"/>
+          <p:cNvPr id="6" name="Picture 5" descr="14-wiki-timeline-coop.jpg"/>
           <p:cNvPicPr>
             <a:picLocks noChangeAspect="1"/>
           </p:cNvPicPr>
@@ -5703,7 +5705,7 @@
         <p:spPr>
           <a:xfrm>
             <a:off x="548640" y="1481328"/>
-            <a:ext cx="3200400" cy="2083981"/>
+            <a:ext cx="3031236" cy="2880360"/>
           </a:xfrm>
           <a:prstGeom prst="rect">
             <a:avLst/>
@@ -5718,8 +5720,8 @@
         </p:nvSpPr>
         <p:spPr>
           <a:xfrm>
-            <a:off x="548640" y="3638461"/>
-            <a:ext cx="3840480" cy="274320"/>
+            <a:off x="548640" y="4434840"/>
+            <a:ext cx="5120640" cy="274320"/>
           </a:xfrm>
           <a:prstGeom prst="rect">
             <a:avLst/>
@@ -5744,7 +5746,7 @@
                 </a:solidFill>
                 <a:latin typeface="Calibri"/>
               </a:rPr>
-              <a:t>The rcntable item on the index page</a:t>
+              <a:t>Community Food Co-op: its own history, then the five co-ops it is tied to</a:t>
             </a:r>
           </a:p>
         </p:txBody>
@@ -5757,8 +5759,8 @@
         </p:nvSpPr>
         <p:spPr>
           <a:xfrm>
-            <a:off x="548640" y="3976789"/>
-            <a:ext cx="3931920" cy="2651760"/>
+            <a:off x="548640" y="4773168"/>
+            <a:ext cx="5852160" cy="1828800"/>
           </a:xfrm>
           <a:prstGeom prst="rect">
             <a:avLst/>
@@ -5786,7 +5788,7 @@
                 </a:solidFill>
                 <a:latin typeface="Calibri"/>
               </a:rPr>
-              <a:t>—  The item names the records: database whatcomcoops, kind Coop.</a:t>
+              <a:t>—  Each interval names the co-op it belongs to, so a page draws the co-op’s own bars and its neighbours’ without a second list to keep in step.</a:t>
             </a:r>
           </a:p>
           <a:p>
@@ -5805,7 +5807,7 @@
                 </a:solidFill>
                 <a:latin typeface="Calibri"/>
               </a:rPr>
-              <a:t>—  Open Table ↗ opens the RCN Table beside the wiki — the same table as slide 9.</a:t>
+              <a:t>—  Grey bars are what a co-op was before: A-1 Builders before A1DesignBuild, the Co-op Education Project before Cascade Cooperatives.</a:t>
             </a:r>
           </a:p>
           <a:p>
@@ -5824,26 +5826,7 @@
                 </a:solidFill>
                 <a:latin typeface="Calibri"/>
               </a:rPr>
-              <a:t>—  At home it reads Neo4j live through substrate/api.py. On a hosted wiki it reads the exported folder in the site’s own assets, so each site is its own database.</a:t>
-            </a:r>
-          </a:p>
-          <a:p>
-            <a:pPr>
-              <a:lnSpc>
-                <a:spcPct val="110000"/>
-              </a:lnSpc>
-              <a:spcAft>
-                <a:spcPts val="300"/>
-              </a:spcAft>
-            </a:pPr>
-            <a:r>
-              <a:rPr sz="1200">
-                <a:solidFill>
-                  <a:srgbClr val="475569"/>
-                </a:solidFill>
-                <a:latin typeface="Calibri"/>
-              </a:rPr>
-              <a:t>—  Every name in the table opens that co-op’s page in the lineup.</a:t>
+              <a:t>—  Only WECU, REI and Darigold have a single bar and no ties; their pages point to the whole timeline instead.</a:t>
             </a:r>
           </a:p>
         </p:txBody>
@@ -5856,8 +5839,8 @@
         </p:nvSpPr>
         <p:spPr>
           <a:xfrm>
-            <a:off x="4727448" y="1453896"/>
-            <a:ext cx="6912864" cy="4068451"/>
+            <a:off x="6922007" y="1453896"/>
+            <a:ext cx="2902077" cy="4901183"/>
           </a:xfrm>
           <a:prstGeom prst="rect">
             <a:avLst/>
@@ -5894,7 +5877,7 @@
       </p:sp>
       <p:pic>
         <p:nvPicPr>
-          <p:cNvPr id="10" name="Picture 9" descr="07-table.jpg"/>
+          <p:cNvPr id="10" name="Picture 9" descr="16-wiki-timeline-index.jpg"/>
           <p:cNvPicPr>
             <a:picLocks noChangeAspect="1"/>
           </p:cNvPicPr>
@@ -5908,8 +5891,8 @@
         </p:blipFill>
         <p:spPr>
           <a:xfrm>
-            <a:off x="4754880" y="1481328"/>
-            <a:ext cx="6858000" cy="4013587"/>
+            <a:off x="6949440" y="1481328"/>
+            <a:ext cx="2847213" cy="4846320"/>
           </a:xfrm>
           <a:prstGeom prst="rect">
             <a:avLst/>
@@ -5924,8 +5907,8 @@
         </p:nvSpPr>
         <p:spPr>
           <a:xfrm>
-            <a:off x="4754880" y="5568067"/>
-            <a:ext cx="6858000" cy="274320"/>
+            <a:off x="6949440" y="6400800"/>
+            <a:ext cx="4663440" cy="274320"/>
           </a:xfrm>
           <a:prstGeom prst="rect">
             <a:avLst/>
@@ -5950,7 +5933,7 @@
                 </a:solidFill>
                 <a:latin typeface="Calibri"/>
               </a:rPr>
-              <a:t>What Open Table shows</a:t>
+              <a:t>The index page: 35 bars, 1918 to today</a:t>
             </a:r>
           </a:p>
         </p:txBody>
@@ -6137,7 +6120,7 @@
                 </a:solidFill>
                 <a:latin typeface="Calibri"/>
               </a:rPr>
-              <a:t>FEDWIKI — HOW IT WENT</a:t>
+              <a:t>FEDWIKI — OPEN IN RCN TIMELINE</a:t>
             </a:r>
           </a:p>
         </p:txBody>
@@ -6176,7 +6159,7 @@
                 </a:solidFill>
                 <a:latin typeface="Calibri"/>
               </a:rPr>
-              <a:t>Making it work: what broke, and what it cannot do</a:t>
+              <a:t>One click from the page to the full Timeline tool</a:t>
             </a:r>
           </a:p>
         </p:txBody>
@@ -6189,19 +6172,17 @@
         </p:nvSpPr>
         <p:spPr>
           <a:xfrm>
-            <a:off x="548640" y="1554480"/>
-            <a:ext cx="5486400" cy="3017520"/>
+            <a:off x="521207" y="1453896"/>
+            <a:ext cx="6380338" cy="4672583"/>
           </a:xfrm>
           <a:prstGeom prst="rect">
             <a:avLst/>
           </a:prstGeom>
           <a:solidFill>
-            <a:srgbClr val="FFFFFF"/>
+            <a:srgbClr val="E2E8F0"/>
           </a:solidFill>
-          <a:ln w="12700">
-            <a:solidFill>
-              <a:srgbClr val="E2E8F0"/>
-            </a:solidFill>
+          <a:ln>
+            <a:noFill/>
           </a:ln>
           <a:effectLst/>
         </p:spPr>
@@ -6227,16 +6208,40 @@
           </a:p>
         </p:txBody>
       </p:sp>
-      <p:sp>
-        <p:nvSpPr>
-          <p:cNvPr id="6" name="TextBox 5"/>
-          <p:cNvSpPr txBox="1"/>
-          <p:nvPr/>
-        </p:nvSpPr>
-        <p:spPr>
-          <a:xfrm>
-            <a:off x="777240" y="1691640"/>
-            <a:ext cx="5029200" cy="274320"/>
+      <p:pic>
+        <p:nvPicPr>
+          <p:cNvPr id="6" name="Picture 5" descr="15-timeline-tool-opened.jpg"/>
+          <p:cNvPicPr>
+            <a:picLocks noChangeAspect="1"/>
+          </p:cNvPicPr>
+          <p:nvPr/>
+        </p:nvPicPr>
+        <p:blipFill>
+          <a:blip r:embed="rId2"/>
+          <a:stretch>
+            <a:fillRect/>
+          </a:stretch>
+        </p:blipFill>
+        <p:spPr>
+          <a:xfrm>
+            <a:off x="548640" y="1481328"/>
+            <a:ext cx="6325474" cy="4617720"/>
+          </a:xfrm>
+          <a:prstGeom prst="rect">
+            <a:avLst/>
+          </a:prstGeom>
+        </p:spPr>
+      </p:pic>
+      <p:sp>
+        <p:nvSpPr>
+          <p:cNvPr id="7" name="TextBox 6"/>
+          <p:cNvSpPr txBox="1"/>
+          <p:nvPr/>
+        </p:nvSpPr>
+        <p:spPr>
+          <a:xfrm>
+            <a:off x="8869680" y="1481328"/>
+            <a:ext cx="2926080" cy="274320"/>
           </a:xfrm>
           <a:prstGeom prst="rect">
             <a:avLst/>
@@ -6257,25 +6262,25 @@
             <a:r>
               <a:rPr sz="1100" b="1" i="0">
                 <a:solidFill>
-                  <a:srgbClr val="1A7A4A"/>
-                </a:solidFill>
-                <a:latin typeface="Calibri"/>
-              </a:rPr>
-              <a:t>FIXED</a:t>
-            </a:r>
-          </a:p>
-        </p:txBody>
-      </p:sp>
-      <p:sp>
-        <p:nvSpPr>
-          <p:cNvPr id="7" name="TextBox 6"/>
-          <p:cNvSpPr txBox="1"/>
-          <p:nvPr/>
-        </p:nvSpPr>
-        <p:spPr>
-          <a:xfrm>
-            <a:off x="777240" y="2011680"/>
-            <a:ext cx="5029200" cy="2468880"/>
+                  <a:srgbClr val="B45309"/>
+                </a:solidFill>
+                <a:latin typeface="Calibri"/>
+              </a:rPr>
+              <a:t>WHAT YOU ARE SEEING</a:t>
+            </a:r>
+          </a:p>
+        </p:txBody>
+      </p:sp>
+      <p:sp>
+        <p:nvSpPr>
+          <p:cNvPr id="8" name="TextBox 7"/>
+          <p:cNvSpPr txBox="1"/>
+          <p:nvPr/>
+        </p:nvSpPr>
+        <p:spPr>
+          <a:xfrm>
+            <a:off x="8869680" y="1810512"/>
+            <a:ext cx="2834640" cy="4206240"/>
           </a:xfrm>
           <a:prstGeom prst="rect">
             <a:avLst/>
@@ -6293,17 +6298,17 @@
                 <a:spcPct val="110000"/>
               </a:lnSpc>
               <a:spcAft>
-                <a:spcPts val="600"/>
+                <a:spcPts val="800"/>
               </a:spcAft>
             </a:pPr>
             <a:r>
-              <a:rPr sz="1300">
+              <a:rPr sz="1400">
                 <a:solidFill>
                   <a:srgbClr val="475569"/>
                 </a:solidFill>
                 <a:latin typeface="Calibri"/>
               </a:rPr>
-              <a:t>—  Clicking a two-line name in a graph did nothing, or reloaded the wiki. Each co-op box is now one link. The real fix belongs in the Graph Tool, for every diagram.</a:t>
+              <a:t>—  “Open in RCN Timeline ↗” under any timeline opens the full tool in its own tab, with that timeline loaded: the North Cascades Meat co-op’s 8 intervals here.</a:t>
             </a:r>
           </a:p>
           <a:p>
@@ -6312,17 +6317,17 @@
                 <a:spcPct val="110000"/>
               </a:lnSpc>
               <a:spcAft>
-                <a:spcPts val="600"/>
+                <a:spcPts val="800"/>
               </a:spcAft>
             </a:pPr>
             <a:r>
-              <a:rPr sz="1300">
+              <a:rPr sz="1400">
                 <a:solidFill>
                   <a:srgbClr val="475569"/>
                 </a:solidFill>
                 <a:latin typeface="Calibri"/>
               </a:rPr>
-              <a:t>—  The maps first ran the RCN Map inside Frame items. That tied the pages to one wiki and needed files uploaded, so they now use FedWiki’s own Map plugin; Frame is kept for the websites only.</a:t>
+              <a:t>—  Nothing is lost on the way: the bar’s page and co-op links ride along, so the tool can hand them back.</a:t>
             </a:r>
           </a:p>
           <a:p>
@@ -6331,64 +6336,37 @@
                 <a:spcPct val="110000"/>
               </a:lnSpc>
               <a:spcAft>
-                <a:spcPts val="600"/>
+                <a:spcPts val="800"/>
               </a:spcAft>
             </a:pPr>
             <a:r>
-              <a:rPr sz="1300">
+              <a:rPr sz="1400">
                 <a:solidFill>
                   <a:srgbClr val="475569"/>
                 </a:solidFill>
                 <a:latin typeface="Calibri"/>
               </a:rPr>
-              <a:t>—  Along the way the table’s map learned to load on its own and to use the Esri basemap, so it also works when framed.</a:t>
-            </a:r>
-          </a:p>
-        </p:txBody>
-      </p:sp>
-      <p:sp>
-        <p:nvSpPr>
-          <p:cNvPr id="8" name="Rectangle 7"/>
-          <p:cNvSpPr/>
-          <p:nvPr/>
-        </p:nvSpPr>
-        <p:spPr>
-          <a:xfrm>
-            <a:off x="6263640" y="1554480"/>
-            <a:ext cx="5394960" cy="3017520"/>
-          </a:xfrm>
-          <a:prstGeom prst="rect">
-            <a:avLst/>
-          </a:prstGeom>
-          <a:solidFill>
-            <a:srgbClr val="FEF3C7"/>
-          </a:solidFill>
-          <a:ln w="12700">
-            <a:solidFill>
-              <a:srgbClr val="FDE047"/>
-            </a:solidFill>
-          </a:ln>
-          <a:effectLst/>
-        </p:spPr>
-        <p:style>
-          <a:lnRef idx="1">
-            <a:schemeClr val="accent1"/>
-          </a:lnRef>
-          <a:fillRef idx="3">
-            <a:schemeClr val="accent1"/>
-          </a:fillRef>
-          <a:effectRef idx="2">
-            <a:schemeClr val="accent1"/>
-          </a:effectRef>
-          <a:fontRef idx="minor">
-            <a:schemeClr val="lt1"/>
-          </a:fontRef>
-        </p:style>
-        <p:txBody>
-          <a:bodyPr rtlCol="0" anchor="ctr"/>
-          <a:lstStyle/>
-          <a:p>
-            <a:pPr algn="ctr"/>
+              <a:t>—  Open a second timeline from another page and the same tab switches to it, as one undo step.</a:t>
+            </a:r>
+          </a:p>
+          <a:p>
+            <a:pPr>
+              <a:lnSpc>
+                <a:spcPct val="110000"/>
+              </a:lnSpc>
+              <a:spcAft>
+                <a:spcPts val="800"/>
+              </a:spcAft>
+            </a:pPr>
+            <a:r>
+              <a:rPr sz="1400">
+                <a:solidFill>
+                  <a:srgbClr val="475569"/>
+                </a:solidFill>
+                <a:latin typeface="Calibri"/>
+              </a:rPr>
+              <a:t>—  Edits made in the tool do not come back to the page yet — saving back is the next step.</a:t>
+            </a:r>
           </a:p>
         </p:txBody>
       </p:sp>
@@ -6400,8 +6378,8 @@
         </p:nvSpPr>
         <p:spPr>
           <a:xfrm>
-            <a:off x="6492240" y="1691640"/>
-            <a:ext cx="4937760" cy="274320"/>
+            <a:off x="548640" y="6190488"/>
+            <a:ext cx="8001000" cy="274320"/>
           </a:xfrm>
           <a:prstGeom prst="rect">
             <a:avLst/>
@@ -6420,13 +6398,13 @@
               </a:lnSpc>
             </a:pPr>
             <a:r>
-              <a:rPr sz="1100" b="1" i="0">
-                <a:solidFill>
-                  <a:srgbClr val="854D0E"/>
-                </a:solidFill>
-                <a:latin typeface="Calibri"/>
-              </a:rPr>
-              <a:t>LIMITS</a:t>
+              <a:rPr sz="1000" b="0" i="1">
+                <a:solidFill>
+                  <a:srgbClr val="94A3B8"/>
+                </a:solidFill>
+                <a:latin typeface="Calibri"/>
+              </a:rPr>
+              <a:t>Screenshot · RCN Timeline, opened from the North Cascades Meat Producers Cooperative page</a:t>
             </a:r>
           </a:p>
         </p:txBody>
@@ -6434,106 +6412,6 @@
       <p:sp>
         <p:nvSpPr>
           <p:cNvPr id="10" name="TextBox 9"/>
-          <p:cNvSpPr txBox="1"/>
-          <p:nvPr/>
-        </p:nvSpPr>
-        <p:spPr>
-          <a:xfrm>
-            <a:off x="6492240" y="2011680"/>
-            <a:ext cx="4937760" cy="2468880"/>
-          </a:xfrm>
-          <a:prstGeom prst="rect">
-            <a:avLst/>
-          </a:prstGeom>
-          <a:noFill/>
-        </p:spPr>
-        <p:txBody>
-          <a:bodyPr wrap="square">
-            <a:spAutoFit/>
-          </a:bodyPr>
-          <a:lstStyle/>
-          <a:p>
-            <a:pPr>
-              <a:lnSpc>
-                <a:spcPct val="110000"/>
-              </a:lnSpc>
-              <a:spcAft>
-                <a:spcPts val="600"/>
-              </a:spcAft>
-            </a:pPr>
-            <a:r>
-              <a:rPr sz="1300">
-                <a:solidFill>
-                  <a:srgbClr val="854D0E"/>
-                </a:solidFill>
-                <a:latin typeface="Calibri"/>
-              </a:rPr>
-              <a:t>—  The per-page map shows points, not ties: we found no way in its text format to draw a line between two points. An RCN map plugin would.</a:t>
-            </a:r>
-          </a:p>
-          <a:p>
-            <a:pPr>
-              <a:lnSpc>
-                <a:spcPct val="110000"/>
-              </a:lnSpc>
-              <a:spcAft>
-                <a:spcPts val="600"/>
-              </a:spcAft>
-            </a:pPr>
-            <a:r>
-              <a:rPr sz="1300">
-                <a:solidFill>
-                  <a:srgbClr val="854D0E"/>
-                </a:solidFill>
-                <a:latin typeface="Calibri"/>
-              </a:rPr>
-              <a:t>—  Half the co-op websites cannot be shown in a page — ICU, REI, North Coast CU, A1DesignBuild and the Food Hub refuse; Bellingham Bay Builders’ bot check never finishes. Those pages link out.</a:t>
-            </a:r>
-          </a:p>
-        </p:txBody>
-      </p:sp>
-      <p:sp>
-        <p:nvSpPr>
-          <p:cNvPr id="11" name="TextBox 10"/>
-          <p:cNvSpPr txBox="1"/>
-          <p:nvPr/>
-        </p:nvSpPr>
-        <p:spPr>
-          <a:xfrm>
-            <a:off x="548640" y="4846320"/>
-            <a:ext cx="11064240" cy="731520"/>
-          </a:xfrm>
-          <a:prstGeom prst="rect">
-            <a:avLst/>
-          </a:prstGeom>
-          <a:noFill/>
-        </p:spPr>
-        <p:txBody>
-          <a:bodyPr wrap="square" anchor="t">
-            <a:spAutoFit/>
-          </a:bodyPr>
-          <a:lstStyle/>
-          <a:p>
-            <a:pPr algn="l">
-              <a:lnSpc>
-                <a:spcPct val="105000"/>
-              </a:lnSpc>
-            </a:pPr>
-            <a:r>
-              <a:rPr sz="1500" b="0" i="1">
-                <a:solidFill>
-                  <a:srgbClr val="475569"/>
-                </a:solidFill>
-                <a:latin typeface="Calibri"/>
-              </a:rPr>
-              <a:t>Checked in a real FedWiki (coops.localhost): a graph click opens the page beside, the Food Co-op’s map shows its 6 co-ops, and the websites were tested in the frame plugin’s own sandbox or by their headers — 11 show.</a:t>
-            </a:r>
-          </a:p>
-        </p:txBody>
-      </p:sp>
-      <p:sp>
-        <p:nvSpPr>
-          <p:cNvPr id="12" name="TextBox 11"/>
           <p:cNvSpPr txBox="1"/>
           <p:nvPr/>
         </p:nvSpPr>
@@ -6572,7 +6450,7 @@
       </p:sp>
       <p:sp>
         <p:nvSpPr>
-          <p:cNvPr id="13" name="TextBox 12"/>
+          <p:cNvPr id="11" name="TextBox 10"/>
           <p:cNvSpPr txBox="1"/>
           <p:nvPr/>
         </p:nvSpPr>
@@ -6650,7 +6528,7 @@
             <a:avLst/>
           </a:prstGeom>
           <a:solidFill>
-            <a:srgbClr val="D4A017"/>
+            <a:srgbClr val="B45309"/>
           </a:solidFill>
           <a:ln>
             <a:noFill/>
@@ -6709,11 +6587,11 @@
             <a:r>
               <a:rPr sz="1200" b="1" i="0">
                 <a:solidFill>
-                  <a:srgbClr val="D4A017"/>
-                </a:solidFill>
-                <a:latin typeface="Calibri"/>
-              </a:rPr>
-              <a:t>CONTACTS</a:t>
+                  <a:srgbClr val="B45309"/>
+                </a:solidFill>
+                <a:latin typeface="Calibri"/>
+              </a:rPr>
+              <a:t>FEDWIKI — TABLE PLUGIN</a:t>
             </a:r>
           </a:p>
         </p:txBody>
@@ -6752,7 +6630,7 @@
                 </a:solidFill>
                 <a:latin typeface="Calibri"/>
               </a:rPr>
-              <a:t>What the contact check found — and what to verify before calling</a:t>
+              <a:t>The FedWiki table plugin: all 22 co-ops on the index page</a:t>
             </a:r>
           </a:p>
         </p:txBody>
@@ -6765,8 +6643,547 @@
         </p:nvSpPr>
         <p:spPr>
           <a:xfrm>
+            <a:off x="521207" y="1453896"/>
+            <a:ext cx="3255264" cy="2138845"/>
+          </a:xfrm>
+          <a:prstGeom prst="rect">
+            <a:avLst/>
+          </a:prstGeom>
+          <a:solidFill>
+            <a:srgbClr val="E2E8F0"/>
+          </a:solidFill>
+          <a:ln>
+            <a:noFill/>
+          </a:ln>
+          <a:effectLst/>
+        </p:spPr>
+        <p:style>
+          <a:lnRef idx="1">
+            <a:schemeClr val="accent1"/>
+          </a:lnRef>
+          <a:fillRef idx="3">
+            <a:schemeClr val="accent1"/>
+          </a:fillRef>
+          <a:effectRef idx="2">
+            <a:schemeClr val="accent1"/>
+          </a:effectRef>
+          <a:fontRef idx="minor">
+            <a:schemeClr val="lt1"/>
+          </a:fontRef>
+        </p:style>
+        <p:txBody>
+          <a:bodyPr rtlCol="0" anchor="ctr"/>
+          <a:lstStyle/>
+          <a:p>
+            <a:pPr algn="ctr"/>
+          </a:p>
+        </p:txBody>
+      </p:sp>
+      <p:pic>
+        <p:nvPicPr>
+          <p:cNvPr id="6" name="Picture 5" descr="12-wiki-table-item.jpg"/>
+          <p:cNvPicPr>
+            <a:picLocks noChangeAspect="1"/>
+          </p:cNvPicPr>
+          <p:nvPr/>
+        </p:nvPicPr>
+        <p:blipFill>
+          <a:blip r:embed="rId2"/>
+          <a:stretch>
+            <a:fillRect/>
+          </a:stretch>
+        </p:blipFill>
+        <p:spPr>
+          <a:xfrm>
+            <a:off x="548640" y="1481328"/>
+            <a:ext cx="3200400" cy="2083981"/>
+          </a:xfrm>
+          <a:prstGeom prst="rect">
+            <a:avLst/>
+          </a:prstGeom>
+        </p:spPr>
+      </p:pic>
+      <p:sp>
+        <p:nvSpPr>
+          <p:cNvPr id="7" name="TextBox 6"/>
+          <p:cNvSpPr txBox="1"/>
+          <p:nvPr/>
+        </p:nvSpPr>
+        <p:spPr>
+          <a:xfrm>
+            <a:off x="548640" y="3638461"/>
+            <a:ext cx="3840480" cy="274320"/>
+          </a:xfrm>
+          <a:prstGeom prst="rect">
+            <a:avLst/>
+          </a:prstGeom>
+          <a:noFill/>
+        </p:spPr>
+        <p:txBody>
+          <a:bodyPr wrap="square" anchor="t">
+            <a:spAutoFit/>
+          </a:bodyPr>
+          <a:lstStyle/>
+          <a:p>
+            <a:pPr algn="l">
+              <a:lnSpc>
+                <a:spcPct val="105000"/>
+              </a:lnSpc>
+            </a:pPr>
+            <a:r>
+              <a:rPr sz="1000" b="0" i="1">
+                <a:solidFill>
+                  <a:srgbClr val="94A3B8"/>
+                </a:solidFill>
+                <a:latin typeface="Calibri"/>
+              </a:rPr>
+              <a:t>The rcntable item on the index page</a:t>
+            </a:r>
+          </a:p>
+        </p:txBody>
+      </p:sp>
+      <p:sp>
+        <p:nvSpPr>
+          <p:cNvPr id="8" name="TextBox 7"/>
+          <p:cNvSpPr txBox="1"/>
+          <p:nvPr/>
+        </p:nvSpPr>
+        <p:spPr>
+          <a:xfrm>
+            <a:off x="548640" y="3976789"/>
+            <a:ext cx="3931920" cy="2651760"/>
+          </a:xfrm>
+          <a:prstGeom prst="rect">
+            <a:avLst/>
+          </a:prstGeom>
+          <a:noFill/>
+        </p:spPr>
+        <p:txBody>
+          <a:bodyPr wrap="square">
+            <a:spAutoFit/>
+          </a:bodyPr>
+          <a:lstStyle/>
+          <a:p>
+            <a:pPr>
+              <a:lnSpc>
+                <a:spcPct val="110000"/>
+              </a:lnSpc>
+              <a:spcAft>
+                <a:spcPts val="300"/>
+              </a:spcAft>
+            </a:pPr>
+            <a:r>
+              <a:rPr sz="1200">
+                <a:solidFill>
+                  <a:srgbClr val="475569"/>
+                </a:solidFill>
+                <a:latin typeface="Calibri"/>
+              </a:rPr>
+              <a:t>—  The item names the records: database whatcomcoops, kind Coop.</a:t>
+            </a:r>
+          </a:p>
+          <a:p>
+            <a:pPr>
+              <a:lnSpc>
+                <a:spcPct val="110000"/>
+              </a:lnSpc>
+              <a:spcAft>
+                <a:spcPts val="300"/>
+              </a:spcAft>
+            </a:pPr>
+            <a:r>
+              <a:rPr sz="1200">
+                <a:solidFill>
+                  <a:srgbClr val="475569"/>
+                </a:solidFill>
+                <a:latin typeface="Calibri"/>
+              </a:rPr>
+              <a:t>—  Open Table ↗ opens the RCN Table beside the wiki — the same table as slide 9.</a:t>
+            </a:r>
+          </a:p>
+          <a:p>
+            <a:pPr>
+              <a:lnSpc>
+                <a:spcPct val="110000"/>
+              </a:lnSpc>
+              <a:spcAft>
+                <a:spcPts val="300"/>
+              </a:spcAft>
+            </a:pPr>
+            <a:r>
+              <a:rPr sz="1200">
+                <a:solidFill>
+                  <a:srgbClr val="475569"/>
+                </a:solidFill>
+                <a:latin typeface="Calibri"/>
+              </a:rPr>
+              <a:t>—  At home it reads Neo4j live through substrate/api.py. On a hosted wiki it reads the exported folder in the site’s own assets, so each site is its own database.</a:t>
+            </a:r>
+          </a:p>
+          <a:p>
+            <a:pPr>
+              <a:lnSpc>
+                <a:spcPct val="110000"/>
+              </a:lnSpc>
+              <a:spcAft>
+                <a:spcPts val="300"/>
+              </a:spcAft>
+            </a:pPr>
+            <a:r>
+              <a:rPr sz="1200">
+                <a:solidFill>
+                  <a:srgbClr val="475569"/>
+                </a:solidFill>
+                <a:latin typeface="Calibri"/>
+              </a:rPr>
+              <a:t>—  Every name in the table opens that co-op’s page in the lineup.</a:t>
+            </a:r>
+          </a:p>
+        </p:txBody>
+      </p:sp>
+      <p:sp>
+        <p:nvSpPr>
+          <p:cNvPr id="9" name="Rectangle 8"/>
+          <p:cNvSpPr/>
+          <p:nvPr/>
+        </p:nvSpPr>
+        <p:spPr>
+          <a:xfrm>
+            <a:off x="4727448" y="1453896"/>
+            <a:ext cx="6912864" cy="4068451"/>
+          </a:xfrm>
+          <a:prstGeom prst="rect">
+            <a:avLst/>
+          </a:prstGeom>
+          <a:solidFill>
+            <a:srgbClr val="E2E8F0"/>
+          </a:solidFill>
+          <a:ln>
+            <a:noFill/>
+          </a:ln>
+          <a:effectLst/>
+        </p:spPr>
+        <p:style>
+          <a:lnRef idx="1">
+            <a:schemeClr val="accent1"/>
+          </a:lnRef>
+          <a:fillRef idx="3">
+            <a:schemeClr val="accent1"/>
+          </a:fillRef>
+          <a:effectRef idx="2">
+            <a:schemeClr val="accent1"/>
+          </a:effectRef>
+          <a:fontRef idx="minor">
+            <a:schemeClr val="lt1"/>
+          </a:fontRef>
+        </p:style>
+        <p:txBody>
+          <a:bodyPr rtlCol="0" anchor="ctr"/>
+          <a:lstStyle/>
+          <a:p>
+            <a:pPr algn="ctr"/>
+          </a:p>
+        </p:txBody>
+      </p:sp>
+      <p:pic>
+        <p:nvPicPr>
+          <p:cNvPr id="10" name="Picture 9" descr="07-table.jpg"/>
+          <p:cNvPicPr>
+            <a:picLocks noChangeAspect="1"/>
+          </p:cNvPicPr>
+          <p:nvPr/>
+        </p:nvPicPr>
+        <p:blipFill>
+          <a:blip r:embed="rId3"/>
+          <a:stretch>
+            <a:fillRect/>
+          </a:stretch>
+        </p:blipFill>
+        <p:spPr>
+          <a:xfrm>
+            <a:off x="4754880" y="1481328"/>
+            <a:ext cx="6858000" cy="4013587"/>
+          </a:xfrm>
+          <a:prstGeom prst="rect">
+            <a:avLst/>
+          </a:prstGeom>
+        </p:spPr>
+      </p:pic>
+      <p:sp>
+        <p:nvSpPr>
+          <p:cNvPr id="11" name="TextBox 10"/>
+          <p:cNvSpPr txBox="1"/>
+          <p:nvPr/>
+        </p:nvSpPr>
+        <p:spPr>
+          <a:xfrm>
+            <a:off x="4754880" y="5568067"/>
+            <a:ext cx="6858000" cy="274320"/>
+          </a:xfrm>
+          <a:prstGeom prst="rect">
+            <a:avLst/>
+          </a:prstGeom>
+          <a:noFill/>
+        </p:spPr>
+        <p:txBody>
+          <a:bodyPr wrap="square" anchor="t">
+            <a:spAutoFit/>
+          </a:bodyPr>
+          <a:lstStyle/>
+          <a:p>
+            <a:pPr algn="l">
+              <a:lnSpc>
+                <a:spcPct val="105000"/>
+              </a:lnSpc>
+            </a:pPr>
+            <a:r>
+              <a:rPr sz="1000" b="0" i="1">
+                <a:solidFill>
+                  <a:srgbClr val="94A3B8"/>
+                </a:solidFill>
+                <a:latin typeface="Calibri"/>
+              </a:rPr>
+              <a:t>What Open Table shows</a:t>
+            </a:r>
+          </a:p>
+        </p:txBody>
+      </p:sp>
+      <p:sp>
+        <p:nvSpPr>
+          <p:cNvPr id="12" name="TextBox 11"/>
+          <p:cNvSpPr txBox="1"/>
+          <p:nvPr/>
+        </p:nvSpPr>
+        <p:spPr>
+          <a:xfrm>
+            <a:off x="548640" y="6446520"/>
+            <a:ext cx="5486400" cy="274320"/>
+          </a:xfrm>
+          <a:prstGeom prst="rect">
+            <a:avLst/>
+          </a:prstGeom>
+          <a:noFill/>
+        </p:spPr>
+        <p:txBody>
+          <a:bodyPr wrap="square" anchor="t">
+            <a:spAutoFit/>
+          </a:bodyPr>
+          <a:lstStyle/>
+          <a:p>
+            <a:pPr algn="l">
+              <a:lnSpc>
+                <a:spcPct val="105000"/>
+              </a:lnSpc>
+            </a:pPr>
+            <a:r>
+              <a:rPr sz="900" b="0" i="0">
+                <a:solidFill>
+                  <a:srgbClr val="94A3B8"/>
+                </a:solidFill>
+                <a:latin typeface="Calibri"/>
+              </a:rPr>
+              <a:t>Co-ops of Whatcom County · RCN</a:t>
+            </a:r>
+          </a:p>
+        </p:txBody>
+      </p:sp>
+      <p:sp>
+        <p:nvSpPr>
+          <p:cNvPr id="13" name="TextBox 12"/>
+          <p:cNvSpPr txBox="1"/>
+          <p:nvPr/>
+        </p:nvSpPr>
+        <p:spPr>
+          <a:xfrm>
+            <a:off x="11247120" y="6446520"/>
+            <a:ext cx="365760" cy="274320"/>
+          </a:xfrm>
+          <a:prstGeom prst="rect">
+            <a:avLst/>
+          </a:prstGeom>
+          <a:noFill/>
+        </p:spPr>
+        <p:txBody>
+          <a:bodyPr wrap="square" anchor="t">
+            <a:spAutoFit/>
+          </a:bodyPr>
+          <a:lstStyle/>
+          <a:p>
+            <a:pPr algn="r">
+              <a:lnSpc>
+                <a:spcPct val="105000"/>
+              </a:lnSpc>
+            </a:pPr>
+            <a:r>
+              <a:rPr sz="900" b="0" i="0">
+                <a:solidFill>
+                  <a:srgbClr val="94A3B8"/>
+                </a:solidFill>
+                <a:latin typeface="Calibri"/>
+              </a:rPr>
+              <a:t>16</a:t>
+            </a:r>
+          </a:p>
+        </p:txBody>
+      </p:sp>
+    </p:spTree>
+  </p:cSld>
+  <p:clrMapOvr>
+    <a:masterClrMapping/>
+  </p:clrMapOvr>
+</p:sld>
+</file>
+
+<file path=ppt/slides/slide17.xml><?xml version="1.0" encoding="utf-8"?>
+<p:sld xmlns:a="http://schemas.openxmlformats.org/drawingml/2006/main" xmlns:p="http://schemas.openxmlformats.org/presentationml/2006/main" xmlns:r="http://schemas.openxmlformats.org/officeDocument/2006/relationships">
+  <p:cSld>
+    <p:bg>
+      <p:bgPr>
+        <a:solidFill>
+          <a:srgbClr val="F8FAFC"/>
+        </a:solidFill>
+        <a:effectLst/>
+      </p:bgPr>
+    </p:bg>
+    <p:spTree>
+      <p:nvGrpSpPr>
+        <p:cNvPr id="1" name=""/>
+        <p:cNvGrpSpPr/>
+        <p:nvPr/>
+      </p:nvGrpSpPr>
+      <p:grpSpPr/>
+      <p:sp>
+        <p:nvSpPr>
+          <p:cNvPr id="2" name="Rectangle 1"/>
+          <p:cNvSpPr/>
+          <p:nvPr/>
+        </p:nvSpPr>
+        <p:spPr>
+          <a:xfrm>
+            <a:off x="548640" y="384048"/>
+            <a:ext cx="82296" cy="274320"/>
+          </a:xfrm>
+          <a:prstGeom prst="rect">
+            <a:avLst/>
+          </a:prstGeom>
+          <a:solidFill>
+            <a:srgbClr val="B45309"/>
+          </a:solidFill>
+          <a:ln>
+            <a:noFill/>
+          </a:ln>
+          <a:effectLst/>
+        </p:spPr>
+        <p:style>
+          <a:lnRef idx="1">
+            <a:schemeClr val="accent1"/>
+          </a:lnRef>
+          <a:fillRef idx="3">
+            <a:schemeClr val="accent1"/>
+          </a:fillRef>
+          <a:effectRef idx="2">
+            <a:schemeClr val="accent1"/>
+          </a:effectRef>
+          <a:fontRef idx="minor">
+            <a:schemeClr val="lt1"/>
+          </a:fontRef>
+        </p:style>
+        <p:txBody>
+          <a:bodyPr rtlCol="0" anchor="ctr"/>
+          <a:lstStyle/>
+          <a:p>
+            <a:pPr algn="ctr"/>
+          </a:p>
+        </p:txBody>
+      </p:sp>
+      <p:sp>
+        <p:nvSpPr>
+          <p:cNvPr id="3" name="TextBox 2"/>
+          <p:cNvSpPr txBox="1"/>
+          <p:nvPr/>
+        </p:nvSpPr>
+        <p:spPr>
+          <a:xfrm>
+            <a:off x="731520" y="365760"/>
+            <a:ext cx="7315200" cy="320040"/>
+          </a:xfrm>
+          <a:prstGeom prst="rect">
+            <a:avLst/>
+          </a:prstGeom>
+          <a:noFill/>
+        </p:spPr>
+        <p:txBody>
+          <a:bodyPr wrap="square" anchor="t">
+            <a:spAutoFit/>
+          </a:bodyPr>
+          <a:lstStyle/>
+          <a:p>
+            <a:pPr algn="l">
+              <a:lnSpc>
+                <a:spcPct val="105000"/>
+              </a:lnSpc>
+            </a:pPr>
+            <a:r>
+              <a:rPr sz="1200" b="1" i="0">
+                <a:solidFill>
+                  <a:srgbClr val="B45309"/>
+                </a:solidFill>
+                <a:latin typeface="Calibri"/>
+              </a:rPr>
+              <a:t>FEDWIKI — HOW IT WENT</a:t>
+            </a:r>
+          </a:p>
+        </p:txBody>
+      </p:sp>
+      <p:sp>
+        <p:nvSpPr>
+          <p:cNvPr id="4" name="TextBox 3"/>
+          <p:cNvSpPr txBox="1"/>
+          <p:nvPr/>
+        </p:nvSpPr>
+        <p:spPr>
+          <a:xfrm>
+            <a:off x="548640" y="713232"/>
+            <a:ext cx="11155680" cy="640080"/>
+          </a:xfrm>
+          <a:prstGeom prst="rect">
+            <a:avLst/>
+          </a:prstGeom>
+          <a:noFill/>
+        </p:spPr>
+        <p:txBody>
+          <a:bodyPr wrap="square" anchor="t">
+            <a:spAutoFit/>
+          </a:bodyPr>
+          <a:lstStyle/>
+          <a:p>
+            <a:pPr algn="l">
+              <a:lnSpc>
+                <a:spcPct val="105000"/>
+              </a:lnSpc>
+            </a:pPr>
+            <a:r>
+              <a:rPr sz="2800" b="1" i="0">
+                <a:solidFill>
+                  <a:srgbClr val="0F172A"/>
+                </a:solidFill>
+                <a:latin typeface="Calibri"/>
+              </a:rPr>
+              <a:t>Making it work: what broke, and what it cannot do</a:t>
+            </a:r>
+          </a:p>
+        </p:txBody>
+      </p:sp>
+      <p:sp>
+        <p:nvSpPr>
+          <p:cNvPr id="5" name="Rectangle 4"/>
+          <p:cNvSpPr/>
+          <p:nvPr/>
+        </p:nvSpPr>
+        <p:spPr>
+          <a:xfrm>
             <a:off x="548640" y="1554480"/>
-            <a:ext cx="5486400" cy="3108960"/>
+            <a:ext cx="5486400" cy="3429000"/>
           </a:xfrm>
           <a:prstGeom prst="rect">
             <a:avLst/>
@@ -6837,7 +7254,7 @@
                 </a:solidFill>
                 <a:latin typeface="Calibri"/>
               </a:rPr>
-              <a:t>CORRECTED IN THE DATA</a:t>
+              <a:t>FIXED</a:t>
             </a:r>
           </a:p>
         </p:txBody>
@@ -6851,7 +7268,7 @@
         <p:spPr>
           <a:xfrm>
             <a:off x="777240" y="2011680"/>
-            <a:ext cx="5029200" cy="2560320"/>
+            <a:ext cx="5029200" cy="2468880"/>
           </a:xfrm>
           <a:prstGeom prst="rect">
             <a:avLst/>
@@ -6879,7 +7296,7 @@
                 </a:solidFill>
                 <a:latin typeface="Calibri"/>
               </a:rPr>
-              <a:t>—  Community to Community has moved: 1319 Cornwall Ave, Suite 101 (the map pin is moved).</a:t>
+              <a:t>—  Clicking a two-line name in a graph did nothing, or reloaded the wiki. Each co-op box is now one link. The real fix belongs in the Graph Tool, for every diagram.</a:t>
             </a:r>
           </a:p>
           <a:p>
@@ -6898,7 +7315,7 @@
                 </a:solidFill>
                 <a:latin typeface="Calibri"/>
               </a:rPr>
-              <a:t>—  Cascade Cooperatives incorporated in January 2022, not 2019; it began in 2014 as the Co-op Education Project.</a:t>
+              <a:t>—  Maps first ran inside Frame items, which tied pages to one wiki. Two plugins of our own replaced them — RCN Map and RCN Timeline — and Frame is kept for websites only.</a:t>
             </a:r>
           </a:p>
           <a:p>
@@ -6917,7 +7334,7 @@
                 </a:solidFill>
                 <a:latin typeface="Calibri"/>
               </a:rPr>
-              <a:t>—  CHS Northwest in Lynden is at 402 Main St.</a:t>
+              <a:t>—  Timeline labels ran over each other in a narrow column. They now stop where the next begins, in the page and in the full tool.</a:t>
             </a:r>
           </a:p>
           <a:p>
@@ -6936,26 +7353,7 @@
                 </a:solidFill>
                 <a:latin typeface="Calibri"/>
               </a:rPr>
-              <a:t>—  Industrial Credit Union’s website is industrialcu.com.</a:t>
-            </a:r>
-          </a:p>
-          <a:p>
-            <a:pPr>
-              <a:lnSpc>
-                <a:spcPct val="110000"/>
-              </a:lnSpc>
-              <a:spcAft>
-                <a:spcPts val="600"/>
-              </a:spcAft>
-            </a:pPr>
-            <a:r>
-              <a:rPr sz="1300">
-                <a:solidFill>
-                  <a:srgbClr val="475569"/>
-                </a:solidFill>
-                <a:latin typeface="Calibri"/>
-              </a:rPr>
-              <a:t>—  Yellow Cab Co-op has its own site, yellowcabcoop.com.</a:t>
+              <a:t>—  The Timeline tool dropped fields it did not know, so a co-op link vanished on save; and a second “Open” left it on the first timeline. Both fixed.</a:t>
             </a:r>
           </a:p>
         </p:txBody>
@@ -6969,7 +7367,7 @@
         <p:spPr>
           <a:xfrm>
             <a:off x="6263640" y="1554480"/>
-            <a:ext cx="5394960" cy="3108960"/>
+            <a:ext cx="5394960" cy="3429000"/>
           </a:xfrm>
           <a:prstGeom prst="rect">
             <a:avLst/>
@@ -7040,7 +7438,7 @@
                 </a:solidFill>
                 <a:latin typeface="Calibri"/>
               </a:rPr>
-              <a:t>VERIFY BEFORE RELYING ON IT</a:t>
+              <a:t>LIMITS</a:t>
             </a:r>
           </a:p>
         </p:txBody>
@@ -7054,7 +7452,7 @@
         <p:spPr>
           <a:xfrm>
             <a:off x="6492240" y="2011680"/>
-            <a:ext cx="4937760" cy="2560320"/>
+            <a:ext cx="4937760" cy="2468880"/>
           </a:xfrm>
           <a:prstGeom prst="rect">
             <a:avLst/>
@@ -7082,7 +7480,7 @@
                 </a:solidFill>
                 <a:latin typeface="Calibri"/>
               </a:rPr>
-              <a:t>—  Community Media Cooperative — media-coop.com no longer resolves; it may have closed.</a:t>
+              <a:t>—  The RCN Map and RCN Timeline plugins run on the local wiki. On Wiki Café they need an npm publish and an image rebuild first; until then, build pages with --map native.</a:t>
             </a:r>
           </a:p>
           <a:p>
@@ -7101,7 +7499,7 @@
                 </a:solidFill>
                 <a:latin typeface="Calibri"/>
               </a:rPr>
-              <a:t>—  Cascadia Deaf Nation — website answers “Payment Required”; it may have lapsed.</a:t>
+              <a:t>—  Edits in the full Timeline tool do not save back to the page yet.</a:t>
             </a:r>
           </a:p>
           <a:p>
@@ -7120,45 +7518,7 @@
                 </a:solidFill>
                 <a:latin typeface="Calibri"/>
               </a:rPr>
-              <a:t>—  Bellingham Bay Builders — only the 2004 founders are published, not the current owner-members.</a:t>
-            </a:r>
-          </a:p>
-          <a:p>
-            <a:pPr>
-              <a:lnSpc>
-                <a:spcPct val="110000"/>
-              </a:lnSpc>
-              <a:spcAft>
-                <a:spcPts val="600"/>
-              </a:spcAft>
-            </a:pPr>
-            <a:r>
-              <a:rPr sz="1300">
-                <a:solidFill>
-                  <a:srgbClr val="854D0E"/>
-                </a:solidFill>
-                <a:latin typeface="Calibri"/>
-              </a:rPr>
-              <a:t>—  WestEdge CU, Yellow Cab Co-op, Circle of Life, CHS — no leader named on their own sites.</a:t>
-            </a:r>
-          </a:p>
-          <a:p>
-            <a:pPr>
-              <a:lnSpc>
-                <a:spcPct val="110000"/>
-              </a:lnSpc>
-              <a:spcAft>
-                <a:spcPts val="600"/>
-              </a:spcAft>
-            </a:pPr>
-            <a:r>
-              <a:rPr sz="1300">
-                <a:solidFill>
-                  <a:srgbClr val="854D0E"/>
-                </a:solidFill>
-                <a:latin typeface="Calibri"/>
-              </a:rPr>
-              <a:t>—  Tierra y Libertad — no website of its own; reach it through C2C.</a:t>
+              <a:t>—  Half the co-op websites cannot be shown in a page — ICU, REI, North Coast CU, A1DesignBuild and the Food Hub refuse; Bellingham Bay Builders’ bot check never finishes. Those pages link out.</a:t>
             </a:r>
           </a:p>
         </p:txBody>
@@ -7171,7 +7531,7 @@
         </p:nvSpPr>
         <p:spPr>
           <a:xfrm>
-            <a:off x="548640" y="4983480"/>
+            <a:off x="548640" y="5212080"/>
             <a:ext cx="11064240" cy="731520"/>
           </a:xfrm>
           <a:prstGeom prst="rect">
@@ -7197,7 +7557,7 @@
                 </a:solidFill>
                 <a:latin typeface="Calibri"/>
               </a:rPr>
-              <a:t>Every contact carries “Checked Sep 2026” and the page it was read from. Phones and names change; the date says how far to trust them.</a:t>
+              <a:t>Checked in a real FedWiki (coops.localhost) with real clicks: a graph box, a map point and a timeline bar each open their page beside; Open in RCN Timeline loads the page’s timeline; the websites were tested in the frame plugin’s own sandbox or by their headers — 11 show.</a:t>
             </a:r>
           </a:p>
         </p:txBody>
@@ -7275,7 +7635,7 @@
                 </a:solidFill>
                 <a:latin typeface="Calibri"/>
               </a:rPr>
-              <a:t>16</a:t>
+              <a:t>17</a:t>
             </a:r>
           </a:p>
         </p:txBody>
@@ -7288,7 +7648,678 @@
 </p:sld>
 </file>
 
-<file path=ppt/slides/slide17.xml><?xml version="1.0" encoding="utf-8"?>
+<file path=ppt/slides/slide18.xml><?xml version="1.0" encoding="utf-8"?>
+<p:sld xmlns:a="http://schemas.openxmlformats.org/drawingml/2006/main" xmlns:p="http://schemas.openxmlformats.org/presentationml/2006/main" xmlns:r="http://schemas.openxmlformats.org/officeDocument/2006/relationships">
+  <p:cSld>
+    <p:bg>
+      <p:bgPr>
+        <a:solidFill>
+          <a:srgbClr val="F8FAFC"/>
+        </a:solidFill>
+        <a:effectLst/>
+      </p:bgPr>
+    </p:bg>
+    <p:spTree>
+      <p:nvGrpSpPr>
+        <p:cNvPr id="1" name=""/>
+        <p:cNvGrpSpPr/>
+        <p:nvPr/>
+      </p:nvGrpSpPr>
+      <p:grpSpPr/>
+      <p:sp>
+        <p:nvSpPr>
+          <p:cNvPr id="2" name="Rectangle 1"/>
+          <p:cNvSpPr/>
+          <p:nvPr/>
+        </p:nvSpPr>
+        <p:spPr>
+          <a:xfrm>
+            <a:off x="548640" y="384048"/>
+            <a:ext cx="82296" cy="274320"/>
+          </a:xfrm>
+          <a:prstGeom prst="rect">
+            <a:avLst/>
+          </a:prstGeom>
+          <a:solidFill>
+            <a:srgbClr val="D4A017"/>
+          </a:solidFill>
+          <a:ln>
+            <a:noFill/>
+          </a:ln>
+          <a:effectLst/>
+        </p:spPr>
+        <p:style>
+          <a:lnRef idx="1">
+            <a:schemeClr val="accent1"/>
+          </a:lnRef>
+          <a:fillRef idx="3">
+            <a:schemeClr val="accent1"/>
+          </a:fillRef>
+          <a:effectRef idx="2">
+            <a:schemeClr val="accent1"/>
+          </a:effectRef>
+          <a:fontRef idx="minor">
+            <a:schemeClr val="lt1"/>
+          </a:fontRef>
+        </p:style>
+        <p:txBody>
+          <a:bodyPr rtlCol="0" anchor="ctr"/>
+          <a:lstStyle/>
+          <a:p>
+            <a:pPr algn="ctr"/>
+          </a:p>
+        </p:txBody>
+      </p:sp>
+      <p:sp>
+        <p:nvSpPr>
+          <p:cNvPr id="3" name="TextBox 2"/>
+          <p:cNvSpPr txBox="1"/>
+          <p:nvPr/>
+        </p:nvSpPr>
+        <p:spPr>
+          <a:xfrm>
+            <a:off x="731520" y="365760"/>
+            <a:ext cx="7315200" cy="320040"/>
+          </a:xfrm>
+          <a:prstGeom prst="rect">
+            <a:avLst/>
+          </a:prstGeom>
+          <a:noFill/>
+        </p:spPr>
+        <p:txBody>
+          <a:bodyPr wrap="square" anchor="t">
+            <a:spAutoFit/>
+          </a:bodyPr>
+          <a:lstStyle/>
+          <a:p>
+            <a:pPr algn="l">
+              <a:lnSpc>
+                <a:spcPct val="105000"/>
+              </a:lnSpc>
+            </a:pPr>
+            <a:r>
+              <a:rPr sz="1200" b="1" i="0">
+                <a:solidFill>
+                  <a:srgbClr val="D4A017"/>
+                </a:solidFill>
+                <a:latin typeface="Calibri"/>
+              </a:rPr>
+              <a:t>CONTACTS</a:t>
+            </a:r>
+          </a:p>
+        </p:txBody>
+      </p:sp>
+      <p:sp>
+        <p:nvSpPr>
+          <p:cNvPr id="4" name="TextBox 3"/>
+          <p:cNvSpPr txBox="1"/>
+          <p:nvPr/>
+        </p:nvSpPr>
+        <p:spPr>
+          <a:xfrm>
+            <a:off x="548640" y="713232"/>
+            <a:ext cx="11155680" cy="640080"/>
+          </a:xfrm>
+          <a:prstGeom prst="rect">
+            <a:avLst/>
+          </a:prstGeom>
+          <a:noFill/>
+        </p:spPr>
+        <p:txBody>
+          <a:bodyPr wrap="square" anchor="t">
+            <a:spAutoFit/>
+          </a:bodyPr>
+          <a:lstStyle/>
+          <a:p>
+            <a:pPr algn="l">
+              <a:lnSpc>
+                <a:spcPct val="105000"/>
+              </a:lnSpc>
+            </a:pPr>
+            <a:r>
+              <a:rPr sz="2800" b="1" i="0">
+                <a:solidFill>
+                  <a:srgbClr val="0F172A"/>
+                </a:solidFill>
+                <a:latin typeface="Calibri"/>
+              </a:rPr>
+              <a:t>What the contact check found — and what to verify before calling</a:t>
+            </a:r>
+          </a:p>
+        </p:txBody>
+      </p:sp>
+      <p:sp>
+        <p:nvSpPr>
+          <p:cNvPr id="5" name="Rectangle 4"/>
+          <p:cNvSpPr/>
+          <p:nvPr/>
+        </p:nvSpPr>
+        <p:spPr>
+          <a:xfrm>
+            <a:off x="548640" y="1554480"/>
+            <a:ext cx="5486400" cy="3108960"/>
+          </a:xfrm>
+          <a:prstGeom prst="rect">
+            <a:avLst/>
+          </a:prstGeom>
+          <a:solidFill>
+            <a:srgbClr val="FFFFFF"/>
+          </a:solidFill>
+          <a:ln w="12700">
+            <a:solidFill>
+              <a:srgbClr val="E2E8F0"/>
+            </a:solidFill>
+          </a:ln>
+          <a:effectLst/>
+        </p:spPr>
+        <p:style>
+          <a:lnRef idx="1">
+            <a:schemeClr val="accent1"/>
+          </a:lnRef>
+          <a:fillRef idx="3">
+            <a:schemeClr val="accent1"/>
+          </a:fillRef>
+          <a:effectRef idx="2">
+            <a:schemeClr val="accent1"/>
+          </a:effectRef>
+          <a:fontRef idx="minor">
+            <a:schemeClr val="lt1"/>
+          </a:fontRef>
+        </p:style>
+        <p:txBody>
+          <a:bodyPr rtlCol="0" anchor="ctr"/>
+          <a:lstStyle/>
+          <a:p>
+            <a:pPr algn="ctr"/>
+          </a:p>
+        </p:txBody>
+      </p:sp>
+      <p:sp>
+        <p:nvSpPr>
+          <p:cNvPr id="6" name="TextBox 5"/>
+          <p:cNvSpPr txBox="1"/>
+          <p:nvPr/>
+        </p:nvSpPr>
+        <p:spPr>
+          <a:xfrm>
+            <a:off x="777240" y="1691640"/>
+            <a:ext cx="5029200" cy="274320"/>
+          </a:xfrm>
+          <a:prstGeom prst="rect">
+            <a:avLst/>
+          </a:prstGeom>
+          <a:noFill/>
+        </p:spPr>
+        <p:txBody>
+          <a:bodyPr wrap="square" anchor="t">
+            <a:spAutoFit/>
+          </a:bodyPr>
+          <a:lstStyle/>
+          <a:p>
+            <a:pPr algn="l">
+              <a:lnSpc>
+                <a:spcPct val="105000"/>
+              </a:lnSpc>
+            </a:pPr>
+            <a:r>
+              <a:rPr sz="1100" b="1" i="0">
+                <a:solidFill>
+                  <a:srgbClr val="1A7A4A"/>
+                </a:solidFill>
+                <a:latin typeface="Calibri"/>
+              </a:rPr>
+              <a:t>CORRECTED IN THE DATA</a:t>
+            </a:r>
+          </a:p>
+        </p:txBody>
+      </p:sp>
+      <p:sp>
+        <p:nvSpPr>
+          <p:cNvPr id="7" name="TextBox 6"/>
+          <p:cNvSpPr txBox="1"/>
+          <p:nvPr/>
+        </p:nvSpPr>
+        <p:spPr>
+          <a:xfrm>
+            <a:off x="777240" y="2011680"/>
+            <a:ext cx="5029200" cy="2560320"/>
+          </a:xfrm>
+          <a:prstGeom prst="rect">
+            <a:avLst/>
+          </a:prstGeom>
+          <a:noFill/>
+        </p:spPr>
+        <p:txBody>
+          <a:bodyPr wrap="square">
+            <a:spAutoFit/>
+          </a:bodyPr>
+          <a:lstStyle/>
+          <a:p>
+            <a:pPr>
+              <a:lnSpc>
+                <a:spcPct val="110000"/>
+              </a:lnSpc>
+              <a:spcAft>
+                <a:spcPts val="600"/>
+              </a:spcAft>
+            </a:pPr>
+            <a:r>
+              <a:rPr sz="1300">
+                <a:solidFill>
+                  <a:srgbClr val="475569"/>
+                </a:solidFill>
+                <a:latin typeface="Calibri"/>
+              </a:rPr>
+              <a:t>—  Community to Community has moved: 1319 Cornwall Ave, Suite 101 (the map pin is moved).</a:t>
+            </a:r>
+          </a:p>
+          <a:p>
+            <a:pPr>
+              <a:lnSpc>
+                <a:spcPct val="110000"/>
+              </a:lnSpc>
+              <a:spcAft>
+                <a:spcPts val="600"/>
+              </a:spcAft>
+            </a:pPr>
+            <a:r>
+              <a:rPr sz="1300">
+                <a:solidFill>
+                  <a:srgbClr val="475569"/>
+                </a:solidFill>
+                <a:latin typeface="Calibri"/>
+              </a:rPr>
+              <a:t>—  Cascade Cooperatives incorporated in January 2022, not 2019; it began in 2014 as the Co-op Education Project.</a:t>
+            </a:r>
+          </a:p>
+          <a:p>
+            <a:pPr>
+              <a:lnSpc>
+                <a:spcPct val="110000"/>
+              </a:lnSpc>
+              <a:spcAft>
+                <a:spcPts val="600"/>
+              </a:spcAft>
+            </a:pPr>
+            <a:r>
+              <a:rPr sz="1300">
+                <a:solidFill>
+                  <a:srgbClr val="475569"/>
+                </a:solidFill>
+                <a:latin typeface="Calibri"/>
+              </a:rPr>
+              <a:t>—  CHS Northwest in Lynden is at 402 Main St.</a:t>
+            </a:r>
+          </a:p>
+          <a:p>
+            <a:pPr>
+              <a:lnSpc>
+                <a:spcPct val="110000"/>
+              </a:lnSpc>
+              <a:spcAft>
+                <a:spcPts val="600"/>
+              </a:spcAft>
+            </a:pPr>
+            <a:r>
+              <a:rPr sz="1300">
+                <a:solidFill>
+                  <a:srgbClr val="475569"/>
+                </a:solidFill>
+                <a:latin typeface="Calibri"/>
+              </a:rPr>
+              <a:t>—  Industrial Credit Union’s website is industrialcu.com.</a:t>
+            </a:r>
+          </a:p>
+          <a:p>
+            <a:pPr>
+              <a:lnSpc>
+                <a:spcPct val="110000"/>
+              </a:lnSpc>
+              <a:spcAft>
+                <a:spcPts val="600"/>
+              </a:spcAft>
+            </a:pPr>
+            <a:r>
+              <a:rPr sz="1300">
+                <a:solidFill>
+                  <a:srgbClr val="475569"/>
+                </a:solidFill>
+                <a:latin typeface="Calibri"/>
+              </a:rPr>
+              <a:t>—  Yellow Cab Co-op has its own site, yellowcabcoop.com.</a:t>
+            </a:r>
+          </a:p>
+        </p:txBody>
+      </p:sp>
+      <p:sp>
+        <p:nvSpPr>
+          <p:cNvPr id="8" name="Rectangle 7"/>
+          <p:cNvSpPr/>
+          <p:nvPr/>
+        </p:nvSpPr>
+        <p:spPr>
+          <a:xfrm>
+            <a:off x="6263640" y="1554480"/>
+            <a:ext cx="5394960" cy="3108960"/>
+          </a:xfrm>
+          <a:prstGeom prst="rect">
+            <a:avLst/>
+          </a:prstGeom>
+          <a:solidFill>
+            <a:srgbClr val="FEF3C7"/>
+          </a:solidFill>
+          <a:ln w="12700">
+            <a:solidFill>
+              <a:srgbClr val="FDE047"/>
+            </a:solidFill>
+          </a:ln>
+          <a:effectLst/>
+        </p:spPr>
+        <p:style>
+          <a:lnRef idx="1">
+            <a:schemeClr val="accent1"/>
+          </a:lnRef>
+          <a:fillRef idx="3">
+            <a:schemeClr val="accent1"/>
+          </a:fillRef>
+          <a:effectRef idx="2">
+            <a:schemeClr val="accent1"/>
+          </a:effectRef>
+          <a:fontRef idx="minor">
+            <a:schemeClr val="lt1"/>
+          </a:fontRef>
+        </p:style>
+        <p:txBody>
+          <a:bodyPr rtlCol="0" anchor="ctr"/>
+          <a:lstStyle/>
+          <a:p>
+            <a:pPr algn="ctr"/>
+          </a:p>
+        </p:txBody>
+      </p:sp>
+      <p:sp>
+        <p:nvSpPr>
+          <p:cNvPr id="9" name="TextBox 8"/>
+          <p:cNvSpPr txBox="1"/>
+          <p:nvPr/>
+        </p:nvSpPr>
+        <p:spPr>
+          <a:xfrm>
+            <a:off x="6492240" y="1691640"/>
+            <a:ext cx="4937760" cy="274320"/>
+          </a:xfrm>
+          <a:prstGeom prst="rect">
+            <a:avLst/>
+          </a:prstGeom>
+          <a:noFill/>
+        </p:spPr>
+        <p:txBody>
+          <a:bodyPr wrap="square" anchor="t">
+            <a:spAutoFit/>
+          </a:bodyPr>
+          <a:lstStyle/>
+          <a:p>
+            <a:pPr algn="l">
+              <a:lnSpc>
+                <a:spcPct val="105000"/>
+              </a:lnSpc>
+            </a:pPr>
+            <a:r>
+              <a:rPr sz="1100" b="1" i="0">
+                <a:solidFill>
+                  <a:srgbClr val="854D0E"/>
+                </a:solidFill>
+                <a:latin typeface="Calibri"/>
+              </a:rPr>
+              <a:t>VERIFY BEFORE RELYING ON IT</a:t>
+            </a:r>
+          </a:p>
+        </p:txBody>
+      </p:sp>
+      <p:sp>
+        <p:nvSpPr>
+          <p:cNvPr id="10" name="TextBox 9"/>
+          <p:cNvSpPr txBox="1"/>
+          <p:nvPr/>
+        </p:nvSpPr>
+        <p:spPr>
+          <a:xfrm>
+            <a:off x="6492240" y="2011680"/>
+            <a:ext cx="4937760" cy="2560320"/>
+          </a:xfrm>
+          <a:prstGeom prst="rect">
+            <a:avLst/>
+          </a:prstGeom>
+          <a:noFill/>
+        </p:spPr>
+        <p:txBody>
+          <a:bodyPr wrap="square">
+            <a:spAutoFit/>
+          </a:bodyPr>
+          <a:lstStyle/>
+          <a:p>
+            <a:pPr>
+              <a:lnSpc>
+                <a:spcPct val="110000"/>
+              </a:lnSpc>
+              <a:spcAft>
+                <a:spcPts val="600"/>
+              </a:spcAft>
+            </a:pPr>
+            <a:r>
+              <a:rPr sz="1300">
+                <a:solidFill>
+                  <a:srgbClr val="854D0E"/>
+                </a:solidFill>
+                <a:latin typeface="Calibri"/>
+              </a:rPr>
+              <a:t>—  Community Media Cooperative — media-coop.com no longer resolves; it may have closed.</a:t>
+            </a:r>
+          </a:p>
+          <a:p>
+            <a:pPr>
+              <a:lnSpc>
+                <a:spcPct val="110000"/>
+              </a:lnSpc>
+              <a:spcAft>
+                <a:spcPts val="600"/>
+              </a:spcAft>
+            </a:pPr>
+            <a:r>
+              <a:rPr sz="1300">
+                <a:solidFill>
+                  <a:srgbClr val="854D0E"/>
+                </a:solidFill>
+                <a:latin typeface="Calibri"/>
+              </a:rPr>
+              <a:t>—  Cascadia Deaf Nation — website answers “Payment Required”; it may have lapsed.</a:t>
+            </a:r>
+          </a:p>
+          <a:p>
+            <a:pPr>
+              <a:lnSpc>
+                <a:spcPct val="110000"/>
+              </a:lnSpc>
+              <a:spcAft>
+                <a:spcPts val="600"/>
+              </a:spcAft>
+            </a:pPr>
+            <a:r>
+              <a:rPr sz="1300">
+                <a:solidFill>
+                  <a:srgbClr val="854D0E"/>
+                </a:solidFill>
+                <a:latin typeface="Calibri"/>
+              </a:rPr>
+              <a:t>—  Bellingham Bay Builders — only the 2004 founders are published, not the current owner-members.</a:t>
+            </a:r>
+          </a:p>
+          <a:p>
+            <a:pPr>
+              <a:lnSpc>
+                <a:spcPct val="110000"/>
+              </a:lnSpc>
+              <a:spcAft>
+                <a:spcPts val="600"/>
+              </a:spcAft>
+            </a:pPr>
+            <a:r>
+              <a:rPr sz="1300">
+                <a:solidFill>
+                  <a:srgbClr val="854D0E"/>
+                </a:solidFill>
+                <a:latin typeface="Calibri"/>
+              </a:rPr>
+              <a:t>—  WestEdge CU, Yellow Cab Co-op, Circle of Life, CHS — no leader named on their own sites.</a:t>
+            </a:r>
+          </a:p>
+          <a:p>
+            <a:pPr>
+              <a:lnSpc>
+                <a:spcPct val="110000"/>
+              </a:lnSpc>
+              <a:spcAft>
+                <a:spcPts val="600"/>
+              </a:spcAft>
+            </a:pPr>
+            <a:r>
+              <a:rPr sz="1300">
+                <a:solidFill>
+                  <a:srgbClr val="854D0E"/>
+                </a:solidFill>
+                <a:latin typeface="Calibri"/>
+              </a:rPr>
+              <a:t>—  Tierra y Libertad — no website of its own; reach it through C2C.</a:t>
+            </a:r>
+          </a:p>
+        </p:txBody>
+      </p:sp>
+      <p:sp>
+        <p:nvSpPr>
+          <p:cNvPr id="11" name="TextBox 10"/>
+          <p:cNvSpPr txBox="1"/>
+          <p:nvPr/>
+        </p:nvSpPr>
+        <p:spPr>
+          <a:xfrm>
+            <a:off x="548640" y="4983480"/>
+            <a:ext cx="11064240" cy="731520"/>
+          </a:xfrm>
+          <a:prstGeom prst="rect">
+            <a:avLst/>
+          </a:prstGeom>
+          <a:noFill/>
+        </p:spPr>
+        <p:txBody>
+          <a:bodyPr wrap="square" anchor="t">
+            <a:spAutoFit/>
+          </a:bodyPr>
+          <a:lstStyle/>
+          <a:p>
+            <a:pPr algn="l">
+              <a:lnSpc>
+                <a:spcPct val="105000"/>
+              </a:lnSpc>
+            </a:pPr>
+            <a:r>
+              <a:rPr sz="1500" b="0" i="1">
+                <a:solidFill>
+                  <a:srgbClr val="475569"/>
+                </a:solidFill>
+                <a:latin typeface="Calibri"/>
+              </a:rPr>
+              <a:t>Every contact carries “Checked Sep 2026” and the page it was read from. Phones and names change; the date says how far to trust them.</a:t>
+            </a:r>
+          </a:p>
+        </p:txBody>
+      </p:sp>
+      <p:sp>
+        <p:nvSpPr>
+          <p:cNvPr id="12" name="TextBox 11"/>
+          <p:cNvSpPr txBox="1"/>
+          <p:nvPr/>
+        </p:nvSpPr>
+        <p:spPr>
+          <a:xfrm>
+            <a:off x="548640" y="6446520"/>
+            <a:ext cx="5486400" cy="274320"/>
+          </a:xfrm>
+          <a:prstGeom prst="rect">
+            <a:avLst/>
+          </a:prstGeom>
+          <a:noFill/>
+        </p:spPr>
+        <p:txBody>
+          <a:bodyPr wrap="square" anchor="t">
+            <a:spAutoFit/>
+          </a:bodyPr>
+          <a:lstStyle/>
+          <a:p>
+            <a:pPr algn="l">
+              <a:lnSpc>
+                <a:spcPct val="105000"/>
+              </a:lnSpc>
+            </a:pPr>
+            <a:r>
+              <a:rPr sz="900" b="0" i="0">
+                <a:solidFill>
+                  <a:srgbClr val="94A3B8"/>
+                </a:solidFill>
+                <a:latin typeface="Calibri"/>
+              </a:rPr>
+              <a:t>Co-ops of Whatcom County · RCN</a:t>
+            </a:r>
+          </a:p>
+        </p:txBody>
+      </p:sp>
+      <p:sp>
+        <p:nvSpPr>
+          <p:cNvPr id="13" name="TextBox 12"/>
+          <p:cNvSpPr txBox="1"/>
+          <p:nvPr/>
+        </p:nvSpPr>
+        <p:spPr>
+          <a:xfrm>
+            <a:off x="11247120" y="6446520"/>
+            <a:ext cx="365760" cy="274320"/>
+          </a:xfrm>
+          <a:prstGeom prst="rect">
+            <a:avLst/>
+          </a:prstGeom>
+          <a:noFill/>
+        </p:spPr>
+        <p:txBody>
+          <a:bodyPr wrap="square" anchor="t">
+            <a:spAutoFit/>
+          </a:bodyPr>
+          <a:lstStyle/>
+          <a:p>
+            <a:pPr algn="r">
+              <a:lnSpc>
+                <a:spcPct val="105000"/>
+              </a:lnSpc>
+            </a:pPr>
+            <a:r>
+              <a:rPr sz="900" b="0" i="0">
+                <a:solidFill>
+                  <a:srgbClr val="94A3B8"/>
+                </a:solidFill>
+                <a:latin typeface="Calibri"/>
+              </a:rPr>
+              <a:t>18</a:t>
+            </a:r>
+          </a:p>
+        </p:txBody>
+      </p:sp>
+    </p:spTree>
+  </p:cSld>
+  <p:clrMapOvr>
+    <a:masterClrMapping/>
+  </p:clrMapOvr>
+</p:sld>
+</file>
+
+<file path=ppt/slides/slide19.xml><?xml version="1.0" encoding="utf-8"?>
 <p:sld xmlns:a="http://schemas.openxmlformats.org/drawingml/2006/main" xmlns:p="http://schemas.openxmlformats.org/presentationml/2006/main" xmlns:r="http://schemas.openxmlformats.org/officeDocument/2006/relationships">
   <p:cSld>
     <p:bg>
@@ -7458,7 +8489,7 @@
                 </a:solidFill>
                 <a:latin typeface="Calibri"/>
               </a:rPr>
-              <a:t>—  FedWiki: drag docs/whatcom-coops-wiki/whatcom-coops-wiki.json onto any lineup; upload the rcn-table folder for the table.</a:t>
+              <a:t>—  FedWiki: drag docs/whatcom-coops-wiki/whatcom-coops-wiki.json onto a lineup on a wiki with the RCN Map and RCN Timeline plugins; “Open in RCN Timeline” opens any page’s timeline in the full tool.</a:t>
             </a:r>
           </a:p>
           <a:p>
@@ -8688,7 +9719,7 @@
                 </a:solidFill>
                 <a:latin typeface="Calibri"/>
               </a:rPr>
-              <a:t>—  FedWiki — one page per co-op: its record, its graph, a map, its website; the table plugin on the index page.</a:t>
+              <a:t>—  FedWiki — one page per co-op: its record, its graph, its map with ties, its timeline, its website; the table plugin on the index page.</a:t>
             </a:r>
           </a:p>
         </p:txBody>

--- a/docs/whatcom-coops-four-lenses.pptx
+++ b/docs/whatcom-coops-four-lenses.pptx
@@ -24,6 +24,7 @@
     <p:sldId id="272" r:id="rId23"/>
     <p:sldId id="273" r:id="rId24"/>
     <p:sldId id="274" r:id="rId25"/>
+    <p:sldId id="275" r:id="rId26"/>
   </p:sldIdLst>
   <p:sldSz cx="12188952" cy="6858000" type="screen4x3"/>
   <p:notesSz cx="6858000" cy="9144000"/>
@@ -6120,7 +6121,7 @@
                 </a:solidFill>
                 <a:latin typeface="Calibri"/>
               </a:rPr>
-              <a:t>FEDWIKI — OPEN IN RCN TIMELINE</a:t>
+              <a:t>FEDWIKI — PAGES WITH TIMELINES</a:t>
             </a:r>
           </a:p>
         </p:txBody>
@@ -6159,7 +6160,7 @@
                 </a:solidFill>
                 <a:latin typeface="Calibri"/>
               </a:rPr>
-              <a:t>One click from the page to the full Timeline tool</a:t>
+              <a:t>Two co-op pages side by side, each with its map and its history</a:t>
             </a:r>
           </a:p>
         </p:txBody>
@@ -6173,7 +6174,7 @@
         <p:spPr>
           <a:xfrm>
             <a:off x="521207" y="1453896"/>
-            <a:ext cx="6380338" cy="4672583"/>
+            <a:ext cx="5139857" cy="4718303"/>
           </a:xfrm>
           <a:prstGeom prst="rect">
             <a:avLst/>
@@ -6210,7 +6211,7 @@
       </p:sp>
       <p:pic>
         <p:nvPicPr>
-          <p:cNvPr id="6" name="Picture 5" descr="15-timeline-tool-opened.jpg"/>
+          <p:cNvPr id="6" name="Picture 5" descr="17-wiki-lineup-timelines.jpg"/>
           <p:cNvPicPr>
             <a:picLocks noChangeAspect="1"/>
           </p:cNvPicPr>
@@ -6225,7 +6226,7 @@
         <p:spPr>
           <a:xfrm>
             <a:off x="548640" y="1481328"/>
-            <a:ext cx="6325474" cy="4617720"/>
+            <a:ext cx="5084993" cy="4663440"/>
           </a:xfrm>
           <a:prstGeom prst="rect">
             <a:avLst/>
@@ -6240,8 +6241,8 @@
         </p:nvSpPr>
         <p:spPr>
           <a:xfrm>
-            <a:off x="8869680" y="1481328"/>
-            <a:ext cx="2926080" cy="274320"/>
+            <a:off x="6126480" y="1481328"/>
+            <a:ext cx="5486400" cy="274320"/>
           </a:xfrm>
           <a:prstGeom prst="rect">
             <a:avLst/>
@@ -6279,8 +6280,8 @@
         </p:nvSpPr>
         <p:spPr>
           <a:xfrm>
-            <a:off x="8869680" y="1810512"/>
-            <a:ext cx="2834640" cy="4206240"/>
+            <a:off x="6126480" y="1810512"/>
+            <a:ext cx="5486400" cy="4480560"/>
           </a:xfrm>
           <a:prstGeom prst="rect">
             <a:avLst/>
@@ -6298,7 +6299,7 @@
                 <a:spcPct val="110000"/>
               </a:lnSpc>
               <a:spcAft>
-                <a:spcPts val="800"/>
+                <a:spcPts val="600"/>
               </a:spcAft>
             </a:pPr>
             <a:r>
@@ -6308,7 +6309,7 @@
                 </a:solidFill>
                 <a:latin typeface="Calibri"/>
               </a:rPr>
-              <a:t>—  “Open in RCN Timeline ↗” under any timeline opens the full tool in its own tab, with that timeline loaded: the North Cascades Meat co-op’s 8 intervals here.</a:t>
+              <a:t>—  Left: Cascade Cooperatives, the network. Its map fans out to its 13 members; its timeline puts the network’s own start (2014, renamed 2019) above each member’s history — the credit unions of the 1930s–50s, the worker co-ops of the 2000s and 2020s.</a:t>
             </a:r>
           </a:p>
           <a:p>
@@ -6317,7 +6318,7 @@
                 <a:spcPct val="110000"/>
               </a:lnSpc>
               <a:spcAft>
-                <a:spcPts val="800"/>
+                <a:spcPts val="600"/>
               </a:spcAft>
             </a:pPr>
             <a:r>
@@ -6327,7 +6328,7 @@
                 </a:solidFill>
                 <a:latin typeface="Calibri"/>
               </a:rPr>
-              <a:t>—  Nothing is lost on the way: the bar’s page and co-op links ride along, so the tool can hand them back.</a:t>
+              <a:t>—  Right: Community to Community (C2C). Its map shows the Food Co-op’s grant and the farmworker co-op it incubated; its timeline shows the grant falling inside C2C’s years, and Tierra y Libertad starting in 2017.</a:t>
             </a:r>
           </a:p>
           <a:p>
@@ -6336,7 +6337,7 @@
                 <a:spcPct val="110000"/>
               </a:lnSpc>
               <a:spcAft>
-                <a:spcPts val="800"/>
+                <a:spcPts val="600"/>
               </a:spcAft>
             </a:pPr>
             <a:r>
@@ -6346,7 +6347,7 @@
                 </a:solidFill>
                 <a:latin typeface="Calibri"/>
               </a:rPr>
-              <a:t>—  Open a second timeline from another page and the same tab switches to it, as one undo step.</a:t>
+              <a:t>—  Each page is an ordinary FedWiki page in a lineup: click any bar or point and that co-op’s page opens to the right.</a:t>
             </a:r>
           </a:p>
           <a:p>
@@ -6355,7 +6356,7 @@
                 <a:spcPct val="110000"/>
               </a:lnSpc>
               <a:spcAft>
-                <a:spcPts val="800"/>
+                <a:spcPts val="600"/>
               </a:spcAft>
             </a:pPr>
             <a:r>
@@ -6365,7 +6366,7 @@
                 </a:solidFill>
                 <a:latin typeface="Calibri"/>
               </a:rPr>
-              <a:t>—  Edits made in the tool do not come back to the page yet — saving back is the next step.</a:t>
+              <a:t>—  Under each timeline, Open in RCN Timeline ↗ takes it into the full tool.</a:t>
             </a:r>
           </a:p>
         </p:txBody>
@@ -6378,8 +6379,8 @@
         </p:nvSpPr>
         <p:spPr>
           <a:xfrm>
-            <a:off x="548640" y="6190488"/>
-            <a:ext cx="8001000" cy="274320"/>
+            <a:off x="548640" y="6236207"/>
+            <a:ext cx="7315200" cy="274320"/>
           </a:xfrm>
           <a:prstGeom prst="rect">
             <a:avLst/>
@@ -6404,7 +6405,7 @@
                 </a:solidFill>
                 <a:latin typeface="Calibri"/>
               </a:rPr>
-              <a:t>Screenshot · RCN Timeline, opened from the North Cascades Meat Producers Cooperative page</a:t>
+              <a:t>Screenshot · local wiki coops.localhost, Cascade Cooperatives and Community to Community C2C</a:t>
             </a:r>
           </a:p>
         </p:txBody>
@@ -6591,7 +6592,7 @@
                 </a:solidFill>
                 <a:latin typeface="Calibri"/>
               </a:rPr>
-              <a:t>FEDWIKI — TABLE PLUGIN</a:t>
+              <a:t>FEDWIKI — OPEN IN RCN TIMELINE</a:t>
             </a:r>
           </a:p>
         </p:txBody>
@@ -6630,7 +6631,7 @@
                 </a:solidFill>
                 <a:latin typeface="Calibri"/>
               </a:rPr>
-              <a:t>The FedWiki table plugin: all 22 co-ops on the index page</a:t>
+              <a:t>One click from the page to the full Timeline tool</a:t>
             </a:r>
           </a:p>
         </p:txBody>
@@ -6644,7 +6645,7 @@
         <p:spPr>
           <a:xfrm>
             <a:off x="521207" y="1453896"/>
-            <a:ext cx="3255264" cy="2138845"/>
+            <a:ext cx="6380338" cy="4672583"/>
           </a:xfrm>
           <a:prstGeom prst="rect">
             <a:avLst/>
@@ -6681,7 +6682,7 @@
       </p:sp>
       <p:pic>
         <p:nvPicPr>
-          <p:cNvPr id="6" name="Picture 5" descr="12-wiki-table-item.jpg"/>
+          <p:cNvPr id="6" name="Picture 5" descr="15-timeline-tool-opened.jpg"/>
           <p:cNvPicPr>
             <a:picLocks noChangeAspect="1"/>
           </p:cNvPicPr>
@@ -6696,7 +6697,7 @@
         <p:spPr>
           <a:xfrm>
             <a:off x="548640" y="1481328"/>
-            <a:ext cx="3200400" cy="2083981"/>
+            <a:ext cx="6325474" cy="4617720"/>
           </a:xfrm>
           <a:prstGeom prst="rect">
             <a:avLst/>
@@ -6711,8 +6712,8 @@
         </p:nvSpPr>
         <p:spPr>
           <a:xfrm>
-            <a:off x="548640" y="3638461"/>
-            <a:ext cx="3840480" cy="274320"/>
+            <a:off x="8869680" y="1481328"/>
+            <a:ext cx="2926080" cy="274320"/>
           </a:xfrm>
           <a:prstGeom prst="rect">
             <a:avLst/>
@@ -6731,226 +6732,158 @@
               </a:lnSpc>
             </a:pPr>
             <a:r>
+              <a:rPr sz="1100" b="1" i="0">
+                <a:solidFill>
+                  <a:srgbClr val="B45309"/>
+                </a:solidFill>
+                <a:latin typeface="Calibri"/>
+              </a:rPr>
+              <a:t>WHAT YOU ARE SEEING</a:t>
+            </a:r>
+          </a:p>
+        </p:txBody>
+      </p:sp>
+      <p:sp>
+        <p:nvSpPr>
+          <p:cNvPr id="8" name="TextBox 7"/>
+          <p:cNvSpPr txBox="1"/>
+          <p:nvPr/>
+        </p:nvSpPr>
+        <p:spPr>
+          <a:xfrm>
+            <a:off x="8869680" y="1810512"/>
+            <a:ext cx="2834640" cy="4206240"/>
+          </a:xfrm>
+          <a:prstGeom prst="rect">
+            <a:avLst/>
+          </a:prstGeom>
+          <a:noFill/>
+        </p:spPr>
+        <p:txBody>
+          <a:bodyPr wrap="square">
+            <a:spAutoFit/>
+          </a:bodyPr>
+          <a:lstStyle/>
+          <a:p>
+            <a:pPr>
+              <a:lnSpc>
+                <a:spcPct val="110000"/>
+              </a:lnSpc>
+              <a:spcAft>
+                <a:spcPts val="800"/>
+              </a:spcAft>
+            </a:pPr>
+            <a:r>
+              <a:rPr sz="1400">
+                <a:solidFill>
+                  <a:srgbClr val="475569"/>
+                </a:solidFill>
+                <a:latin typeface="Calibri"/>
+              </a:rPr>
+              <a:t>—  “Open in RCN Timeline ↗” under any timeline opens the full tool in its own tab, with that timeline loaded: the North Cascades Meat co-op’s 8 intervals here.</a:t>
+            </a:r>
+          </a:p>
+          <a:p>
+            <a:pPr>
+              <a:lnSpc>
+                <a:spcPct val="110000"/>
+              </a:lnSpc>
+              <a:spcAft>
+                <a:spcPts val="800"/>
+              </a:spcAft>
+            </a:pPr>
+            <a:r>
+              <a:rPr sz="1400">
+                <a:solidFill>
+                  <a:srgbClr val="475569"/>
+                </a:solidFill>
+                <a:latin typeface="Calibri"/>
+              </a:rPr>
+              <a:t>—  Nothing is lost on the way: the bar’s page and co-op links ride along, so the tool can hand them back.</a:t>
+            </a:r>
+          </a:p>
+          <a:p>
+            <a:pPr>
+              <a:lnSpc>
+                <a:spcPct val="110000"/>
+              </a:lnSpc>
+              <a:spcAft>
+                <a:spcPts val="800"/>
+              </a:spcAft>
+            </a:pPr>
+            <a:r>
+              <a:rPr sz="1400">
+                <a:solidFill>
+                  <a:srgbClr val="475569"/>
+                </a:solidFill>
+                <a:latin typeface="Calibri"/>
+              </a:rPr>
+              <a:t>—  Open a second timeline from another page and the same tab switches to it, as one undo step.</a:t>
+            </a:r>
+          </a:p>
+          <a:p>
+            <a:pPr>
+              <a:lnSpc>
+                <a:spcPct val="110000"/>
+              </a:lnSpc>
+              <a:spcAft>
+                <a:spcPts val="800"/>
+              </a:spcAft>
+            </a:pPr>
+            <a:r>
+              <a:rPr sz="1400">
+                <a:solidFill>
+                  <a:srgbClr val="475569"/>
+                </a:solidFill>
+                <a:latin typeface="Calibri"/>
+              </a:rPr>
+              <a:t>—  Edits made in the tool do not come back to the page yet — saving back is the next step.</a:t>
+            </a:r>
+          </a:p>
+        </p:txBody>
+      </p:sp>
+      <p:sp>
+        <p:nvSpPr>
+          <p:cNvPr id="9" name="TextBox 8"/>
+          <p:cNvSpPr txBox="1"/>
+          <p:nvPr/>
+        </p:nvSpPr>
+        <p:spPr>
+          <a:xfrm>
+            <a:off x="548640" y="6190488"/>
+            <a:ext cx="8001000" cy="274320"/>
+          </a:xfrm>
+          <a:prstGeom prst="rect">
+            <a:avLst/>
+          </a:prstGeom>
+          <a:noFill/>
+        </p:spPr>
+        <p:txBody>
+          <a:bodyPr wrap="square" anchor="t">
+            <a:spAutoFit/>
+          </a:bodyPr>
+          <a:lstStyle/>
+          <a:p>
+            <a:pPr algn="l">
+              <a:lnSpc>
+                <a:spcPct val="105000"/>
+              </a:lnSpc>
+            </a:pPr>
+            <a:r>
               <a:rPr sz="1000" b="0" i="1">
                 <a:solidFill>
                   <a:srgbClr val="94A3B8"/>
                 </a:solidFill>
                 <a:latin typeface="Calibri"/>
               </a:rPr>
-              <a:t>The rcntable item on the index page</a:t>
-            </a:r>
-          </a:p>
-        </p:txBody>
-      </p:sp>
-      <p:sp>
-        <p:nvSpPr>
-          <p:cNvPr id="8" name="TextBox 7"/>
-          <p:cNvSpPr txBox="1"/>
-          <p:nvPr/>
-        </p:nvSpPr>
-        <p:spPr>
-          <a:xfrm>
-            <a:off x="548640" y="3976789"/>
-            <a:ext cx="3931920" cy="2651760"/>
-          </a:xfrm>
-          <a:prstGeom prst="rect">
-            <a:avLst/>
-          </a:prstGeom>
-          <a:noFill/>
-        </p:spPr>
-        <p:txBody>
-          <a:bodyPr wrap="square">
-            <a:spAutoFit/>
-          </a:bodyPr>
-          <a:lstStyle/>
-          <a:p>
-            <a:pPr>
-              <a:lnSpc>
-                <a:spcPct val="110000"/>
-              </a:lnSpc>
-              <a:spcAft>
-                <a:spcPts val="300"/>
-              </a:spcAft>
-            </a:pPr>
-            <a:r>
-              <a:rPr sz="1200">
-                <a:solidFill>
-                  <a:srgbClr val="475569"/>
-                </a:solidFill>
-                <a:latin typeface="Calibri"/>
-              </a:rPr>
-              <a:t>—  The item names the records: database whatcomcoops, kind Coop.</a:t>
-            </a:r>
-          </a:p>
-          <a:p>
-            <a:pPr>
-              <a:lnSpc>
-                <a:spcPct val="110000"/>
-              </a:lnSpc>
-              <a:spcAft>
-                <a:spcPts val="300"/>
-              </a:spcAft>
-            </a:pPr>
-            <a:r>
-              <a:rPr sz="1200">
-                <a:solidFill>
-                  <a:srgbClr val="475569"/>
-                </a:solidFill>
-                <a:latin typeface="Calibri"/>
-              </a:rPr>
-              <a:t>—  Open Table ↗ opens the RCN Table beside the wiki — the same table as slide 9.</a:t>
-            </a:r>
-          </a:p>
-          <a:p>
-            <a:pPr>
-              <a:lnSpc>
-                <a:spcPct val="110000"/>
-              </a:lnSpc>
-              <a:spcAft>
-                <a:spcPts val="300"/>
-              </a:spcAft>
-            </a:pPr>
-            <a:r>
-              <a:rPr sz="1200">
-                <a:solidFill>
-                  <a:srgbClr val="475569"/>
-                </a:solidFill>
-                <a:latin typeface="Calibri"/>
-              </a:rPr>
-              <a:t>—  At home it reads Neo4j live through substrate/api.py. On a hosted wiki it reads the exported folder in the site’s own assets, so each site is its own database.</a:t>
-            </a:r>
-          </a:p>
-          <a:p>
-            <a:pPr>
-              <a:lnSpc>
-                <a:spcPct val="110000"/>
-              </a:lnSpc>
-              <a:spcAft>
-                <a:spcPts val="300"/>
-              </a:spcAft>
-            </a:pPr>
-            <a:r>
-              <a:rPr sz="1200">
-                <a:solidFill>
-                  <a:srgbClr val="475569"/>
-                </a:solidFill>
-                <a:latin typeface="Calibri"/>
-              </a:rPr>
-              <a:t>—  Every name in the table opens that co-op’s page in the lineup.</a:t>
-            </a:r>
-          </a:p>
-        </p:txBody>
-      </p:sp>
-      <p:sp>
-        <p:nvSpPr>
-          <p:cNvPr id="9" name="Rectangle 8"/>
-          <p:cNvSpPr/>
-          <p:nvPr/>
-        </p:nvSpPr>
-        <p:spPr>
-          <a:xfrm>
-            <a:off x="4727448" y="1453896"/>
-            <a:ext cx="6912864" cy="4068451"/>
-          </a:xfrm>
-          <a:prstGeom prst="rect">
-            <a:avLst/>
-          </a:prstGeom>
-          <a:solidFill>
-            <a:srgbClr val="E2E8F0"/>
-          </a:solidFill>
-          <a:ln>
-            <a:noFill/>
-          </a:ln>
-          <a:effectLst/>
-        </p:spPr>
-        <p:style>
-          <a:lnRef idx="1">
-            <a:schemeClr val="accent1"/>
-          </a:lnRef>
-          <a:fillRef idx="3">
-            <a:schemeClr val="accent1"/>
-          </a:fillRef>
-          <a:effectRef idx="2">
-            <a:schemeClr val="accent1"/>
-          </a:effectRef>
-          <a:fontRef idx="minor">
-            <a:schemeClr val="lt1"/>
-          </a:fontRef>
-        </p:style>
-        <p:txBody>
-          <a:bodyPr rtlCol="0" anchor="ctr"/>
-          <a:lstStyle/>
-          <a:p>
-            <a:pPr algn="ctr"/>
-          </a:p>
-        </p:txBody>
-      </p:sp>
-      <p:pic>
-        <p:nvPicPr>
-          <p:cNvPr id="10" name="Picture 9" descr="07-table.jpg"/>
-          <p:cNvPicPr>
-            <a:picLocks noChangeAspect="1"/>
-          </p:cNvPicPr>
-          <p:nvPr/>
-        </p:nvPicPr>
-        <p:blipFill>
-          <a:blip r:embed="rId3"/>
-          <a:stretch>
-            <a:fillRect/>
-          </a:stretch>
-        </p:blipFill>
-        <p:spPr>
-          <a:xfrm>
-            <a:off x="4754880" y="1481328"/>
-            <a:ext cx="6858000" cy="4013587"/>
-          </a:xfrm>
-          <a:prstGeom prst="rect">
-            <a:avLst/>
-          </a:prstGeom>
-        </p:spPr>
-      </p:pic>
-      <p:sp>
-        <p:nvSpPr>
-          <p:cNvPr id="11" name="TextBox 10"/>
-          <p:cNvSpPr txBox="1"/>
-          <p:nvPr/>
-        </p:nvSpPr>
-        <p:spPr>
-          <a:xfrm>
-            <a:off x="4754880" y="5568067"/>
-            <a:ext cx="6858000" cy="274320"/>
-          </a:xfrm>
-          <a:prstGeom prst="rect">
-            <a:avLst/>
-          </a:prstGeom>
-          <a:noFill/>
-        </p:spPr>
-        <p:txBody>
-          <a:bodyPr wrap="square" anchor="t">
-            <a:spAutoFit/>
-          </a:bodyPr>
-          <a:lstStyle/>
-          <a:p>
-            <a:pPr algn="l">
-              <a:lnSpc>
-                <a:spcPct val="105000"/>
-              </a:lnSpc>
-            </a:pPr>
-            <a:r>
-              <a:rPr sz="1000" b="0" i="1">
-                <a:solidFill>
-                  <a:srgbClr val="94A3B8"/>
-                </a:solidFill>
-                <a:latin typeface="Calibri"/>
-              </a:rPr>
-              <a:t>What Open Table shows</a:t>
-            </a:r>
-          </a:p>
-        </p:txBody>
-      </p:sp>
-      <p:sp>
-        <p:nvSpPr>
-          <p:cNvPr id="12" name="TextBox 11"/>
+              <a:t>Screenshot · RCN Timeline, opened from the North Cascades Meat Producers Cooperative page</a:t>
+            </a:r>
+          </a:p>
+        </p:txBody>
+      </p:sp>
+      <p:sp>
+        <p:nvSpPr>
+          <p:cNvPr id="10" name="TextBox 9"/>
           <p:cNvSpPr txBox="1"/>
           <p:nvPr/>
         </p:nvSpPr>
@@ -6989,7 +6922,7 @@
       </p:sp>
       <p:sp>
         <p:nvSpPr>
-          <p:cNvPr id="13" name="TextBox 12"/>
+          <p:cNvPr id="11" name="TextBox 10"/>
           <p:cNvSpPr txBox="1"/>
           <p:nvPr/>
         </p:nvSpPr>
@@ -7130,7 +7063,7 @@
                 </a:solidFill>
                 <a:latin typeface="Calibri"/>
               </a:rPr>
-              <a:t>FEDWIKI — HOW IT WENT</a:t>
+              <a:t>FEDWIKI — TABLE PLUGIN</a:t>
             </a:r>
           </a:p>
         </p:txBody>
@@ -7169,7 +7102,7 @@
                 </a:solidFill>
                 <a:latin typeface="Calibri"/>
               </a:rPr>
-              <a:t>Making it work: what broke, and what it cannot do</a:t>
+              <a:t>The FedWiki table plugin: all 22 co-ops on the index page</a:t>
             </a:r>
           </a:p>
         </p:txBody>
@@ -7182,19 +7115,17 @@
         </p:nvSpPr>
         <p:spPr>
           <a:xfrm>
-            <a:off x="548640" y="1554480"/>
-            <a:ext cx="5486400" cy="3429000"/>
+            <a:off x="521207" y="1453896"/>
+            <a:ext cx="3255264" cy="2138845"/>
           </a:xfrm>
           <a:prstGeom prst="rect">
             <a:avLst/>
           </a:prstGeom>
           <a:solidFill>
-            <a:srgbClr val="FFFFFF"/>
+            <a:srgbClr val="E2E8F0"/>
           </a:solidFill>
-          <a:ln w="12700">
-            <a:solidFill>
-              <a:srgbClr val="E2E8F0"/>
-            </a:solidFill>
+          <a:ln>
+            <a:noFill/>
           </a:ln>
           <a:effectLst/>
         </p:spPr>
@@ -7220,16 +7151,40 @@
           </a:p>
         </p:txBody>
       </p:sp>
-      <p:sp>
-        <p:nvSpPr>
-          <p:cNvPr id="6" name="TextBox 5"/>
-          <p:cNvSpPr txBox="1"/>
-          <p:nvPr/>
-        </p:nvSpPr>
-        <p:spPr>
-          <a:xfrm>
-            <a:off x="777240" y="1691640"/>
-            <a:ext cx="5029200" cy="274320"/>
+      <p:pic>
+        <p:nvPicPr>
+          <p:cNvPr id="6" name="Picture 5" descr="12-wiki-table-item.jpg"/>
+          <p:cNvPicPr>
+            <a:picLocks noChangeAspect="1"/>
+          </p:cNvPicPr>
+          <p:nvPr/>
+        </p:nvPicPr>
+        <p:blipFill>
+          <a:blip r:embed="rId2"/>
+          <a:stretch>
+            <a:fillRect/>
+          </a:stretch>
+        </p:blipFill>
+        <p:spPr>
+          <a:xfrm>
+            <a:off x="548640" y="1481328"/>
+            <a:ext cx="3200400" cy="2083981"/>
+          </a:xfrm>
+          <a:prstGeom prst="rect">
+            <a:avLst/>
+          </a:prstGeom>
+        </p:spPr>
+      </p:pic>
+      <p:sp>
+        <p:nvSpPr>
+          <p:cNvPr id="7" name="TextBox 6"/>
+          <p:cNvSpPr txBox="1"/>
+          <p:nvPr/>
+        </p:nvSpPr>
+        <p:spPr>
+          <a:xfrm>
+            <a:off x="548640" y="3638461"/>
+            <a:ext cx="3840480" cy="274320"/>
           </a:xfrm>
           <a:prstGeom prst="rect">
             <a:avLst/>
@@ -7248,27 +7203,27 @@
               </a:lnSpc>
             </a:pPr>
             <a:r>
-              <a:rPr sz="1100" b="1" i="0">
-                <a:solidFill>
-                  <a:srgbClr val="1A7A4A"/>
-                </a:solidFill>
-                <a:latin typeface="Calibri"/>
-              </a:rPr>
-              <a:t>FIXED</a:t>
-            </a:r>
-          </a:p>
-        </p:txBody>
-      </p:sp>
-      <p:sp>
-        <p:nvSpPr>
-          <p:cNvPr id="7" name="TextBox 6"/>
-          <p:cNvSpPr txBox="1"/>
-          <p:nvPr/>
-        </p:nvSpPr>
-        <p:spPr>
-          <a:xfrm>
-            <a:off x="777240" y="2011680"/>
-            <a:ext cx="5029200" cy="2468880"/>
+              <a:rPr sz="1000" b="0" i="1">
+                <a:solidFill>
+                  <a:srgbClr val="94A3B8"/>
+                </a:solidFill>
+                <a:latin typeface="Calibri"/>
+              </a:rPr>
+              <a:t>The rcntable item on the index page</a:t>
+            </a:r>
+          </a:p>
+        </p:txBody>
+      </p:sp>
+      <p:sp>
+        <p:nvSpPr>
+          <p:cNvPr id="8" name="TextBox 7"/>
+          <p:cNvSpPr txBox="1"/>
+          <p:nvPr/>
+        </p:nvSpPr>
+        <p:spPr>
+          <a:xfrm>
+            <a:off x="548640" y="3976789"/>
+            <a:ext cx="3931920" cy="2651760"/>
           </a:xfrm>
           <a:prstGeom prst="rect">
             <a:avLst/>
@@ -7286,17 +7241,17 @@
                 <a:spcPct val="110000"/>
               </a:lnSpc>
               <a:spcAft>
-                <a:spcPts val="600"/>
+                <a:spcPts val="300"/>
               </a:spcAft>
             </a:pPr>
             <a:r>
-              <a:rPr sz="1300">
+              <a:rPr sz="1200">
                 <a:solidFill>
                   <a:srgbClr val="475569"/>
                 </a:solidFill>
                 <a:latin typeface="Calibri"/>
               </a:rPr>
-              <a:t>—  Clicking a two-line name in a graph did nothing, or reloaded the wiki. Each co-op box is now one link. The real fix belongs in the Graph Tool, for every diagram.</a:t>
+              <a:t>—  The item names the records: database whatcomcoops, kind Coop.</a:t>
             </a:r>
           </a:p>
           <a:p>
@@ -7305,17 +7260,17 @@
                 <a:spcPct val="110000"/>
               </a:lnSpc>
               <a:spcAft>
-                <a:spcPts val="600"/>
+                <a:spcPts val="300"/>
               </a:spcAft>
             </a:pPr>
             <a:r>
-              <a:rPr sz="1300">
+              <a:rPr sz="1200">
                 <a:solidFill>
                   <a:srgbClr val="475569"/>
                 </a:solidFill>
                 <a:latin typeface="Calibri"/>
               </a:rPr>
-              <a:t>—  Maps first ran inside Frame items, which tied pages to one wiki. Two plugins of our own replaced them — RCN Map and RCN Timeline — and Frame is kept for websites only.</a:t>
+              <a:t>—  Open Table ↗ opens the RCN Table beside the wiki — the same table as slide 9.</a:t>
             </a:r>
           </a:p>
           <a:p>
@@ -7324,17 +7279,17 @@
                 <a:spcPct val="110000"/>
               </a:lnSpc>
               <a:spcAft>
-                <a:spcPts val="600"/>
+                <a:spcPts val="300"/>
               </a:spcAft>
             </a:pPr>
             <a:r>
-              <a:rPr sz="1300">
+              <a:rPr sz="1200">
                 <a:solidFill>
                   <a:srgbClr val="475569"/>
                 </a:solidFill>
                 <a:latin typeface="Calibri"/>
               </a:rPr>
-              <a:t>—  Timeline labels ran over each other in a narrow column. They now stop where the next begins, in the page and in the full tool.</a:t>
+              <a:t>—  At home it reads Neo4j live through substrate/api.py. On a hosted wiki it reads the exported folder in the site’s own assets, so each site is its own database.</a:t>
             </a:r>
           </a:p>
           <a:p>
@@ -7343,42 +7298,40 @@
                 <a:spcPct val="110000"/>
               </a:lnSpc>
               <a:spcAft>
-                <a:spcPts val="600"/>
+                <a:spcPts val="300"/>
               </a:spcAft>
             </a:pPr>
             <a:r>
-              <a:rPr sz="1300">
+              <a:rPr sz="1200">
                 <a:solidFill>
                   <a:srgbClr val="475569"/>
                 </a:solidFill>
                 <a:latin typeface="Calibri"/>
               </a:rPr>
-              <a:t>—  The Timeline tool dropped fields it did not know, so a co-op link vanished on save; and a second “Open” left it on the first timeline. Both fixed.</a:t>
-            </a:r>
-          </a:p>
-        </p:txBody>
-      </p:sp>
-      <p:sp>
-        <p:nvSpPr>
-          <p:cNvPr id="8" name="Rectangle 7"/>
+              <a:t>—  Every name in the table opens that co-op’s page in the lineup.</a:t>
+            </a:r>
+          </a:p>
+        </p:txBody>
+      </p:sp>
+      <p:sp>
+        <p:nvSpPr>
+          <p:cNvPr id="9" name="Rectangle 8"/>
           <p:cNvSpPr/>
           <p:nvPr/>
         </p:nvSpPr>
         <p:spPr>
           <a:xfrm>
-            <a:off x="6263640" y="1554480"/>
-            <a:ext cx="5394960" cy="3429000"/>
+            <a:off x="4727448" y="1453896"/>
+            <a:ext cx="6912864" cy="4068451"/>
           </a:xfrm>
           <a:prstGeom prst="rect">
             <a:avLst/>
           </a:prstGeom>
           <a:solidFill>
-            <a:srgbClr val="FEF3C7"/>
+            <a:srgbClr val="E2E8F0"/>
           </a:solidFill>
-          <a:ln w="12700">
-            <a:solidFill>
-              <a:srgbClr val="FDE047"/>
-            </a:solidFill>
+          <a:ln>
+            <a:noFill/>
           </a:ln>
           <a:effectLst/>
         </p:spPr>
@@ -7404,16 +7357,40 @@
           </a:p>
         </p:txBody>
       </p:sp>
-      <p:sp>
-        <p:nvSpPr>
-          <p:cNvPr id="9" name="TextBox 8"/>
-          <p:cNvSpPr txBox="1"/>
-          <p:nvPr/>
-        </p:nvSpPr>
-        <p:spPr>
-          <a:xfrm>
-            <a:off x="6492240" y="1691640"/>
-            <a:ext cx="4937760" cy="274320"/>
+      <p:pic>
+        <p:nvPicPr>
+          <p:cNvPr id="10" name="Picture 9" descr="07-table.jpg"/>
+          <p:cNvPicPr>
+            <a:picLocks noChangeAspect="1"/>
+          </p:cNvPicPr>
+          <p:nvPr/>
+        </p:nvPicPr>
+        <p:blipFill>
+          <a:blip r:embed="rId3"/>
+          <a:stretch>
+            <a:fillRect/>
+          </a:stretch>
+        </p:blipFill>
+        <p:spPr>
+          <a:xfrm>
+            <a:off x="4754880" y="1481328"/>
+            <a:ext cx="6858000" cy="4013587"/>
+          </a:xfrm>
+          <a:prstGeom prst="rect">
+            <a:avLst/>
+          </a:prstGeom>
+        </p:spPr>
+      </p:pic>
+      <p:sp>
+        <p:nvSpPr>
+          <p:cNvPr id="11" name="TextBox 10"/>
+          <p:cNvSpPr txBox="1"/>
+          <p:nvPr/>
+        </p:nvSpPr>
+        <p:spPr>
+          <a:xfrm>
+            <a:off x="4754880" y="5568067"/>
+            <a:ext cx="6858000" cy="274320"/>
           </a:xfrm>
           <a:prstGeom prst="rect">
             <a:avLst/>
@@ -7432,132 +7409,13 @@
               </a:lnSpc>
             </a:pPr>
             <a:r>
-              <a:rPr sz="1100" b="1" i="0">
-                <a:solidFill>
-                  <a:srgbClr val="854D0E"/>
-                </a:solidFill>
-                <a:latin typeface="Calibri"/>
-              </a:rPr>
-              <a:t>LIMITS</a:t>
-            </a:r>
-          </a:p>
-        </p:txBody>
-      </p:sp>
-      <p:sp>
-        <p:nvSpPr>
-          <p:cNvPr id="10" name="TextBox 9"/>
-          <p:cNvSpPr txBox="1"/>
-          <p:nvPr/>
-        </p:nvSpPr>
-        <p:spPr>
-          <a:xfrm>
-            <a:off x="6492240" y="2011680"/>
-            <a:ext cx="4937760" cy="2468880"/>
-          </a:xfrm>
-          <a:prstGeom prst="rect">
-            <a:avLst/>
-          </a:prstGeom>
-          <a:noFill/>
-        </p:spPr>
-        <p:txBody>
-          <a:bodyPr wrap="square">
-            <a:spAutoFit/>
-          </a:bodyPr>
-          <a:lstStyle/>
-          <a:p>
-            <a:pPr>
-              <a:lnSpc>
-                <a:spcPct val="110000"/>
-              </a:lnSpc>
-              <a:spcAft>
-                <a:spcPts val="600"/>
-              </a:spcAft>
-            </a:pPr>
-            <a:r>
-              <a:rPr sz="1300">
-                <a:solidFill>
-                  <a:srgbClr val="854D0E"/>
-                </a:solidFill>
-                <a:latin typeface="Calibri"/>
-              </a:rPr>
-              <a:t>—  The RCN Map and RCN Timeline plugins run on the local wiki. On Wiki Café they need an npm publish and an image rebuild first; until then, build pages with --map native.</a:t>
-            </a:r>
-          </a:p>
-          <a:p>
-            <a:pPr>
-              <a:lnSpc>
-                <a:spcPct val="110000"/>
-              </a:lnSpc>
-              <a:spcAft>
-                <a:spcPts val="600"/>
-              </a:spcAft>
-            </a:pPr>
-            <a:r>
-              <a:rPr sz="1300">
-                <a:solidFill>
-                  <a:srgbClr val="854D0E"/>
-                </a:solidFill>
-                <a:latin typeface="Calibri"/>
-              </a:rPr>
-              <a:t>—  Edits in the full Timeline tool do not save back to the page yet.</a:t>
-            </a:r>
-          </a:p>
-          <a:p>
-            <a:pPr>
-              <a:lnSpc>
-                <a:spcPct val="110000"/>
-              </a:lnSpc>
-              <a:spcAft>
-                <a:spcPts val="600"/>
-              </a:spcAft>
-            </a:pPr>
-            <a:r>
-              <a:rPr sz="1300">
-                <a:solidFill>
-                  <a:srgbClr val="854D0E"/>
-                </a:solidFill>
-                <a:latin typeface="Calibri"/>
-              </a:rPr>
-              <a:t>—  Half the co-op websites cannot be shown in a page — ICU, REI, North Coast CU, A1DesignBuild and the Food Hub refuse; Bellingham Bay Builders’ bot check never finishes. Those pages link out.</a:t>
-            </a:r>
-          </a:p>
-        </p:txBody>
-      </p:sp>
-      <p:sp>
-        <p:nvSpPr>
-          <p:cNvPr id="11" name="TextBox 10"/>
-          <p:cNvSpPr txBox="1"/>
-          <p:nvPr/>
-        </p:nvSpPr>
-        <p:spPr>
-          <a:xfrm>
-            <a:off x="548640" y="5212080"/>
-            <a:ext cx="11064240" cy="731520"/>
-          </a:xfrm>
-          <a:prstGeom prst="rect">
-            <a:avLst/>
-          </a:prstGeom>
-          <a:noFill/>
-        </p:spPr>
-        <p:txBody>
-          <a:bodyPr wrap="square" anchor="t">
-            <a:spAutoFit/>
-          </a:bodyPr>
-          <a:lstStyle/>
-          <a:p>
-            <a:pPr algn="l">
-              <a:lnSpc>
-                <a:spcPct val="105000"/>
-              </a:lnSpc>
-            </a:pPr>
-            <a:r>
-              <a:rPr sz="1500" b="0" i="1">
-                <a:solidFill>
-                  <a:srgbClr val="475569"/>
-                </a:solidFill>
-                <a:latin typeface="Calibri"/>
-              </a:rPr>
-              <a:t>Checked in a real FedWiki (coops.localhost) with real clicks: a graph box, a map point and a timeline bar each open their page beside; Open in RCN Timeline loads the page’s timeline; the websites were tested in the frame plugin’s own sandbox or by their headers — 11 show.</a:t>
+              <a:rPr sz="1000" b="0" i="1">
+                <a:solidFill>
+                  <a:srgbClr val="94A3B8"/>
+                </a:solidFill>
+                <a:latin typeface="Calibri"/>
+              </a:rPr>
+              <a:t>What Open Table shows</a:t>
             </a:r>
           </a:p>
         </p:txBody>
@@ -7681,7 +7539,7 @@
             <a:avLst/>
           </a:prstGeom>
           <a:solidFill>
-            <a:srgbClr val="D4A017"/>
+            <a:srgbClr val="B45309"/>
           </a:solidFill>
           <a:ln>
             <a:noFill/>
@@ -7740,11 +7598,11 @@
             <a:r>
               <a:rPr sz="1200" b="1" i="0">
                 <a:solidFill>
-                  <a:srgbClr val="D4A017"/>
-                </a:solidFill>
-                <a:latin typeface="Calibri"/>
-              </a:rPr>
-              <a:t>CONTACTS</a:t>
+                  <a:srgbClr val="B45309"/>
+                </a:solidFill>
+                <a:latin typeface="Calibri"/>
+              </a:rPr>
+              <a:t>FEDWIKI — HOW IT WENT</a:t>
             </a:r>
           </a:p>
         </p:txBody>
@@ -7783,7 +7641,7 @@
                 </a:solidFill>
                 <a:latin typeface="Calibri"/>
               </a:rPr>
-              <a:t>What the contact check found — and what to verify before calling</a:t>
+              <a:t>Making it work: what broke, and what it cannot do</a:t>
             </a:r>
           </a:p>
         </p:txBody>
@@ -7797,7 +7655,7 @@
         <p:spPr>
           <a:xfrm>
             <a:off x="548640" y="1554480"/>
-            <a:ext cx="5486400" cy="3108960"/>
+            <a:ext cx="5486400" cy="3429000"/>
           </a:xfrm>
           <a:prstGeom prst="rect">
             <a:avLst/>
@@ -7868,7 +7726,7 @@
                 </a:solidFill>
                 <a:latin typeface="Calibri"/>
               </a:rPr>
-              <a:t>CORRECTED IN THE DATA</a:t>
+              <a:t>FIXED</a:t>
             </a:r>
           </a:p>
         </p:txBody>
@@ -7882,7 +7740,7 @@
         <p:spPr>
           <a:xfrm>
             <a:off x="777240" y="2011680"/>
-            <a:ext cx="5029200" cy="2560320"/>
+            <a:ext cx="5029200" cy="2468880"/>
           </a:xfrm>
           <a:prstGeom prst="rect">
             <a:avLst/>
@@ -7910,7 +7768,7 @@
                 </a:solidFill>
                 <a:latin typeface="Calibri"/>
               </a:rPr>
-              <a:t>—  Community to Community has moved: 1319 Cornwall Ave, Suite 101 (the map pin is moved).</a:t>
+              <a:t>—  Clicking a two-line name in a graph did nothing, or reloaded the wiki. Each co-op box is now one link. The real fix belongs in the Graph Tool, for every diagram.</a:t>
             </a:r>
           </a:p>
           <a:p>
@@ -7929,7 +7787,7 @@
                 </a:solidFill>
                 <a:latin typeface="Calibri"/>
               </a:rPr>
-              <a:t>—  Cascade Cooperatives incorporated in January 2022, not 2019; it began in 2014 as the Co-op Education Project.</a:t>
+              <a:t>—  Maps first ran inside Frame items, which tied pages to one wiki. Two plugins of our own replaced them — RCN Map and RCN Timeline — and Frame is kept for websites only.</a:t>
             </a:r>
           </a:p>
           <a:p>
@@ -7948,7 +7806,7 @@
                 </a:solidFill>
                 <a:latin typeface="Calibri"/>
               </a:rPr>
-              <a:t>—  CHS Northwest in Lynden is at 402 Main St.</a:t>
+              <a:t>—  Timeline labels ran over each other in a narrow column. They now stop where the next begins, in the page and in the full tool.</a:t>
             </a:r>
           </a:p>
           <a:p>
@@ -7967,26 +7825,7 @@
                 </a:solidFill>
                 <a:latin typeface="Calibri"/>
               </a:rPr>
-              <a:t>—  Industrial Credit Union’s website is industrialcu.com.</a:t>
-            </a:r>
-          </a:p>
-          <a:p>
-            <a:pPr>
-              <a:lnSpc>
-                <a:spcPct val="110000"/>
-              </a:lnSpc>
-              <a:spcAft>
-                <a:spcPts val="600"/>
-              </a:spcAft>
-            </a:pPr>
-            <a:r>
-              <a:rPr sz="1300">
-                <a:solidFill>
-                  <a:srgbClr val="475569"/>
-                </a:solidFill>
-                <a:latin typeface="Calibri"/>
-              </a:rPr>
-              <a:t>—  Yellow Cab Co-op has its own site, yellowcabcoop.com.</a:t>
+              <a:t>—  The Timeline tool dropped fields it did not know, so a co-op link vanished on save; and a second “Open” left it on the first timeline. Both fixed.</a:t>
             </a:r>
           </a:p>
         </p:txBody>
@@ -8000,7 +7839,7 @@
         <p:spPr>
           <a:xfrm>
             <a:off x="6263640" y="1554480"/>
-            <a:ext cx="5394960" cy="3108960"/>
+            <a:ext cx="5394960" cy="3429000"/>
           </a:xfrm>
           <a:prstGeom prst="rect">
             <a:avLst/>
@@ -8071,7 +7910,7 @@
                 </a:solidFill>
                 <a:latin typeface="Calibri"/>
               </a:rPr>
-              <a:t>VERIFY BEFORE RELYING ON IT</a:t>
+              <a:t>LIMITS</a:t>
             </a:r>
           </a:p>
         </p:txBody>
@@ -8085,7 +7924,7 @@
         <p:spPr>
           <a:xfrm>
             <a:off x="6492240" y="2011680"/>
-            <a:ext cx="4937760" cy="2560320"/>
+            <a:ext cx="4937760" cy="2468880"/>
           </a:xfrm>
           <a:prstGeom prst="rect">
             <a:avLst/>
@@ -8113,7 +7952,7 @@
                 </a:solidFill>
                 <a:latin typeface="Calibri"/>
               </a:rPr>
-              <a:t>—  Community Media Cooperative — media-coop.com no longer resolves; it may have closed.</a:t>
+              <a:t>—  The RCN Map and RCN Timeline plugins run on the local wiki. On Wiki Café they need an npm publish and an image rebuild first; until then, build pages with --map native.</a:t>
             </a:r>
           </a:p>
           <a:p>
@@ -8132,7 +7971,7 @@
                 </a:solidFill>
                 <a:latin typeface="Calibri"/>
               </a:rPr>
-              <a:t>—  Cascadia Deaf Nation — website answers “Payment Required”; it may have lapsed.</a:t>
+              <a:t>—  Edits in the full Timeline tool do not save back to the page yet.</a:t>
             </a:r>
           </a:p>
           <a:p>
@@ -8151,45 +7990,7 @@
                 </a:solidFill>
                 <a:latin typeface="Calibri"/>
               </a:rPr>
-              <a:t>—  Bellingham Bay Builders — only the 2004 founders are published, not the current owner-members.</a:t>
-            </a:r>
-          </a:p>
-          <a:p>
-            <a:pPr>
-              <a:lnSpc>
-                <a:spcPct val="110000"/>
-              </a:lnSpc>
-              <a:spcAft>
-                <a:spcPts val="600"/>
-              </a:spcAft>
-            </a:pPr>
-            <a:r>
-              <a:rPr sz="1300">
-                <a:solidFill>
-                  <a:srgbClr val="854D0E"/>
-                </a:solidFill>
-                <a:latin typeface="Calibri"/>
-              </a:rPr>
-              <a:t>—  WestEdge CU, Yellow Cab Co-op, Circle of Life, CHS — no leader named on their own sites.</a:t>
-            </a:r>
-          </a:p>
-          <a:p>
-            <a:pPr>
-              <a:lnSpc>
-                <a:spcPct val="110000"/>
-              </a:lnSpc>
-              <a:spcAft>
-                <a:spcPts val="600"/>
-              </a:spcAft>
-            </a:pPr>
-            <a:r>
-              <a:rPr sz="1300">
-                <a:solidFill>
-                  <a:srgbClr val="854D0E"/>
-                </a:solidFill>
-                <a:latin typeface="Calibri"/>
-              </a:rPr>
-              <a:t>—  Tierra y Libertad — no website of its own; reach it through C2C.</a:t>
+              <a:t>—  Half the co-op websites cannot be shown in a page — ICU, REI, North Coast CU, A1DesignBuild and the Food Hub refuse; Bellingham Bay Builders’ bot check never finishes. Those pages link out.</a:t>
             </a:r>
           </a:p>
         </p:txBody>
@@ -8202,7 +8003,7 @@
         </p:nvSpPr>
         <p:spPr>
           <a:xfrm>
-            <a:off x="548640" y="4983480"/>
+            <a:off x="548640" y="5212080"/>
             <a:ext cx="11064240" cy="731520"/>
           </a:xfrm>
           <a:prstGeom prst="rect">
@@ -8228,7 +8029,7 @@
                 </a:solidFill>
                 <a:latin typeface="Calibri"/>
               </a:rPr>
-              <a:t>Every contact carries “Checked Sep 2026” and the page it was read from. Phones and names change; the date says how far to trust them.</a:t>
+              <a:t>Checked in a real FedWiki (coops.localhost) with real clicks: a graph box, a map point and a timeline bar each open their page beside; Open in RCN Timeline loads the page’s timeline; the websites were tested in the frame plugin’s own sandbox or by their headers — 11 show.</a:t>
             </a:r>
           </a:p>
         </p:txBody>
@@ -8325,7 +8126,7 @@
     <p:bg>
       <p:bgPr>
         <a:solidFill>
-          <a:srgbClr val="1E293B"/>
+          <a:srgbClr val="F8FAFC"/>
         </a:solidFill>
         <a:effectLst/>
       </p:bgPr>
@@ -8339,14 +8140,58 @@
       <p:grpSpPr/>
       <p:sp>
         <p:nvSpPr>
-          <p:cNvPr id="2" name="TextBox 1"/>
-          <p:cNvSpPr txBox="1"/>
-          <p:nvPr/>
-        </p:nvSpPr>
-        <p:spPr>
-          <a:xfrm>
-            <a:off x="640080" y="822960"/>
-            <a:ext cx="10972800" cy="731520"/>
+          <p:cNvPr id="2" name="Rectangle 1"/>
+          <p:cNvSpPr/>
+          <p:nvPr/>
+        </p:nvSpPr>
+        <p:spPr>
+          <a:xfrm>
+            <a:off x="548640" y="384048"/>
+            <a:ext cx="82296" cy="274320"/>
+          </a:xfrm>
+          <a:prstGeom prst="rect">
+            <a:avLst/>
+          </a:prstGeom>
+          <a:solidFill>
+            <a:srgbClr val="D4A017"/>
+          </a:solidFill>
+          <a:ln>
+            <a:noFill/>
+          </a:ln>
+          <a:effectLst/>
+        </p:spPr>
+        <p:style>
+          <a:lnRef idx="1">
+            <a:schemeClr val="accent1"/>
+          </a:lnRef>
+          <a:fillRef idx="3">
+            <a:schemeClr val="accent1"/>
+          </a:fillRef>
+          <a:effectRef idx="2">
+            <a:schemeClr val="accent1"/>
+          </a:effectRef>
+          <a:fontRef idx="minor">
+            <a:schemeClr val="lt1"/>
+          </a:fontRef>
+        </p:style>
+        <p:txBody>
+          <a:bodyPr rtlCol="0" anchor="ctr"/>
+          <a:lstStyle/>
+          <a:p>
+            <a:pPr algn="ctr"/>
+          </a:p>
+        </p:txBody>
+      </p:sp>
+      <p:sp>
+        <p:nvSpPr>
+          <p:cNvPr id="3" name="TextBox 2"/>
+          <p:cNvSpPr txBox="1"/>
+          <p:nvPr/>
+        </p:nvSpPr>
+        <p:spPr>
+          <a:xfrm>
+            <a:off x="731520" y="365760"/>
+            <a:ext cx="7315200" cy="320040"/>
           </a:xfrm>
           <a:prstGeom prst="rect">
             <a:avLst/>
@@ -8365,27 +8210,151 @@
               </a:lnSpc>
             </a:pPr>
             <a:r>
-              <a:rPr sz="3600" b="1" i="0">
-                <a:solidFill>
-                  <a:srgbClr val="FFFFFF"/>
-                </a:solidFill>
-                <a:latin typeface="Calibri"/>
-              </a:rPr>
-              <a:t>One dataset, four lenses</a:t>
-            </a:r>
-          </a:p>
-        </p:txBody>
-      </p:sp>
-      <p:sp>
-        <p:nvSpPr>
-          <p:cNvPr id="3" name="TextBox 2"/>
-          <p:cNvSpPr txBox="1"/>
-          <p:nvPr/>
-        </p:nvSpPr>
-        <p:spPr>
-          <a:xfrm>
-            <a:off x="640080" y="1737360"/>
-            <a:ext cx="10789920" cy="3291840"/>
+              <a:rPr sz="1200" b="1" i="0">
+                <a:solidFill>
+                  <a:srgbClr val="D4A017"/>
+                </a:solidFill>
+                <a:latin typeface="Calibri"/>
+              </a:rPr>
+              <a:t>CONTACTS</a:t>
+            </a:r>
+          </a:p>
+        </p:txBody>
+      </p:sp>
+      <p:sp>
+        <p:nvSpPr>
+          <p:cNvPr id="4" name="TextBox 3"/>
+          <p:cNvSpPr txBox="1"/>
+          <p:nvPr/>
+        </p:nvSpPr>
+        <p:spPr>
+          <a:xfrm>
+            <a:off x="548640" y="713232"/>
+            <a:ext cx="11155680" cy="640080"/>
+          </a:xfrm>
+          <a:prstGeom prst="rect">
+            <a:avLst/>
+          </a:prstGeom>
+          <a:noFill/>
+        </p:spPr>
+        <p:txBody>
+          <a:bodyPr wrap="square" anchor="t">
+            <a:spAutoFit/>
+          </a:bodyPr>
+          <a:lstStyle/>
+          <a:p>
+            <a:pPr algn="l">
+              <a:lnSpc>
+                <a:spcPct val="105000"/>
+              </a:lnSpc>
+            </a:pPr>
+            <a:r>
+              <a:rPr sz="2800" b="1" i="0">
+                <a:solidFill>
+                  <a:srgbClr val="0F172A"/>
+                </a:solidFill>
+                <a:latin typeface="Calibri"/>
+              </a:rPr>
+              <a:t>What the contact check found — and what to verify before calling</a:t>
+            </a:r>
+          </a:p>
+        </p:txBody>
+      </p:sp>
+      <p:sp>
+        <p:nvSpPr>
+          <p:cNvPr id="5" name="Rectangle 4"/>
+          <p:cNvSpPr/>
+          <p:nvPr/>
+        </p:nvSpPr>
+        <p:spPr>
+          <a:xfrm>
+            <a:off x="548640" y="1554480"/>
+            <a:ext cx="5486400" cy="3108960"/>
+          </a:xfrm>
+          <a:prstGeom prst="rect">
+            <a:avLst/>
+          </a:prstGeom>
+          <a:solidFill>
+            <a:srgbClr val="FFFFFF"/>
+          </a:solidFill>
+          <a:ln w="12700">
+            <a:solidFill>
+              <a:srgbClr val="E2E8F0"/>
+            </a:solidFill>
+          </a:ln>
+          <a:effectLst/>
+        </p:spPr>
+        <p:style>
+          <a:lnRef idx="1">
+            <a:schemeClr val="accent1"/>
+          </a:lnRef>
+          <a:fillRef idx="3">
+            <a:schemeClr val="accent1"/>
+          </a:fillRef>
+          <a:effectRef idx="2">
+            <a:schemeClr val="accent1"/>
+          </a:effectRef>
+          <a:fontRef idx="minor">
+            <a:schemeClr val="lt1"/>
+          </a:fontRef>
+        </p:style>
+        <p:txBody>
+          <a:bodyPr rtlCol="0" anchor="ctr"/>
+          <a:lstStyle/>
+          <a:p>
+            <a:pPr algn="ctr"/>
+          </a:p>
+        </p:txBody>
+      </p:sp>
+      <p:sp>
+        <p:nvSpPr>
+          <p:cNvPr id="6" name="TextBox 5"/>
+          <p:cNvSpPr txBox="1"/>
+          <p:nvPr/>
+        </p:nvSpPr>
+        <p:spPr>
+          <a:xfrm>
+            <a:off x="777240" y="1691640"/>
+            <a:ext cx="5029200" cy="274320"/>
+          </a:xfrm>
+          <a:prstGeom prst="rect">
+            <a:avLst/>
+          </a:prstGeom>
+          <a:noFill/>
+        </p:spPr>
+        <p:txBody>
+          <a:bodyPr wrap="square" anchor="t">
+            <a:spAutoFit/>
+          </a:bodyPr>
+          <a:lstStyle/>
+          <a:p>
+            <a:pPr algn="l">
+              <a:lnSpc>
+                <a:spcPct val="105000"/>
+              </a:lnSpc>
+            </a:pPr>
+            <a:r>
+              <a:rPr sz="1100" b="1" i="0">
+                <a:solidFill>
+                  <a:srgbClr val="1A7A4A"/>
+                </a:solidFill>
+                <a:latin typeface="Calibri"/>
+              </a:rPr>
+              <a:t>CORRECTED IN THE DATA</a:t>
+            </a:r>
+          </a:p>
+        </p:txBody>
+      </p:sp>
+      <p:sp>
+        <p:nvSpPr>
+          <p:cNvPr id="7" name="TextBox 6"/>
+          <p:cNvSpPr txBox="1"/>
+          <p:nvPr/>
+        </p:nvSpPr>
+        <p:spPr>
+          <a:xfrm>
+            <a:off x="777240" y="2011680"/>
+            <a:ext cx="5029200" cy="2560320"/>
           </a:xfrm>
           <a:prstGeom prst="rect">
             <a:avLst/>
@@ -8403,17 +8372,17 @@
                 <a:spcPct val="110000"/>
               </a:lnSpc>
               <a:spcAft>
-                <a:spcPts val="800"/>
+                <a:spcPts val="600"/>
               </a:spcAft>
             </a:pPr>
             <a:r>
-              <a:rPr sz="1600">
-                <a:solidFill>
-                  <a:srgbClr val="CBD5E1"/>
-                </a:solidFill>
-                <a:latin typeface="Calibri"/>
-              </a:rPr>
-              <a:t>—  Map: open the RCN Map and choose the “Co-ops of Whatcom County” issue — hover any dot for its contact.</a:t>
+              <a:rPr sz="1300">
+                <a:solidFill>
+                  <a:srgbClr val="475569"/>
+                </a:solidFill>
+                <a:latin typeface="Calibri"/>
+              </a:rPr>
+              <a:t>—  Community to Community has moved: 1319 Cornwall Ave, Suite 101 (the map pin is moved).</a:t>
             </a:r>
           </a:p>
           <a:p>
@@ -8422,17 +8391,17 @@
                 <a:spcPct val="110000"/>
               </a:lnSpc>
               <a:spcAft>
-                <a:spcPts val="800"/>
+                <a:spcPts val="600"/>
               </a:spcAft>
             </a:pPr>
             <a:r>
-              <a:rPr sz="1600">
-                <a:solidFill>
-                  <a:srgbClr val="CBD5E1"/>
-                </a:solidFill>
-                <a:latin typeface="Calibri"/>
-              </a:rPr>
-              <a:t>—  Graph: “Open in Graph Tool” from the map legend, or load tools/whatcom-coops-graph.json (Marc’s layout, with contacts).</a:t>
+              <a:rPr sz="1300">
+                <a:solidFill>
+                  <a:srgbClr val="475569"/>
+                </a:solidFill>
+                <a:latin typeface="Calibri"/>
+              </a:rPr>
+              <a:t>—  Cascade Cooperatives incorporated in January 2022, not 2019; it began in 2014 as the Co-op Education Project.</a:t>
             </a:r>
           </a:p>
           <a:p>
@@ -8441,17 +8410,17 @@
                 <a:spcPct val="110000"/>
               </a:lnSpc>
               <a:spcAft>
-                <a:spcPts val="800"/>
+                <a:spcPts val="600"/>
               </a:spcAft>
             </a:pPr>
             <a:r>
-              <a:rPr sz="1600">
-                <a:solidFill>
-                  <a:srgbClr val="CBD5E1"/>
-                </a:solidFill>
-                <a:latin typeface="Calibri"/>
-              </a:rPr>
-              <a:t>—  Timeline: import tools/whatcom-coops-timeline.json into the RCN Timeline.</a:t>
+              <a:rPr sz="1300">
+                <a:solidFill>
+                  <a:srgbClr val="475569"/>
+                </a:solidFill>
+                <a:latin typeface="Calibri"/>
+              </a:rPr>
+              <a:t>—  CHS Northwest in Lynden is at 402 Main St.</a:t>
             </a:r>
           </a:p>
           <a:p>
@@ -8460,17 +8429,17 @@
                 <a:spcPct val="110000"/>
               </a:lnSpc>
               <a:spcAft>
-                <a:spcPts val="800"/>
+                <a:spcPts val="600"/>
               </a:spcAft>
             </a:pPr>
             <a:r>
-              <a:rPr sz="1600">
-                <a:solidFill>
-                  <a:srgbClr val="CBD5E1"/>
-                </a:solidFill>
-                <a:latin typeface="Calibri"/>
-              </a:rPr>
-              <a:t>—  Table: rcn-table.html?db=whatcomcoops&amp;kind=Coop, with substrate/api.py running.</a:t>
+              <a:rPr sz="1300">
+                <a:solidFill>
+                  <a:srgbClr val="475569"/>
+                </a:solidFill>
+                <a:latin typeface="Calibri"/>
+              </a:rPr>
+              <a:t>—  Industrial Credit Union’s website is industrialcu.com.</a:t>
             </a:r>
           </a:p>
           <a:p>
@@ -8479,50 +8448,234 @@
                 <a:spcPct val="110000"/>
               </a:lnSpc>
               <a:spcAft>
-                <a:spcPts val="800"/>
+                <a:spcPts val="600"/>
               </a:spcAft>
             </a:pPr>
             <a:r>
-              <a:rPr sz="1600">
-                <a:solidFill>
-                  <a:srgbClr val="CBD5E1"/>
-                </a:solidFill>
-                <a:latin typeface="Calibri"/>
-              </a:rPr>
-              <a:t>—  FedWiki: drag docs/whatcom-coops-wiki/whatcom-coops-wiki.json onto a lineup on a wiki with the RCN Map and RCN Timeline plugins; “Open in RCN Timeline” opens any page’s timeline in the full tool.</a:t>
-            </a:r>
-          </a:p>
+              <a:rPr sz="1300">
+                <a:solidFill>
+                  <a:srgbClr val="475569"/>
+                </a:solidFill>
+                <a:latin typeface="Calibri"/>
+              </a:rPr>
+              <a:t>—  Yellow Cab Co-op has its own site, yellowcabcoop.com.</a:t>
+            </a:r>
+          </a:p>
+        </p:txBody>
+      </p:sp>
+      <p:sp>
+        <p:nvSpPr>
+          <p:cNvPr id="8" name="Rectangle 7"/>
+          <p:cNvSpPr/>
+          <p:nvPr/>
+        </p:nvSpPr>
+        <p:spPr>
+          <a:xfrm>
+            <a:off x="6263640" y="1554480"/>
+            <a:ext cx="5394960" cy="3108960"/>
+          </a:xfrm>
+          <a:prstGeom prst="rect">
+            <a:avLst/>
+          </a:prstGeom>
+          <a:solidFill>
+            <a:srgbClr val="FEF3C7"/>
+          </a:solidFill>
+          <a:ln w="12700">
+            <a:solidFill>
+              <a:srgbClr val="FDE047"/>
+            </a:solidFill>
+          </a:ln>
+          <a:effectLst/>
+        </p:spPr>
+        <p:style>
+          <a:lnRef idx="1">
+            <a:schemeClr val="accent1"/>
+          </a:lnRef>
+          <a:fillRef idx="3">
+            <a:schemeClr val="accent1"/>
+          </a:fillRef>
+          <a:effectRef idx="2">
+            <a:schemeClr val="accent1"/>
+          </a:effectRef>
+          <a:fontRef idx="minor">
+            <a:schemeClr val="lt1"/>
+          </a:fontRef>
+        </p:style>
+        <p:txBody>
+          <a:bodyPr rtlCol="0" anchor="ctr"/>
+          <a:lstStyle/>
+          <a:p>
+            <a:pPr algn="ctr"/>
+          </a:p>
+        </p:txBody>
+      </p:sp>
+      <p:sp>
+        <p:nvSpPr>
+          <p:cNvPr id="9" name="TextBox 8"/>
+          <p:cNvSpPr txBox="1"/>
+          <p:nvPr/>
+        </p:nvSpPr>
+        <p:spPr>
+          <a:xfrm>
+            <a:off x="6492240" y="1691640"/>
+            <a:ext cx="4937760" cy="274320"/>
+          </a:xfrm>
+          <a:prstGeom prst="rect">
+            <a:avLst/>
+          </a:prstGeom>
+          <a:noFill/>
+        </p:spPr>
+        <p:txBody>
+          <a:bodyPr wrap="square" anchor="t">
+            <a:spAutoFit/>
+          </a:bodyPr>
+          <a:lstStyle/>
+          <a:p>
+            <a:pPr algn="l">
+              <a:lnSpc>
+                <a:spcPct val="105000"/>
+              </a:lnSpc>
+            </a:pPr>
+            <a:r>
+              <a:rPr sz="1100" b="1" i="0">
+                <a:solidFill>
+                  <a:srgbClr val="854D0E"/>
+                </a:solidFill>
+                <a:latin typeface="Calibri"/>
+              </a:rPr>
+              <a:t>VERIFY BEFORE RELYING ON IT</a:t>
+            </a:r>
+          </a:p>
+        </p:txBody>
+      </p:sp>
+      <p:sp>
+        <p:nvSpPr>
+          <p:cNvPr id="10" name="TextBox 9"/>
+          <p:cNvSpPr txBox="1"/>
+          <p:nvPr/>
+        </p:nvSpPr>
+        <p:spPr>
+          <a:xfrm>
+            <a:off x="6492240" y="2011680"/>
+            <a:ext cx="4937760" cy="2560320"/>
+          </a:xfrm>
+          <a:prstGeom prst="rect">
+            <a:avLst/>
+          </a:prstGeom>
+          <a:noFill/>
+        </p:spPr>
+        <p:txBody>
+          <a:bodyPr wrap="square">
+            <a:spAutoFit/>
+          </a:bodyPr>
+          <a:lstStyle/>
           <a:p>
             <a:pPr>
               <a:lnSpc>
                 <a:spcPct val="110000"/>
               </a:lnSpc>
               <a:spcAft>
-                <a:spcPts val="800"/>
+                <a:spcPts val="600"/>
               </a:spcAft>
             </a:pPr>
             <a:r>
-              <a:rPr sz="1600">
-                <a:solidFill>
-                  <a:srgbClr val="CBD5E1"/>
-                </a:solidFill>
-                <a:latin typeface="Calibri"/>
-              </a:rPr>
-              <a:t>—  To change the data, edit the issue file, then re-run substrate/load_coops.py and build_pages.py so Neo4j and the wiki match.</a:t>
-            </a:r>
-          </a:p>
-        </p:txBody>
-      </p:sp>
-      <p:sp>
-        <p:nvSpPr>
-          <p:cNvPr id="4" name="TextBox 3"/>
-          <p:cNvSpPr txBox="1"/>
-          <p:nvPr/>
-        </p:nvSpPr>
-        <p:spPr>
-          <a:xfrm>
-            <a:off x="640080" y="5029200"/>
-            <a:ext cx="10789920" cy="457200"/>
+              <a:rPr sz="1300">
+                <a:solidFill>
+                  <a:srgbClr val="854D0E"/>
+                </a:solidFill>
+                <a:latin typeface="Calibri"/>
+              </a:rPr>
+              <a:t>—  Community Media Cooperative — media-coop.com no longer resolves; it may have closed.</a:t>
+            </a:r>
+          </a:p>
+          <a:p>
+            <a:pPr>
+              <a:lnSpc>
+                <a:spcPct val="110000"/>
+              </a:lnSpc>
+              <a:spcAft>
+                <a:spcPts val="600"/>
+              </a:spcAft>
+            </a:pPr>
+            <a:r>
+              <a:rPr sz="1300">
+                <a:solidFill>
+                  <a:srgbClr val="854D0E"/>
+                </a:solidFill>
+                <a:latin typeface="Calibri"/>
+              </a:rPr>
+              <a:t>—  Cascadia Deaf Nation — website answers “Payment Required”; it may have lapsed.</a:t>
+            </a:r>
+          </a:p>
+          <a:p>
+            <a:pPr>
+              <a:lnSpc>
+                <a:spcPct val="110000"/>
+              </a:lnSpc>
+              <a:spcAft>
+                <a:spcPts val="600"/>
+              </a:spcAft>
+            </a:pPr>
+            <a:r>
+              <a:rPr sz="1300">
+                <a:solidFill>
+                  <a:srgbClr val="854D0E"/>
+                </a:solidFill>
+                <a:latin typeface="Calibri"/>
+              </a:rPr>
+              <a:t>—  Bellingham Bay Builders — only the 2004 founders are published, not the current owner-members.</a:t>
+            </a:r>
+          </a:p>
+          <a:p>
+            <a:pPr>
+              <a:lnSpc>
+                <a:spcPct val="110000"/>
+              </a:lnSpc>
+              <a:spcAft>
+                <a:spcPts val="600"/>
+              </a:spcAft>
+            </a:pPr>
+            <a:r>
+              <a:rPr sz="1300">
+                <a:solidFill>
+                  <a:srgbClr val="854D0E"/>
+                </a:solidFill>
+                <a:latin typeface="Calibri"/>
+              </a:rPr>
+              <a:t>—  WestEdge CU, Yellow Cab Co-op, Circle of Life, CHS — no leader named on their own sites.</a:t>
+            </a:r>
+          </a:p>
+          <a:p>
+            <a:pPr>
+              <a:lnSpc>
+                <a:spcPct val="110000"/>
+              </a:lnSpc>
+              <a:spcAft>
+                <a:spcPts val="600"/>
+              </a:spcAft>
+            </a:pPr>
+            <a:r>
+              <a:rPr sz="1300">
+                <a:solidFill>
+                  <a:srgbClr val="854D0E"/>
+                </a:solidFill>
+                <a:latin typeface="Calibri"/>
+              </a:rPr>
+              <a:t>—  Tierra y Libertad — no website of its own; reach it through C2C.</a:t>
+            </a:r>
+          </a:p>
+        </p:txBody>
+      </p:sp>
+      <p:sp>
+        <p:nvSpPr>
+          <p:cNvPr id="11" name="TextBox 10"/>
+          <p:cNvSpPr txBox="1"/>
+          <p:nvPr/>
+        </p:nvSpPr>
+        <p:spPr>
+          <a:xfrm>
+            <a:off x="548640" y="4983480"/>
+            <a:ext cx="11064240" cy="731520"/>
           </a:xfrm>
           <a:prstGeom prst="rect">
             <a:avLst/>
@@ -8541,27 +8694,66 @@
               </a:lnSpc>
             </a:pPr>
             <a:r>
-              <a:rPr sz="1400" b="0" i="1">
+              <a:rPr sz="1500" b="0" i="1">
+                <a:solidFill>
+                  <a:srgbClr val="475569"/>
+                </a:solidFill>
+                <a:latin typeface="Calibri"/>
+              </a:rPr>
+              <a:t>Every contact carries “Checked Sep 2026” and the page it was read from. Phones and names change; the date says how far to trust them.</a:t>
+            </a:r>
+          </a:p>
+        </p:txBody>
+      </p:sp>
+      <p:sp>
+        <p:nvSpPr>
+          <p:cNvPr id="12" name="TextBox 11"/>
+          <p:cNvSpPr txBox="1"/>
+          <p:nvPr/>
+        </p:nvSpPr>
+        <p:spPr>
+          <a:xfrm>
+            <a:off x="548640" y="6446520"/>
+            <a:ext cx="5486400" cy="274320"/>
+          </a:xfrm>
+          <a:prstGeom prst="rect">
+            <a:avLst/>
+          </a:prstGeom>
+          <a:noFill/>
+        </p:spPr>
+        <p:txBody>
+          <a:bodyPr wrap="square" anchor="t">
+            <a:spAutoFit/>
+          </a:bodyPr>
+          <a:lstStyle/>
+          <a:p>
+            <a:pPr algn="l">
+              <a:lnSpc>
+                <a:spcPct val="105000"/>
+              </a:lnSpc>
+            </a:pPr>
+            <a:r>
+              <a:rPr sz="900" b="0" i="0">
                 <a:solidFill>
                   <a:srgbClr val="94A3B8"/>
                 </a:solidFill>
                 <a:latin typeface="Calibri"/>
               </a:rPr>
-              <a:t>A line means a public source was found. No line means no tie was found, not that none exists.</a:t>
-            </a:r>
-          </a:p>
-        </p:txBody>
-      </p:sp>
-      <p:sp>
-        <p:nvSpPr>
-          <p:cNvPr id="5" name="TextBox 4"/>
-          <p:cNvSpPr txBox="1"/>
-          <p:nvPr/>
-        </p:nvSpPr>
-        <p:spPr>
-          <a:xfrm>
-            <a:off x="640080" y="6035040"/>
-            <a:ext cx="10058400" cy="365760"/>
+              <a:t>Co-ops of Whatcom County · RCN</a:t>
+            </a:r>
+          </a:p>
+        </p:txBody>
+      </p:sp>
+      <p:sp>
+        <p:nvSpPr>
+          <p:cNvPr id="13" name="TextBox 12"/>
+          <p:cNvSpPr txBox="1"/>
+          <p:nvPr/>
+        </p:nvSpPr>
+        <p:spPr>
+          <a:xfrm>
+            <a:off x="11247120" y="6446520"/>
+            <a:ext cx="365760" cy="274320"/>
           </a:xfrm>
           <a:prstGeom prst="rect">
             <a:avLst/>
@@ -8574,19 +8766,19 @@
           </a:bodyPr>
           <a:lstStyle/>
           <a:p>
-            <a:pPr algn="l">
+            <a:pPr algn="r">
               <a:lnSpc>
                 <a:spcPct val="105000"/>
               </a:lnSpc>
             </a:pPr>
             <a:r>
-              <a:rPr sz="1200" b="0" i="0">
-                <a:solidFill>
-                  <a:srgbClr val="CBD5E1"/>
-                </a:solidFill>
-                <a:latin typeface="Calibri"/>
-              </a:rPr>
-              <a:t>Marc Pierson with Claude Opus 5.5 · September 2026</a:t>
+              <a:rPr sz="900" b="0" i="0">
+                <a:solidFill>
+                  <a:srgbClr val="94A3B8"/>
+                </a:solidFill>
+                <a:latin typeface="Calibri"/>
+              </a:rPr>
+              <a:t>19</a:t>
             </a:r>
           </a:p>
         </p:txBody>
@@ -9798,6 +9990,286 @@
                 <a:latin typeface="Calibri"/>
               </a:rPr>
               <a:t>2</a:t>
+            </a:r>
+          </a:p>
+        </p:txBody>
+      </p:sp>
+    </p:spTree>
+  </p:cSld>
+  <p:clrMapOvr>
+    <a:masterClrMapping/>
+  </p:clrMapOvr>
+</p:sld>
+</file>
+
+<file path=ppt/slides/slide20.xml><?xml version="1.0" encoding="utf-8"?>
+<p:sld xmlns:a="http://schemas.openxmlformats.org/drawingml/2006/main" xmlns:p="http://schemas.openxmlformats.org/presentationml/2006/main" xmlns:r="http://schemas.openxmlformats.org/officeDocument/2006/relationships">
+  <p:cSld>
+    <p:bg>
+      <p:bgPr>
+        <a:solidFill>
+          <a:srgbClr val="1E293B"/>
+        </a:solidFill>
+        <a:effectLst/>
+      </p:bgPr>
+    </p:bg>
+    <p:spTree>
+      <p:nvGrpSpPr>
+        <p:cNvPr id="1" name=""/>
+        <p:cNvGrpSpPr/>
+        <p:nvPr/>
+      </p:nvGrpSpPr>
+      <p:grpSpPr/>
+      <p:sp>
+        <p:nvSpPr>
+          <p:cNvPr id="2" name="TextBox 1"/>
+          <p:cNvSpPr txBox="1"/>
+          <p:nvPr/>
+        </p:nvSpPr>
+        <p:spPr>
+          <a:xfrm>
+            <a:off x="640080" y="822960"/>
+            <a:ext cx="10972800" cy="731520"/>
+          </a:xfrm>
+          <a:prstGeom prst="rect">
+            <a:avLst/>
+          </a:prstGeom>
+          <a:noFill/>
+        </p:spPr>
+        <p:txBody>
+          <a:bodyPr wrap="square" anchor="t">
+            <a:spAutoFit/>
+          </a:bodyPr>
+          <a:lstStyle/>
+          <a:p>
+            <a:pPr algn="l">
+              <a:lnSpc>
+                <a:spcPct val="105000"/>
+              </a:lnSpc>
+            </a:pPr>
+            <a:r>
+              <a:rPr sz="3600" b="1" i="0">
+                <a:solidFill>
+                  <a:srgbClr val="FFFFFF"/>
+                </a:solidFill>
+                <a:latin typeface="Calibri"/>
+              </a:rPr>
+              <a:t>One dataset, four lenses</a:t>
+            </a:r>
+          </a:p>
+        </p:txBody>
+      </p:sp>
+      <p:sp>
+        <p:nvSpPr>
+          <p:cNvPr id="3" name="TextBox 2"/>
+          <p:cNvSpPr txBox="1"/>
+          <p:nvPr/>
+        </p:nvSpPr>
+        <p:spPr>
+          <a:xfrm>
+            <a:off x="640080" y="1737360"/>
+            <a:ext cx="10789920" cy="3291840"/>
+          </a:xfrm>
+          <a:prstGeom prst="rect">
+            <a:avLst/>
+          </a:prstGeom>
+          <a:noFill/>
+        </p:spPr>
+        <p:txBody>
+          <a:bodyPr wrap="square">
+            <a:spAutoFit/>
+          </a:bodyPr>
+          <a:lstStyle/>
+          <a:p>
+            <a:pPr>
+              <a:lnSpc>
+                <a:spcPct val="110000"/>
+              </a:lnSpc>
+              <a:spcAft>
+                <a:spcPts val="800"/>
+              </a:spcAft>
+            </a:pPr>
+            <a:r>
+              <a:rPr sz="1600">
+                <a:solidFill>
+                  <a:srgbClr val="CBD5E1"/>
+                </a:solidFill>
+                <a:latin typeface="Calibri"/>
+              </a:rPr>
+              <a:t>—  Map: open the RCN Map and choose the “Co-ops of Whatcom County” issue — hover any dot for its contact.</a:t>
+            </a:r>
+          </a:p>
+          <a:p>
+            <a:pPr>
+              <a:lnSpc>
+                <a:spcPct val="110000"/>
+              </a:lnSpc>
+              <a:spcAft>
+                <a:spcPts val="800"/>
+              </a:spcAft>
+            </a:pPr>
+            <a:r>
+              <a:rPr sz="1600">
+                <a:solidFill>
+                  <a:srgbClr val="CBD5E1"/>
+                </a:solidFill>
+                <a:latin typeface="Calibri"/>
+              </a:rPr>
+              <a:t>—  Graph: “Open in Graph Tool” from the map legend, or load tools/whatcom-coops-graph.json (Marc’s layout, with contacts).</a:t>
+            </a:r>
+          </a:p>
+          <a:p>
+            <a:pPr>
+              <a:lnSpc>
+                <a:spcPct val="110000"/>
+              </a:lnSpc>
+              <a:spcAft>
+                <a:spcPts val="800"/>
+              </a:spcAft>
+            </a:pPr>
+            <a:r>
+              <a:rPr sz="1600">
+                <a:solidFill>
+                  <a:srgbClr val="CBD5E1"/>
+                </a:solidFill>
+                <a:latin typeface="Calibri"/>
+              </a:rPr>
+              <a:t>—  Timeline: import tools/whatcom-coops-timeline.json into the RCN Timeline.</a:t>
+            </a:r>
+          </a:p>
+          <a:p>
+            <a:pPr>
+              <a:lnSpc>
+                <a:spcPct val="110000"/>
+              </a:lnSpc>
+              <a:spcAft>
+                <a:spcPts val="800"/>
+              </a:spcAft>
+            </a:pPr>
+            <a:r>
+              <a:rPr sz="1600">
+                <a:solidFill>
+                  <a:srgbClr val="CBD5E1"/>
+                </a:solidFill>
+                <a:latin typeface="Calibri"/>
+              </a:rPr>
+              <a:t>—  Table: rcn-table.html?db=whatcomcoops&amp;kind=Coop, with substrate/api.py running.</a:t>
+            </a:r>
+          </a:p>
+          <a:p>
+            <a:pPr>
+              <a:lnSpc>
+                <a:spcPct val="110000"/>
+              </a:lnSpc>
+              <a:spcAft>
+                <a:spcPts val="800"/>
+              </a:spcAft>
+            </a:pPr>
+            <a:r>
+              <a:rPr sz="1600">
+                <a:solidFill>
+                  <a:srgbClr val="CBD5E1"/>
+                </a:solidFill>
+                <a:latin typeface="Calibri"/>
+              </a:rPr>
+              <a:t>—  FedWiki: drag docs/whatcom-coops-wiki/whatcom-coops-wiki.json onto a lineup on a wiki with the RCN Map and RCN Timeline plugins; “Open in RCN Timeline” opens any page’s timeline in the full tool.</a:t>
+            </a:r>
+          </a:p>
+          <a:p>
+            <a:pPr>
+              <a:lnSpc>
+                <a:spcPct val="110000"/>
+              </a:lnSpc>
+              <a:spcAft>
+                <a:spcPts val="800"/>
+              </a:spcAft>
+            </a:pPr>
+            <a:r>
+              <a:rPr sz="1600">
+                <a:solidFill>
+                  <a:srgbClr val="CBD5E1"/>
+                </a:solidFill>
+                <a:latin typeface="Calibri"/>
+              </a:rPr>
+              <a:t>—  To change the data, edit the issue file, then re-run substrate/load_coops.py and build_pages.py so Neo4j and the wiki match.</a:t>
+            </a:r>
+          </a:p>
+        </p:txBody>
+      </p:sp>
+      <p:sp>
+        <p:nvSpPr>
+          <p:cNvPr id="4" name="TextBox 3"/>
+          <p:cNvSpPr txBox="1"/>
+          <p:nvPr/>
+        </p:nvSpPr>
+        <p:spPr>
+          <a:xfrm>
+            <a:off x="640080" y="5029200"/>
+            <a:ext cx="10789920" cy="457200"/>
+          </a:xfrm>
+          <a:prstGeom prst="rect">
+            <a:avLst/>
+          </a:prstGeom>
+          <a:noFill/>
+        </p:spPr>
+        <p:txBody>
+          <a:bodyPr wrap="square" anchor="t">
+            <a:spAutoFit/>
+          </a:bodyPr>
+          <a:lstStyle/>
+          <a:p>
+            <a:pPr algn="l">
+              <a:lnSpc>
+                <a:spcPct val="105000"/>
+              </a:lnSpc>
+            </a:pPr>
+            <a:r>
+              <a:rPr sz="1400" b="0" i="1">
+                <a:solidFill>
+                  <a:srgbClr val="94A3B8"/>
+                </a:solidFill>
+                <a:latin typeface="Calibri"/>
+              </a:rPr>
+              <a:t>A line means a public source was found. No line means no tie was found, not that none exists.</a:t>
+            </a:r>
+          </a:p>
+        </p:txBody>
+      </p:sp>
+      <p:sp>
+        <p:nvSpPr>
+          <p:cNvPr id="5" name="TextBox 4"/>
+          <p:cNvSpPr txBox="1"/>
+          <p:nvPr/>
+        </p:nvSpPr>
+        <p:spPr>
+          <a:xfrm>
+            <a:off x="640080" y="6035040"/>
+            <a:ext cx="10058400" cy="365760"/>
+          </a:xfrm>
+          <a:prstGeom prst="rect">
+            <a:avLst/>
+          </a:prstGeom>
+          <a:noFill/>
+        </p:spPr>
+        <p:txBody>
+          <a:bodyPr wrap="square" anchor="t">
+            <a:spAutoFit/>
+          </a:bodyPr>
+          <a:lstStyle/>
+          <a:p>
+            <a:pPr algn="l">
+              <a:lnSpc>
+                <a:spcPct val="105000"/>
+              </a:lnSpc>
+            </a:pPr>
+            <a:r>
+              <a:rPr sz="1200" b="0" i="0">
+                <a:solidFill>
+                  <a:srgbClr val="CBD5E1"/>
+                </a:solidFill>
+                <a:latin typeface="Calibri"/>
+              </a:rPr>
+              <a:t>Marc Pierson with Claude Opus 5.5 · September 2026</a:t>
             </a:r>
           </a:p>
         </p:txBody>

--- a/docs/whatcom-coops-four-lenses.pptx
+++ b/docs/whatcom-coops-four-lenses.pptx
@@ -25,6 +25,7 @@
     <p:sldId id="273" r:id="rId24"/>
     <p:sldId id="274" r:id="rId25"/>
     <p:sldId id="275" r:id="rId26"/>
+    <p:sldId id="276" r:id="rId27"/>
   </p:sldIdLst>
   <p:sldSz cx="12188952" cy="6858000" type="screen4x3"/>
   <p:notesSz cx="6858000" cy="9144000"/>
@@ -6837,7 +6838,7 @@
                 </a:solidFill>
                 <a:latin typeface="Calibri"/>
               </a:rPr>
-              <a:t>—  Edits made in the tool do not come back to the page yet — saving back is the next step.</a:t>
+              <a:t>—  Edit there, press ↩ Save to wiki, and the timeline goes back into the page it came from, as an ordinary FedWiki edit in the page’s history.</a:t>
             </a:r>
           </a:p>
         </p:txBody>
@@ -7063,7 +7064,7 @@
                 </a:solidFill>
                 <a:latin typeface="Calibri"/>
               </a:rPr>
-              <a:t>FEDWIKI — TABLE PLUGIN</a:t>
+              <a:t>FEDWIKI — CO-OP LINEUP</a:t>
             </a:r>
           </a:p>
         </p:txBody>
@@ -7102,7 +7103,7 @@
                 </a:solidFill>
                 <a:latin typeface="Calibri"/>
               </a:rPr>
-              <a:t>The FedWiki table plugin: all 22 co-ops on the index page</a:t>
+              <a:t>Open a few co-op pages, and one page shows them together</a:t>
             </a:r>
           </a:p>
         </p:txBody>
@@ -7116,7 +7117,7 @@
         <p:spPr>
           <a:xfrm>
             <a:off x="521207" y="1453896"/>
-            <a:ext cx="3255264" cy="2138845"/>
+            <a:ext cx="5350634" cy="4718303"/>
           </a:xfrm>
           <a:prstGeom prst="rect">
             <a:avLst/>
@@ -7153,7 +7154,7 @@
       </p:sp>
       <p:pic>
         <p:nvPicPr>
-          <p:cNvPr id="6" name="Picture 5" descr="12-wiki-table-item.jpg"/>
+          <p:cNvPr id="6" name="Picture 5" descr="18-wiki-co-op-lineup.jpg"/>
           <p:cNvPicPr>
             <a:picLocks noChangeAspect="1"/>
           </p:cNvPicPr>
@@ -7168,7 +7169,7 @@
         <p:spPr>
           <a:xfrm>
             <a:off x="548640" y="1481328"/>
-            <a:ext cx="3200400" cy="2083981"/>
+            <a:ext cx="5295770" cy="4663440"/>
           </a:xfrm>
           <a:prstGeom prst="rect">
             <a:avLst/>
@@ -7183,8 +7184,8 @@
         </p:nvSpPr>
         <p:spPr>
           <a:xfrm>
-            <a:off x="548640" y="3638461"/>
-            <a:ext cx="3840480" cy="274320"/>
+            <a:off x="6126480" y="1481328"/>
+            <a:ext cx="5486400" cy="274320"/>
           </a:xfrm>
           <a:prstGeom prst="rect">
             <a:avLst/>
@@ -7203,226 +7204,158 @@
               </a:lnSpc>
             </a:pPr>
             <a:r>
+              <a:rPr sz="1100" b="1" i="0">
+                <a:solidFill>
+                  <a:srgbClr val="B45309"/>
+                </a:solidFill>
+                <a:latin typeface="Calibri"/>
+              </a:rPr>
+              <a:t>WHAT YOU ARE SEEING</a:t>
+            </a:r>
+          </a:p>
+        </p:txBody>
+      </p:sp>
+      <p:sp>
+        <p:nvSpPr>
+          <p:cNvPr id="8" name="TextBox 7"/>
+          <p:cNvSpPr txBox="1"/>
+          <p:nvPr/>
+        </p:nvSpPr>
+        <p:spPr>
+          <a:xfrm>
+            <a:off x="6126480" y="1810512"/>
+            <a:ext cx="5486400" cy="4480560"/>
+          </a:xfrm>
+          <a:prstGeom prst="rect">
+            <a:avLst/>
+          </a:prstGeom>
+          <a:noFill/>
+        </p:spPr>
+        <p:txBody>
+          <a:bodyPr wrap="square">
+            <a:spAutoFit/>
+          </a:bodyPr>
+          <a:lstStyle/>
+          <a:p>
+            <a:pPr>
+              <a:lnSpc>
+                <a:spcPct val="110000"/>
+              </a:lnSpc>
+              <a:spcAft>
+                <a:spcPts val="600"/>
+              </a:spcAft>
+            </a:pPr>
+            <a:r>
+              <a:rPr sz="1400">
+                <a:solidFill>
+                  <a:srgbClr val="475569"/>
+                </a:solidFill>
+                <a:latin typeface="Calibri"/>
+              </a:rPr>
+              <a:t>—  The Food Co-op and Bellingham Bay Builders are open to the left. The Co-op Lineup page to their right collects both: its map shows 7 co-ops and 9 ties, its timeline 14 bars — shared co-ops counted once.</a:t>
+            </a:r>
+          </a:p>
+          <a:p>
+            <a:pPr>
+              <a:lnSpc>
+                <a:spcPct val="110000"/>
+              </a:lnSpc>
+              <a:spcAft>
+                <a:spcPts val="600"/>
+              </a:spcAft>
+            </a:pPr>
+            <a:r>
+              <a:rPr sz="1400">
+                <a:solidFill>
+                  <a:srgbClr val="475569"/>
+                </a:solidFill>
+                <a:latin typeface="Calibri"/>
+              </a:rPr>
+              <a:t>—  A tie whose ends come from different pages joins them into one network, on the map and in time.</a:t>
+            </a:r>
+          </a:p>
+          <a:p>
+            <a:pPr>
+              <a:lnSpc>
+                <a:spcPct val="110000"/>
+              </a:lnSpc>
+              <a:spcAft>
+                <a:spcPts val="600"/>
+              </a:spcAft>
+            </a:pPr>
+            <a:r>
+              <a:rPr sz="1400">
+                <a:solidFill>
+                  <a:srgbClr val="475569"/>
+                </a:solidFill>
+                <a:latin typeface="Calibri"/>
+              </a:rPr>
+              <a:t>—  ❄ freezes what is showing into the page, so it stays when the lineup changes; shift-click unfreezes. ↻ collects again.</a:t>
+            </a:r>
+          </a:p>
+          <a:p>
+            <a:pPr>
+              <a:lnSpc>
+                <a:spcPct val="110000"/>
+              </a:lnSpc>
+              <a:spcAft>
+                <a:spcPts val="600"/>
+              </a:spcAft>
+            </a:pPr>
+            <a:r>
+              <a:rPr sz="1400">
+                <a:solidFill>
+                  <a:srgbClr val="475569"/>
+                </a:solidFill>
+                <a:latin typeface="Calibri"/>
+              </a:rPr>
+              <a:t>—  It works the way FedWiki’s own Map plugin combines maps with its LINEUP line — and carries the ties as well as the points. RCN maps also offer their points the way FedWiki’s own Map reads them.</a:t>
+            </a:r>
+          </a:p>
+        </p:txBody>
+      </p:sp>
+      <p:sp>
+        <p:nvSpPr>
+          <p:cNvPr id="9" name="TextBox 8"/>
+          <p:cNvSpPr txBox="1"/>
+          <p:nvPr/>
+        </p:nvSpPr>
+        <p:spPr>
+          <a:xfrm>
+            <a:off x="548640" y="6236207"/>
+            <a:ext cx="7315200" cy="274320"/>
+          </a:xfrm>
+          <a:prstGeom prst="rect">
+            <a:avLst/>
+          </a:prstGeom>
+          <a:noFill/>
+        </p:spPr>
+        <p:txBody>
+          <a:bodyPr wrap="square" anchor="t">
+            <a:spAutoFit/>
+          </a:bodyPr>
+          <a:lstStyle/>
+          <a:p>
+            <a:pPr algn="l">
+              <a:lnSpc>
+                <a:spcPct val="105000"/>
+              </a:lnSpc>
+            </a:pPr>
+            <a:r>
               <a:rPr sz="1000" b="0" i="1">
                 <a:solidFill>
                   <a:srgbClr val="94A3B8"/>
                 </a:solidFill>
                 <a:latin typeface="Calibri"/>
               </a:rPr>
-              <a:t>The rcntable item on the index page</a:t>
-            </a:r>
-          </a:p>
-        </p:txBody>
-      </p:sp>
-      <p:sp>
-        <p:nvSpPr>
-          <p:cNvPr id="8" name="TextBox 7"/>
-          <p:cNvSpPr txBox="1"/>
-          <p:nvPr/>
-        </p:nvSpPr>
-        <p:spPr>
-          <a:xfrm>
-            <a:off x="548640" y="3976789"/>
-            <a:ext cx="3931920" cy="2651760"/>
-          </a:xfrm>
-          <a:prstGeom prst="rect">
-            <a:avLst/>
-          </a:prstGeom>
-          <a:noFill/>
-        </p:spPr>
-        <p:txBody>
-          <a:bodyPr wrap="square">
-            <a:spAutoFit/>
-          </a:bodyPr>
-          <a:lstStyle/>
-          <a:p>
-            <a:pPr>
-              <a:lnSpc>
-                <a:spcPct val="110000"/>
-              </a:lnSpc>
-              <a:spcAft>
-                <a:spcPts val="300"/>
-              </a:spcAft>
-            </a:pPr>
-            <a:r>
-              <a:rPr sz="1200">
-                <a:solidFill>
-                  <a:srgbClr val="475569"/>
-                </a:solidFill>
-                <a:latin typeface="Calibri"/>
-              </a:rPr>
-              <a:t>—  The item names the records: database whatcomcoops, kind Coop.</a:t>
-            </a:r>
-          </a:p>
-          <a:p>
-            <a:pPr>
-              <a:lnSpc>
-                <a:spcPct val="110000"/>
-              </a:lnSpc>
-              <a:spcAft>
-                <a:spcPts val="300"/>
-              </a:spcAft>
-            </a:pPr>
-            <a:r>
-              <a:rPr sz="1200">
-                <a:solidFill>
-                  <a:srgbClr val="475569"/>
-                </a:solidFill>
-                <a:latin typeface="Calibri"/>
-              </a:rPr>
-              <a:t>—  Open Table ↗ opens the RCN Table beside the wiki — the same table as slide 9.</a:t>
-            </a:r>
-          </a:p>
-          <a:p>
-            <a:pPr>
-              <a:lnSpc>
-                <a:spcPct val="110000"/>
-              </a:lnSpc>
-              <a:spcAft>
-                <a:spcPts val="300"/>
-              </a:spcAft>
-            </a:pPr>
-            <a:r>
-              <a:rPr sz="1200">
-                <a:solidFill>
-                  <a:srgbClr val="475569"/>
-                </a:solidFill>
-                <a:latin typeface="Calibri"/>
-              </a:rPr>
-              <a:t>—  At home it reads Neo4j live through substrate/api.py. On a hosted wiki it reads the exported folder in the site’s own assets, so each site is its own database.</a:t>
-            </a:r>
-          </a:p>
-          <a:p>
-            <a:pPr>
-              <a:lnSpc>
-                <a:spcPct val="110000"/>
-              </a:lnSpc>
-              <a:spcAft>
-                <a:spcPts val="300"/>
-              </a:spcAft>
-            </a:pPr>
-            <a:r>
-              <a:rPr sz="1200">
-                <a:solidFill>
-                  <a:srgbClr val="475569"/>
-                </a:solidFill>
-                <a:latin typeface="Calibri"/>
-              </a:rPr>
-              <a:t>—  Every name in the table opens that co-op’s page in the lineup.</a:t>
-            </a:r>
-          </a:p>
-        </p:txBody>
-      </p:sp>
-      <p:sp>
-        <p:nvSpPr>
-          <p:cNvPr id="9" name="Rectangle 8"/>
-          <p:cNvSpPr/>
-          <p:nvPr/>
-        </p:nvSpPr>
-        <p:spPr>
-          <a:xfrm>
-            <a:off x="4727448" y="1453896"/>
-            <a:ext cx="6912864" cy="4068451"/>
-          </a:xfrm>
-          <a:prstGeom prst="rect">
-            <a:avLst/>
-          </a:prstGeom>
-          <a:solidFill>
-            <a:srgbClr val="E2E8F0"/>
-          </a:solidFill>
-          <a:ln>
-            <a:noFill/>
-          </a:ln>
-          <a:effectLst/>
-        </p:spPr>
-        <p:style>
-          <a:lnRef idx="1">
-            <a:schemeClr val="accent1"/>
-          </a:lnRef>
-          <a:fillRef idx="3">
-            <a:schemeClr val="accent1"/>
-          </a:fillRef>
-          <a:effectRef idx="2">
-            <a:schemeClr val="accent1"/>
-          </a:effectRef>
-          <a:fontRef idx="minor">
-            <a:schemeClr val="lt1"/>
-          </a:fontRef>
-        </p:style>
-        <p:txBody>
-          <a:bodyPr rtlCol="0" anchor="ctr"/>
-          <a:lstStyle/>
-          <a:p>
-            <a:pPr algn="ctr"/>
-          </a:p>
-        </p:txBody>
-      </p:sp>
-      <p:pic>
-        <p:nvPicPr>
-          <p:cNvPr id="10" name="Picture 9" descr="07-table.jpg"/>
-          <p:cNvPicPr>
-            <a:picLocks noChangeAspect="1"/>
-          </p:cNvPicPr>
-          <p:nvPr/>
-        </p:nvPicPr>
-        <p:blipFill>
-          <a:blip r:embed="rId3"/>
-          <a:stretch>
-            <a:fillRect/>
-          </a:stretch>
-        </p:blipFill>
-        <p:spPr>
-          <a:xfrm>
-            <a:off x="4754880" y="1481328"/>
-            <a:ext cx="6858000" cy="4013587"/>
-          </a:xfrm>
-          <a:prstGeom prst="rect">
-            <a:avLst/>
-          </a:prstGeom>
-        </p:spPr>
-      </p:pic>
-      <p:sp>
-        <p:nvSpPr>
-          <p:cNvPr id="11" name="TextBox 10"/>
-          <p:cNvSpPr txBox="1"/>
-          <p:nvPr/>
-        </p:nvSpPr>
-        <p:spPr>
-          <a:xfrm>
-            <a:off x="4754880" y="5568067"/>
-            <a:ext cx="6858000" cy="274320"/>
-          </a:xfrm>
-          <a:prstGeom prst="rect">
-            <a:avLst/>
-          </a:prstGeom>
-          <a:noFill/>
-        </p:spPr>
-        <p:txBody>
-          <a:bodyPr wrap="square" anchor="t">
-            <a:spAutoFit/>
-          </a:bodyPr>
-          <a:lstStyle/>
-          <a:p>
-            <a:pPr algn="l">
-              <a:lnSpc>
-                <a:spcPct val="105000"/>
-              </a:lnSpc>
-            </a:pPr>
-            <a:r>
-              <a:rPr sz="1000" b="0" i="1">
-                <a:solidFill>
-                  <a:srgbClr val="94A3B8"/>
-                </a:solidFill>
-                <a:latin typeface="Calibri"/>
-              </a:rPr>
-              <a:t>What Open Table shows</a:t>
-            </a:r>
-          </a:p>
-        </p:txBody>
-      </p:sp>
-      <p:sp>
-        <p:nvSpPr>
-          <p:cNvPr id="12" name="TextBox 11"/>
+              <a:t>Screenshot · local wiki, Bellingham Bay Builders beside the Co-op Lineup page</a:t>
+            </a:r>
+          </a:p>
+        </p:txBody>
+      </p:sp>
+      <p:sp>
+        <p:nvSpPr>
+          <p:cNvPr id="10" name="TextBox 9"/>
           <p:cNvSpPr txBox="1"/>
           <p:nvPr/>
         </p:nvSpPr>
@@ -7461,7 +7394,7 @@
       </p:sp>
       <p:sp>
         <p:nvSpPr>
-          <p:cNvPr id="13" name="TextBox 12"/>
+          <p:cNvPr id="11" name="TextBox 10"/>
           <p:cNvSpPr txBox="1"/>
           <p:nvPr/>
         </p:nvSpPr>
@@ -7602,7 +7535,7 @@
                 </a:solidFill>
                 <a:latin typeface="Calibri"/>
               </a:rPr>
-              <a:t>FEDWIKI — HOW IT WENT</a:t>
+              <a:t>FEDWIKI — TABLE PLUGIN</a:t>
             </a:r>
           </a:p>
         </p:txBody>
@@ -7641,7 +7574,7 @@
                 </a:solidFill>
                 <a:latin typeface="Calibri"/>
               </a:rPr>
-              <a:t>Making it work: what broke, and what it cannot do</a:t>
+              <a:t>The FedWiki table plugin: all 22 co-ops on the index page</a:t>
             </a:r>
           </a:p>
         </p:txBody>
@@ -7654,19 +7587,17 @@
         </p:nvSpPr>
         <p:spPr>
           <a:xfrm>
-            <a:off x="548640" y="1554480"/>
-            <a:ext cx="5486400" cy="3429000"/>
+            <a:off x="521207" y="1453896"/>
+            <a:ext cx="3255264" cy="2138845"/>
           </a:xfrm>
           <a:prstGeom prst="rect">
             <a:avLst/>
           </a:prstGeom>
           <a:solidFill>
-            <a:srgbClr val="FFFFFF"/>
+            <a:srgbClr val="E2E8F0"/>
           </a:solidFill>
-          <a:ln w="12700">
-            <a:solidFill>
-              <a:srgbClr val="E2E8F0"/>
-            </a:solidFill>
+          <a:ln>
+            <a:noFill/>
           </a:ln>
           <a:effectLst/>
         </p:spPr>
@@ -7692,16 +7623,40 @@
           </a:p>
         </p:txBody>
       </p:sp>
-      <p:sp>
-        <p:nvSpPr>
-          <p:cNvPr id="6" name="TextBox 5"/>
-          <p:cNvSpPr txBox="1"/>
-          <p:nvPr/>
-        </p:nvSpPr>
-        <p:spPr>
-          <a:xfrm>
-            <a:off x="777240" y="1691640"/>
-            <a:ext cx="5029200" cy="274320"/>
+      <p:pic>
+        <p:nvPicPr>
+          <p:cNvPr id="6" name="Picture 5" descr="12-wiki-table-item.jpg"/>
+          <p:cNvPicPr>
+            <a:picLocks noChangeAspect="1"/>
+          </p:cNvPicPr>
+          <p:nvPr/>
+        </p:nvPicPr>
+        <p:blipFill>
+          <a:blip r:embed="rId2"/>
+          <a:stretch>
+            <a:fillRect/>
+          </a:stretch>
+        </p:blipFill>
+        <p:spPr>
+          <a:xfrm>
+            <a:off x="548640" y="1481328"/>
+            <a:ext cx="3200400" cy="2083981"/>
+          </a:xfrm>
+          <a:prstGeom prst="rect">
+            <a:avLst/>
+          </a:prstGeom>
+        </p:spPr>
+      </p:pic>
+      <p:sp>
+        <p:nvSpPr>
+          <p:cNvPr id="7" name="TextBox 6"/>
+          <p:cNvSpPr txBox="1"/>
+          <p:nvPr/>
+        </p:nvSpPr>
+        <p:spPr>
+          <a:xfrm>
+            <a:off x="548640" y="3638461"/>
+            <a:ext cx="3840480" cy="274320"/>
           </a:xfrm>
           <a:prstGeom prst="rect">
             <a:avLst/>
@@ -7720,27 +7675,27 @@
               </a:lnSpc>
             </a:pPr>
             <a:r>
-              <a:rPr sz="1100" b="1" i="0">
-                <a:solidFill>
-                  <a:srgbClr val="1A7A4A"/>
-                </a:solidFill>
-                <a:latin typeface="Calibri"/>
-              </a:rPr>
-              <a:t>FIXED</a:t>
-            </a:r>
-          </a:p>
-        </p:txBody>
-      </p:sp>
-      <p:sp>
-        <p:nvSpPr>
-          <p:cNvPr id="7" name="TextBox 6"/>
-          <p:cNvSpPr txBox="1"/>
-          <p:nvPr/>
-        </p:nvSpPr>
-        <p:spPr>
-          <a:xfrm>
-            <a:off x="777240" y="2011680"/>
-            <a:ext cx="5029200" cy="2468880"/>
+              <a:rPr sz="1000" b="0" i="1">
+                <a:solidFill>
+                  <a:srgbClr val="94A3B8"/>
+                </a:solidFill>
+                <a:latin typeface="Calibri"/>
+              </a:rPr>
+              <a:t>The rcntable item on the index page</a:t>
+            </a:r>
+          </a:p>
+        </p:txBody>
+      </p:sp>
+      <p:sp>
+        <p:nvSpPr>
+          <p:cNvPr id="8" name="TextBox 7"/>
+          <p:cNvSpPr txBox="1"/>
+          <p:nvPr/>
+        </p:nvSpPr>
+        <p:spPr>
+          <a:xfrm>
+            <a:off x="548640" y="3976789"/>
+            <a:ext cx="3931920" cy="2651760"/>
           </a:xfrm>
           <a:prstGeom prst="rect">
             <a:avLst/>
@@ -7758,17 +7713,17 @@
                 <a:spcPct val="110000"/>
               </a:lnSpc>
               <a:spcAft>
-                <a:spcPts val="600"/>
+                <a:spcPts val="300"/>
               </a:spcAft>
             </a:pPr>
             <a:r>
-              <a:rPr sz="1300">
+              <a:rPr sz="1200">
                 <a:solidFill>
                   <a:srgbClr val="475569"/>
                 </a:solidFill>
                 <a:latin typeface="Calibri"/>
               </a:rPr>
-              <a:t>—  Clicking a two-line name in a graph did nothing, or reloaded the wiki. Each co-op box is now one link. The real fix belongs in the Graph Tool, for every diagram.</a:t>
+              <a:t>—  The item names the records: database whatcomcoops, kind Coop.</a:t>
             </a:r>
           </a:p>
           <a:p>
@@ -7777,17 +7732,17 @@
                 <a:spcPct val="110000"/>
               </a:lnSpc>
               <a:spcAft>
-                <a:spcPts val="600"/>
+                <a:spcPts val="300"/>
               </a:spcAft>
             </a:pPr>
             <a:r>
-              <a:rPr sz="1300">
+              <a:rPr sz="1200">
                 <a:solidFill>
                   <a:srgbClr val="475569"/>
                 </a:solidFill>
                 <a:latin typeface="Calibri"/>
               </a:rPr>
-              <a:t>—  Maps first ran inside Frame items, which tied pages to one wiki. Two plugins of our own replaced them — RCN Map and RCN Timeline — and Frame is kept for websites only.</a:t>
+              <a:t>—  Open Table ↗ opens the RCN Table beside the wiki — the same table as slide 9.</a:t>
             </a:r>
           </a:p>
           <a:p>
@@ -7796,17 +7751,17 @@
                 <a:spcPct val="110000"/>
               </a:lnSpc>
               <a:spcAft>
-                <a:spcPts val="600"/>
+                <a:spcPts val="300"/>
               </a:spcAft>
             </a:pPr>
             <a:r>
-              <a:rPr sz="1300">
+              <a:rPr sz="1200">
                 <a:solidFill>
                   <a:srgbClr val="475569"/>
                 </a:solidFill>
                 <a:latin typeface="Calibri"/>
               </a:rPr>
-              <a:t>—  Timeline labels ran over each other in a narrow column. They now stop where the next begins, in the page and in the full tool.</a:t>
+              <a:t>—  At home it reads Neo4j live through substrate/api.py. On a hosted wiki it reads the exported folder in the site’s own assets, so each site is its own database.</a:t>
             </a:r>
           </a:p>
           <a:p>
@@ -7815,42 +7770,40 @@
                 <a:spcPct val="110000"/>
               </a:lnSpc>
               <a:spcAft>
-                <a:spcPts val="600"/>
+                <a:spcPts val="300"/>
               </a:spcAft>
             </a:pPr>
             <a:r>
-              <a:rPr sz="1300">
+              <a:rPr sz="1200">
                 <a:solidFill>
                   <a:srgbClr val="475569"/>
                 </a:solidFill>
                 <a:latin typeface="Calibri"/>
               </a:rPr>
-              <a:t>—  The Timeline tool dropped fields it did not know, so a co-op link vanished on save; and a second “Open” left it on the first timeline. Both fixed.</a:t>
-            </a:r>
-          </a:p>
-        </p:txBody>
-      </p:sp>
-      <p:sp>
-        <p:nvSpPr>
-          <p:cNvPr id="8" name="Rectangle 7"/>
+              <a:t>—  Every name in the table opens that co-op’s page in the lineup.</a:t>
+            </a:r>
+          </a:p>
+        </p:txBody>
+      </p:sp>
+      <p:sp>
+        <p:nvSpPr>
+          <p:cNvPr id="9" name="Rectangle 8"/>
           <p:cNvSpPr/>
           <p:nvPr/>
         </p:nvSpPr>
         <p:spPr>
           <a:xfrm>
-            <a:off x="6263640" y="1554480"/>
-            <a:ext cx="5394960" cy="3429000"/>
+            <a:off x="4727448" y="1453896"/>
+            <a:ext cx="6912864" cy="4068451"/>
           </a:xfrm>
           <a:prstGeom prst="rect">
             <a:avLst/>
           </a:prstGeom>
           <a:solidFill>
-            <a:srgbClr val="FEF3C7"/>
+            <a:srgbClr val="E2E8F0"/>
           </a:solidFill>
-          <a:ln w="12700">
-            <a:solidFill>
-              <a:srgbClr val="FDE047"/>
-            </a:solidFill>
+          <a:ln>
+            <a:noFill/>
           </a:ln>
           <a:effectLst/>
         </p:spPr>
@@ -7876,16 +7829,40 @@
           </a:p>
         </p:txBody>
       </p:sp>
-      <p:sp>
-        <p:nvSpPr>
-          <p:cNvPr id="9" name="TextBox 8"/>
-          <p:cNvSpPr txBox="1"/>
-          <p:nvPr/>
-        </p:nvSpPr>
-        <p:spPr>
-          <a:xfrm>
-            <a:off x="6492240" y="1691640"/>
-            <a:ext cx="4937760" cy="274320"/>
+      <p:pic>
+        <p:nvPicPr>
+          <p:cNvPr id="10" name="Picture 9" descr="07-table.jpg"/>
+          <p:cNvPicPr>
+            <a:picLocks noChangeAspect="1"/>
+          </p:cNvPicPr>
+          <p:nvPr/>
+        </p:nvPicPr>
+        <p:blipFill>
+          <a:blip r:embed="rId3"/>
+          <a:stretch>
+            <a:fillRect/>
+          </a:stretch>
+        </p:blipFill>
+        <p:spPr>
+          <a:xfrm>
+            <a:off x="4754880" y="1481328"/>
+            <a:ext cx="6858000" cy="4013587"/>
+          </a:xfrm>
+          <a:prstGeom prst="rect">
+            <a:avLst/>
+          </a:prstGeom>
+        </p:spPr>
+      </p:pic>
+      <p:sp>
+        <p:nvSpPr>
+          <p:cNvPr id="11" name="TextBox 10"/>
+          <p:cNvSpPr txBox="1"/>
+          <p:nvPr/>
+        </p:nvSpPr>
+        <p:spPr>
+          <a:xfrm>
+            <a:off x="4754880" y="5568067"/>
+            <a:ext cx="6858000" cy="274320"/>
           </a:xfrm>
           <a:prstGeom prst="rect">
             <a:avLst/>
@@ -7904,132 +7881,13 @@
               </a:lnSpc>
             </a:pPr>
             <a:r>
-              <a:rPr sz="1100" b="1" i="0">
-                <a:solidFill>
-                  <a:srgbClr val="854D0E"/>
-                </a:solidFill>
-                <a:latin typeface="Calibri"/>
-              </a:rPr>
-              <a:t>LIMITS</a:t>
-            </a:r>
-          </a:p>
-        </p:txBody>
-      </p:sp>
-      <p:sp>
-        <p:nvSpPr>
-          <p:cNvPr id="10" name="TextBox 9"/>
-          <p:cNvSpPr txBox="1"/>
-          <p:nvPr/>
-        </p:nvSpPr>
-        <p:spPr>
-          <a:xfrm>
-            <a:off x="6492240" y="2011680"/>
-            <a:ext cx="4937760" cy="2468880"/>
-          </a:xfrm>
-          <a:prstGeom prst="rect">
-            <a:avLst/>
-          </a:prstGeom>
-          <a:noFill/>
-        </p:spPr>
-        <p:txBody>
-          <a:bodyPr wrap="square">
-            <a:spAutoFit/>
-          </a:bodyPr>
-          <a:lstStyle/>
-          <a:p>
-            <a:pPr>
-              <a:lnSpc>
-                <a:spcPct val="110000"/>
-              </a:lnSpc>
-              <a:spcAft>
-                <a:spcPts val="600"/>
-              </a:spcAft>
-            </a:pPr>
-            <a:r>
-              <a:rPr sz="1300">
-                <a:solidFill>
-                  <a:srgbClr val="854D0E"/>
-                </a:solidFill>
-                <a:latin typeface="Calibri"/>
-              </a:rPr>
-              <a:t>—  The RCN Map and RCN Timeline plugins run on the local wiki. On Wiki Café they need an npm publish and an image rebuild first; until then, build pages with --map native.</a:t>
-            </a:r>
-          </a:p>
-          <a:p>
-            <a:pPr>
-              <a:lnSpc>
-                <a:spcPct val="110000"/>
-              </a:lnSpc>
-              <a:spcAft>
-                <a:spcPts val="600"/>
-              </a:spcAft>
-            </a:pPr>
-            <a:r>
-              <a:rPr sz="1300">
-                <a:solidFill>
-                  <a:srgbClr val="854D0E"/>
-                </a:solidFill>
-                <a:latin typeface="Calibri"/>
-              </a:rPr>
-              <a:t>—  Edits in the full Timeline tool do not save back to the page yet.</a:t>
-            </a:r>
-          </a:p>
-          <a:p>
-            <a:pPr>
-              <a:lnSpc>
-                <a:spcPct val="110000"/>
-              </a:lnSpc>
-              <a:spcAft>
-                <a:spcPts val="600"/>
-              </a:spcAft>
-            </a:pPr>
-            <a:r>
-              <a:rPr sz="1300">
-                <a:solidFill>
-                  <a:srgbClr val="854D0E"/>
-                </a:solidFill>
-                <a:latin typeface="Calibri"/>
-              </a:rPr>
-              <a:t>—  Half the co-op websites cannot be shown in a page — ICU, REI, North Coast CU, A1DesignBuild and the Food Hub refuse; Bellingham Bay Builders’ bot check never finishes. Those pages link out.</a:t>
-            </a:r>
-          </a:p>
-        </p:txBody>
-      </p:sp>
-      <p:sp>
-        <p:nvSpPr>
-          <p:cNvPr id="11" name="TextBox 10"/>
-          <p:cNvSpPr txBox="1"/>
-          <p:nvPr/>
-        </p:nvSpPr>
-        <p:spPr>
-          <a:xfrm>
-            <a:off x="548640" y="5212080"/>
-            <a:ext cx="11064240" cy="731520"/>
-          </a:xfrm>
-          <a:prstGeom prst="rect">
-            <a:avLst/>
-          </a:prstGeom>
-          <a:noFill/>
-        </p:spPr>
-        <p:txBody>
-          <a:bodyPr wrap="square" anchor="t">
-            <a:spAutoFit/>
-          </a:bodyPr>
-          <a:lstStyle/>
-          <a:p>
-            <a:pPr algn="l">
-              <a:lnSpc>
-                <a:spcPct val="105000"/>
-              </a:lnSpc>
-            </a:pPr>
-            <a:r>
-              <a:rPr sz="1500" b="0" i="1">
-                <a:solidFill>
-                  <a:srgbClr val="475569"/>
-                </a:solidFill>
-                <a:latin typeface="Calibri"/>
-              </a:rPr>
-              <a:t>Checked in a real FedWiki (coops.localhost) with real clicks: a graph box, a map point and a timeline bar each open their page beside; Open in RCN Timeline loads the page’s timeline; the websites were tested in the frame plugin’s own sandbox or by their headers — 11 show.</a:t>
+              <a:rPr sz="1000" b="0" i="1">
+                <a:solidFill>
+                  <a:srgbClr val="94A3B8"/>
+                </a:solidFill>
+                <a:latin typeface="Calibri"/>
+              </a:rPr>
+              <a:t>What Open Table shows</a:t>
             </a:r>
           </a:p>
         </p:txBody>
@@ -8153,7 +8011,7 @@
             <a:avLst/>
           </a:prstGeom>
           <a:solidFill>
-            <a:srgbClr val="D4A017"/>
+            <a:srgbClr val="B45309"/>
           </a:solidFill>
           <a:ln>
             <a:noFill/>
@@ -8212,11 +8070,11 @@
             <a:r>
               <a:rPr sz="1200" b="1" i="0">
                 <a:solidFill>
-                  <a:srgbClr val="D4A017"/>
-                </a:solidFill>
-                <a:latin typeface="Calibri"/>
-              </a:rPr>
-              <a:t>CONTACTS</a:t>
+                  <a:srgbClr val="B45309"/>
+                </a:solidFill>
+                <a:latin typeface="Calibri"/>
+              </a:rPr>
+              <a:t>FEDWIKI — HOW IT WENT</a:t>
             </a:r>
           </a:p>
         </p:txBody>
@@ -8255,7 +8113,7 @@
                 </a:solidFill>
                 <a:latin typeface="Calibri"/>
               </a:rPr>
-              <a:t>What the contact check found — and what to verify before calling</a:t>
+              <a:t>Making it work: what broke, and what it cannot do</a:t>
             </a:r>
           </a:p>
         </p:txBody>
@@ -8269,7 +8127,7 @@
         <p:spPr>
           <a:xfrm>
             <a:off x="548640" y="1554480"/>
-            <a:ext cx="5486400" cy="3108960"/>
+            <a:ext cx="5486400" cy="3429000"/>
           </a:xfrm>
           <a:prstGeom prst="rect">
             <a:avLst/>
@@ -8340,7 +8198,7 @@
                 </a:solidFill>
                 <a:latin typeface="Calibri"/>
               </a:rPr>
-              <a:t>CORRECTED IN THE DATA</a:t>
+              <a:t>FIXED</a:t>
             </a:r>
           </a:p>
         </p:txBody>
@@ -8354,7 +8212,7 @@
         <p:spPr>
           <a:xfrm>
             <a:off x="777240" y="2011680"/>
-            <a:ext cx="5029200" cy="2560320"/>
+            <a:ext cx="5029200" cy="2468880"/>
           </a:xfrm>
           <a:prstGeom prst="rect">
             <a:avLst/>
@@ -8382,7 +8240,7 @@
                 </a:solidFill>
                 <a:latin typeface="Calibri"/>
               </a:rPr>
-              <a:t>—  Community to Community has moved: 1319 Cornwall Ave, Suite 101 (the map pin is moved).</a:t>
+              <a:t>—  Clicking a two-line name in a graph did nothing, or reloaded the wiki. Each co-op box is now one link. The real fix belongs in the Graph Tool, for every diagram.</a:t>
             </a:r>
           </a:p>
           <a:p>
@@ -8401,7 +8259,7 @@
                 </a:solidFill>
                 <a:latin typeface="Calibri"/>
               </a:rPr>
-              <a:t>—  Cascade Cooperatives incorporated in January 2022, not 2019; it began in 2014 as the Co-op Education Project.</a:t>
+              <a:t>—  Maps first ran inside Frame items, which tied pages to one wiki. Two plugins of our own replaced them — RCN Map and RCN Timeline — and Frame is kept for websites only.</a:t>
             </a:r>
           </a:p>
           <a:p>
@@ -8420,7 +8278,7 @@
                 </a:solidFill>
                 <a:latin typeface="Calibri"/>
               </a:rPr>
-              <a:t>—  CHS Northwest in Lynden is at 402 Main St.</a:t>
+              <a:t>—  Timeline labels ran over each other in a narrow column. They now stop where the next begins, in the page and in the full tool.</a:t>
             </a:r>
           </a:p>
           <a:p>
@@ -8439,26 +8297,7 @@
                 </a:solidFill>
                 <a:latin typeface="Calibri"/>
               </a:rPr>
-              <a:t>—  Industrial Credit Union’s website is industrialcu.com.</a:t>
-            </a:r>
-          </a:p>
-          <a:p>
-            <a:pPr>
-              <a:lnSpc>
-                <a:spcPct val="110000"/>
-              </a:lnSpc>
-              <a:spcAft>
-                <a:spcPts val="600"/>
-              </a:spcAft>
-            </a:pPr>
-            <a:r>
-              <a:rPr sz="1300">
-                <a:solidFill>
-                  <a:srgbClr val="475569"/>
-                </a:solidFill>
-                <a:latin typeface="Calibri"/>
-              </a:rPr>
-              <a:t>—  Yellow Cab Co-op has its own site, yellowcabcoop.com.</a:t>
+              <a:t>—  The Timeline tool dropped fields it did not know, so a co-op link vanished on save; and a second “Open” left it on the first timeline. Both fixed.</a:t>
             </a:r>
           </a:p>
         </p:txBody>
@@ -8472,7 +8311,7 @@
         <p:spPr>
           <a:xfrm>
             <a:off x="6263640" y="1554480"/>
-            <a:ext cx="5394960" cy="3108960"/>
+            <a:ext cx="5394960" cy="3429000"/>
           </a:xfrm>
           <a:prstGeom prst="rect">
             <a:avLst/>
@@ -8543,7 +8382,7 @@
                 </a:solidFill>
                 <a:latin typeface="Calibri"/>
               </a:rPr>
-              <a:t>VERIFY BEFORE RELYING ON IT</a:t>
+              <a:t>LIMITS</a:t>
             </a:r>
           </a:p>
         </p:txBody>
@@ -8557,7 +8396,7 @@
         <p:spPr>
           <a:xfrm>
             <a:off x="6492240" y="2011680"/>
-            <a:ext cx="4937760" cy="2560320"/>
+            <a:ext cx="4937760" cy="2468880"/>
           </a:xfrm>
           <a:prstGeom prst="rect">
             <a:avLst/>
@@ -8585,7 +8424,7 @@
                 </a:solidFill>
                 <a:latin typeface="Calibri"/>
               </a:rPr>
-              <a:t>—  Community Media Cooperative — media-coop.com no longer resolves; it may have closed.</a:t>
+              <a:t>—  The RCN Map and RCN Timeline plugins run on the local wiki. On Wiki Café they need an npm publish and an image rebuild first; until then, build pages with --map native.</a:t>
             </a:r>
           </a:p>
           <a:p>
@@ -8604,7 +8443,7 @@
                 </a:solidFill>
                 <a:latin typeface="Calibri"/>
               </a:rPr>
-              <a:t>—  Cascadia Deaf Nation — website answers “Payment Required”; it may have lapsed.</a:t>
+              <a:t>—  Combining maps and timelines sees only the pages open in this browser window, to the left — the same as FedWiki’s own Map.</a:t>
             </a:r>
           </a:p>
           <a:p>
@@ -8623,45 +8462,7 @@
                 </a:solidFill>
                 <a:latin typeface="Calibri"/>
               </a:rPr>
-              <a:t>—  Bellingham Bay Builders — only the 2004 founders are published, not the current owner-members.</a:t>
-            </a:r>
-          </a:p>
-          <a:p>
-            <a:pPr>
-              <a:lnSpc>
-                <a:spcPct val="110000"/>
-              </a:lnSpc>
-              <a:spcAft>
-                <a:spcPts val="600"/>
-              </a:spcAft>
-            </a:pPr>
-            <a:r>
-              <a:rPr sz="1300">
-                <a:solidFill>
-                  <a:srgbClr val="854D0E"/>
-                </a:solidFill>
-                <a:latin typeface="Calibri"/>
-              </a:rPr>
-              <a:t>—  WestEdge CU, Yellow Cab Co-op, Circle of Life, CHS — no leader named on their own sites.</a:t>
-            </a:r>
-          </a:p>
-          <a:p>
-            <a:pPr>
-              <a:lnSpc>
-                <a:spcPct val="110000"/>
-              </a:lnSpc>
-              <a:spcAft>
-                <a:spcPts val="600"/>
-              </a:spcAft>
-            </a:pPr>
-            <a:r>
-              <a:rPr sz="1300">
-                <a:solidFill>
-                  <a:srgbClr val="854D0E"/>
-                </a:solidFill>
-                <a:latin typeface="Calibri"/>
-              </a:rPr>
-              <a:t>—  Tierra y Libertad — no website of its own; reach it through C2C.</a:t>
+              <a:t>—  Half the co-op websites cannot be shown in a page — ICU, REI, North Coast CU, A1DesignBuild and the Food Hub refuse; Bellingham Bay Builders’ bot check never finishes. Those pages link out.</a:t>
             </a:r>
           </a:p>
         </p:txBody>
@@ -8674,7 +8475,7 @@
         </p:nvSpPr>
         <p:spPr>
           <a:xfrm>
-            <a:off x="548640" y="4983480"/>
+            <a:off x="548640" y="5212080"/>
             <a:ext cx="11064240" cy="731520"/>
           </a:xfrm>
           <a:prstGeom prst="rect">
@@ -8700,7 +8501,7 @@
                 </a:solidFill>
                 <a:latin typeface="Calibri"/>
               </a:rPr>
-              <a:t>Every contact carries “Checked Sep 2026” and the page it was read from. Phones and names change; the date says how far to trust them.</a:t>
+              <a:t>Checked in a real FedWiki (coops.localhost) with real clicks: a graph box, a map point and a timeline bar each open their page beside; Open in RCN Timeline loads the page’s timeline and Save to wiki brings an edit back; the Co-op Lineup combines and freezes; the websites were tested in the frame plugin’s own sandbox or by their headers — 11 show.</a:t>
             </a:r>
           </a:p>
         </p:txBody>
@@ -10003,6 +9804,677 @@
 </file>
 
 <file path=ppt/slides/slide20.xml><?xml version="1.0" encoding="utf-8"?>
+<p:sld xmlns:a="http://schemas.openxmlformats.org/drawingml/2006/main" xmlns:p="http://schemas.openxmlformats.org/presentationml/2006/main" xmlns:r="http://schemas.openxmlformats.org/officeDocument/2006/relationships">
+  <p:cSld>
+    <p:bg>
+      <p:bgPr>
+        <a:solidFill>
+          <a:srgbClr val="F8FAFC"/>
+        </a:solidFill>
+        <a:effectLst/>
+      </p:bgPr>
+    </p:bg>
+    <p:spTree>
+      <p:nvGrpSpPr>
+        <p:cNvPr id="1" name=""/>
+        <p:cNvGrpSpPr/>
+        <p:nvPr/>
+      </p:nvGrpSpPr>
+      <p:grpSpPr/>
+      <p:sp>
+        <p:nvSpPr>
+          <p:cNvPr id="2" name="Rectangle 1"/>
+          <p:cNvSpPr/>
+          <p:nvPr/>
+        </p:nvSpPr>
+        <p:spPr>
+          <a:xfrm>
+            <a:off x="548640" y="384048"/>
+            <a:ext cx="82296" cy="274320"/>
+          </a:xfrm>
+          <a:prstGeom prst="rect">
+            <a:avLst/>
+          </a:prstGeom>
+          <a:solidFill>
+            <a:srgbClr val="D4A017"/>
+          </a:solidFill>
+          <a:ln>
+            <a:noFill/>
+          </a:ln>
+          <a:effectLst/>
+        </p:spPr>
+        <p:style>
+          <a:lnRef idx="1">
+            <a:schemeClr val="accent1"/>
+          </a:lnRef>
+          <a:fillRef idx="3">
+            <a:schemeClr val="accent1"/>
+          </a:fillRef>
+          <a:effectRef idx="2">
+            <a:schemeClr val="accent1"/>
+          </a:effectRef>
+          <a:fontRef idx="minor">
+            <a:schemeClr val="lt1"/>
+          </a:fontRef>
+        </p:style>
+        <p:txBody>
+          <a:bodyPr rtlCol="0" anchor="ctr"/>
+          <a:lstStyle/>
+          <a:p>
+            <a:pPr algn="ctr"/>
+          </a:p>
+        </p:txBody>
+      </p:sp>
+      <p:sp>
+        <p:nvSpPr>
+          <p:cNvPr id="3" name="TextBox 2"/>
+          <p:cNvSpPr txBox="1"/>
+          <p:nvPr/>
+        </p:nvSpPr>
+        <p:spPr>
+          <a:xfrm>
+            <a:off x="731520" y="365760"/>
+            <a:ext cx="7315200" cy="320040"/>
+          </a:xfrm>
+          <a:prstGeom prst="rect">
+            <a:avLst/>
+          </a:prstGeom>
+          <a:noFill/>
+        </p:spPr>
+        <p:txBody>
+          <a:bodyPr wrap="square" anchor="t">
+            <a:spAutoFit/>
+          </a:bodyPr>
+          <a:lstStyle/>
+          <a:p>
+            <a:pPr algn="l">
+              <a:lnSpc>
+                <a:spcPct val="105000"/>
+              </a:lnSpc>
+            </a:pPr>
+            <a:r>
+              <a:rPr sz="1200" b="1" i="0">
+                <a:solidFill>
+                  <a:srgbClr val="D4A017"/>
+                </a:solidFill>
+                <a:latin typeface="Calibri"/>
+              </a:rPr>
+              <a:t>CONTACTS</a:t>
+            </a:r>
+          </a:p>
+        </p:txBody>
+      </p:sp>
+      <p:sp>
+        <p:nvSpPr>
+          <p:cNvPr id="4" name="TextBox 3"/>
+          <p:cNvSpPr txBox="1"/>
+          <p:nvPr/>
+        </p:nvSpPr>
+        <p:spPr>
+          <a:xfrm>
+            <a:off x="548640" y="713232"/>
+            <a:ext cx="11155680" cy="640080"/>
+          </a:xfrm>
+          <a:prstGeom prst="rect">
+            <a:avLst/>
+          </a:prstGeom>
+          <a:noFill/>
+        </p:spPr>
+        <p:txBody>
+          <a:bodyPr wrap="square" anchor="t">
+            <a:spAutoFit/>
+          </a:bodyPr>
+          <a:lstStyle/>
+          <a:p>
+            <a:pPr algn="l">
+              <a:lnSpc>
+                <a:spcPct val="105000"/>
+              </a:lnSpc>
+            </a:pPr>
+            <a:r>
+              <a:rPr sz="2800" b="1" i="0">
+                <a:solidFill>
+                  <a:srgbClr val="0F172A"/>
+                </a:solidFill>
+                <a:latin typeface="Calibri"/>
+              </a:rPr>
+              <a:t>What the contact check found — and what to verify before calling</a:t>
+            </a:r>
+          </a:p>
+        </p:txBody>
+      </p:sp>
+      <p:sp>
+        <p:nvSpPr>
+          <p:cNvPr id="5" name="Rectangle 4"/>
+          <p:cNvSpPr/>
+          <p:nvPr/>
+        </p:nvSpPr>
+        <p:spPr>
+          <a:xfrm>
+            <a:off x="548640" y="1554480"/>
+            <a:ext cx="5486400" cy="3108960"/>
+          </a:xfrm>
+          <a:prstGeom prst="rect">
+            <a:avLst/>
+          </a:prstGeom>
+          <a:solidFill>
+            <a:srgbClr val="FFFFFF"/>
+          </a:solidFill>
+          <a:ln w="12700">
+            <a:solidFill>
+              <a:srgbClr val="E2E8F0"/>
+            </a:solidFill>
+          </a:ln>
+          <a:effectLst/>
+        </p:spPr>
+        <p:style>
+          <a:lnRef idx="1">
+            <a:schemeClr val="accent1"/>
+          </a:lnRef>
+          <a:fillRef idx="3">
+            <a:schemeClr val="accent1"/>
+          </a:fillRef>
+          <a:effectRef idx="2">
+            <a:schemeClr val="accent1"/>
+          </a:effectRef>
+          <a:fontRef idx="minor">
+            <a:schemeClr val="lt1"/>
+          </a:fontRef>
+        </p:style>
+        <p:txBody>
+          <a:bodyPr rtlCol="0" anchor="ctr"/>
+          <a:lstStyle/>
+          <a:p>
+            <a:pPr algn="ctr"/>
+          </a:p>
+        </p:txBody>
+      </p:sp>
+      <p:sp>
+        <p:nvSpPr>
+          <p:cNvPr id="6" name="TextBox 5"/>
+          <p:cNvSpPr txBox="1"/>
+          <p:nvPr/>
+        </p:nvSpPr>
+        <p:spPr>
+          <a:xfrm>
+            <a:off x="777240" y="1691640"/>
+            <a:ext cx="5029200" cy="274320"/>
+          </a:xfrm>
+          <a:prstGeom prst="rect">
+            <a:avLst/>
+          </a:prstGeom>
+          <a:noFill/>
+        </p:spPr>
+        <p:txBody>
+          <a:bodyPr wrap="square" anchor="t">
+            <a:spAutoFit/>
+          </a:bodyPr>
+          <a:lstStyle/>
+          <a:p>
+            <a:pPr algn="l">
+              <a:lnSpc>
+                <a:spcPct val="105000"/>
+              </a:lnSpc>
+            </a:pPr>
+            <a:r>
+              <a:rPr sz="1100" b="1" i="0">
+                <a:solidFill>
+                  <a:srgbClr val="1A7A4A"/>
+                </a:solidFill>
+                <a:latin typeface="Calibri"/>
+              </a:rPr>
+              <a:t>CORRECTED IN THE DATA</a:t>
+            </a:r>
+          </a:p>
+        </p:txBody>
+      </p:sp>
+      <p:sp>
+        <p:nvSpPr>
+          <p:cNvPr id="7" name="TextBox 6"/>
+          <p:cNvSpPr txBox="1"/>
+          <p:nvPr/>
+        </p:nvSpPr>
+        <p:spPr>
+          <a:xfrm>
+            <a:off x="777240" y="2011680"/>
+            <a:ext cx="5029200" cy="2560320"/>
+          </a:xfrm>
+          <a:prstGeom prst="rect">
+            <a:avLst/>
+          </a:prstGeom>
+          <a:noFill/>
+        </p:spPr>
+        <p:txBody>
+          <a:bodyPr wrap="square">
+            <a:spAutoFit/>
+          </a:bodyPr>
+          <a:lstStyle/>
+          <a:p>
+            <a:pPr>
+              <a:lnSpc>
+                <a:spcPct val="110000"/>
+              </a:lnSpc>
+              <a:spcAft>
+                <a:spcPts val="600"/>
+              </a:spcAft>
+            </a:pPr>
+            <a:r>
+              <a:rPr sz="1300">
+                <a:solidFill>
+                  <a:srgbClr val="475569"/>
+                </a:solidFill>
+                <a:latin typeface="Calibri"/>
+              </a:rPr>
+              <a:t>—  Community to Community has moved: 1319 Cornwall Ave, Suite 101 (the map pin is moved).</a:t>
+            </a:r>
+          </a:p>
+          <a:p>
+            <a:pPr>
+              <a:lnSpc>
+                <a:spcPct val="110000"/>
+              </a:lnSpc>
+              <a:spcAft>
+                <a:spcPts val="600"/>
+              </a:spcAft>
+            </a:pPr>
+            <a:r>
+              <a:rPr sz="1300">
+                <a:solidFill>
+                  <a:srgbClr val="475569"/>
+                </a:solidFill>
+                <a:latin typeface="Calibri"/>
+              </a:rPr>
+              <a:t>—  Cascade Cooperatives incorporated in January 2022, not 2019; it began in 2014 as the Co-op Education Project.</a:t>
+            </a:r>
+          </a:p>
+          <a:p>
+            <a:pPr>
+              <a:lnSpc>
+                <a:spcPct val="110000"/>
+              </a:lnSpc>
+              <a:spcAft>
+                <a:spcPts val="600"/>
+              </a:spcAft>
+            </a:pPr>
+            <a:r>
+              <a:rPr sz="1300">
+                <a:solidFill>
+                  <a:srgbClr val="475569"/>
+                </a:solidFill>
+                <a:latin typeface="Calibri"/>
+              </a:rPr>
+              <a:t>—  CHS Northwest in Lynden is at 402 Main St.</a:t>
+            </a:r>
+          </a:p>
+          <a:p>
+            <a:pPr>
+              <a:lnSpc>
+                <a:spcPct val="110000"/>
+              </a:lnSpc>
+              <a:spcAft>
+                <a:spcPts val="600"/>
+              </a:spcAft>
+            </a:pPr>
+            <a:r>
+              <a:rPr sz="1300">
+                <a:solidFill>
+                  <a:srgbClr val="475569"/>
+                </a:solidFill>
+                <a:latin typeface="Calibri"/>
+              </a:rPr>
+              <a:t>—  Industrial Credit Union’s website is industrialcu.com.</a:t>
+            </a:r>
+          </a:p>
+          <a:p>
+            <a:pPr>
+              <a:lnSpc>
+                <a:spcPct val="110000"/>
+              </a:lnSpc>
+              <a:spcAft>
+                <a:spcPts val="600"/>
+              </a:spcAft>
+            </a:pPr>
+            <a:r>
+              <a:rPr sz="1300">
+                <a:solidFill>
+                  <a:srgbClr val="475569"/>
+                </a:solidFill>
+                <a:latin typeface="Calibri"/>
+              </a:rPr>
+              <a:t>—  Yellow Cab Co-op has its own site, yellowcabcoop.com.</a:t>
+            </a:r>
+          </a:p>
+        </p:txBody>
+      </p:sp>
+      <p:sp>
+        <p:nvSpPr>
+          <p:cNvPr id="8" name="Rectangle 7"/>
+          <p:cNvSpPr/>
+          <p:nvPr/>
+        </p:nvSpPr>
+        <p:spPr>
+          <a:xfrm>
+            <a:off x="6263640" y="1554480"/>
+            <a:ext cx="5394960" cy="3108960"/>
+          </a:xfrm>
+          <a:prstGeom prst="rect">
+            <a:avLst/>
+          </a:prstGeom>
+          <a:solidFill>
+            <a:srgbClr val="FEF3C7"/>
+          </a:solidFill>
+          <a:ln w="12700">
+            <a:solidFill>
+              <a:srgbClr val="FDE047"/>
+            </a:solidFill>
+          </a:ln>
+          <a:effectLst/>
+        </p:spPr>
+        <p:style>
+          <a:lnRef idx="1">
+            <a:schemeClr val="accent1"/>
+          </a:lnRef>
+          <a:fillRef idx="3">
+            <a:schemeClr val="accent1"/>
+          </a:fillRef>
+          <a:effectRef idx="2">
+            <a:schemeClr val="accent1"/>
+          </a:effectRef>
+          <a:fontRef idx="minor">
+            <a:schemeClr val="lt1"/>
+          </a:fontRef>
+        </p:style>
+        <p:txBody>
+          <a:bodyPr rtlCol="0" anchor="ctr"/>
+          <a:lstStyle/>
+          <a:p>
+            <a:pPr algn="ctr"/>
+          </a:p>
+        </p:txBody>
+      </p:sp>
+      <p:sp>
+        <p:nvSpPr>
+          <p:cNvPr id="9" name="TextBox 8"/>
+          <p:cNvSpPr txBox="1"/>
+          <p:nvPr/>
+        </p:nvSpPr>
+        <p:spPr>
+          <a:xfrm>
+            <a:off x="6492240" y="1691640"/>
+            <a:ext cx="4937760" cy="274320"/>
+          </a:xfrm>
+          <a:prstGeom prst="rect">
+            <a:avLst/>
+          </a:prstGeom>
+          <a:noFill/>
+        </p:spPr>
+        <p:txBody>
+          <a:bodyPr wrap="square" anchor="t">
+            <a:spAutoFit/>
+          </a:bodyPr>
+          <a:lstStyle/>
+          <a:p>
+            <a:pPr algn="l">
+              <a:lnSpc>
+                <a:spcPct val="105000"/>
+              </a:lnSpc>
+            </a:pPr>
+            <a:r>
+              <a:rPr sz="1100" b="1" i="0">
+                <a:solidFill>
+                  <a:srgbClr val="854D0E"/>
+                </a:solidFill>
+                <a:latin typeface="Calibri"/>
+              </a:rPr>
+              <a:t>VERIFY BEFORE RELYING ON IT</a:t>
+            </a:r>
+          </a:p>
+        </p:txBody>
+      </p:sp>
+      <p:sp>
+        <p:nvSpPr>
+          <p:cNvPr id="10" name="TextBox 9"/>
+          <p:cNvSpPr txBox="1"/>
+          <p:nvPr/>
+        </p:nvSpPr>
+        <p:spPr>
+          <a:xfrm>
+            <a:off x="6492240" y="2011680"/>
+            <a:ext cx="4937760" cy="2560320"/>
+          </a:xfrm>
+          <a:prstGeom prst="rect">
+            <a:avLst/>
+          </a:prstGeom>
+          <a:noFill/>
+        </p:spPr>
+        <p:txBody>
+          <a:bodyPr wrap="square">
+            <a:spAutoFit/>
+          </a:bodyPr>
+          <a:lstStyle/>
+          <a:p>
+            <a:pPr>
+              <a:lnSpc>
+                <a:spcPct val="110000"/>
+              </a:lnSpc>
+              <a:spcAft>
+                <a:spcPts val="600"/>
+              </a:spcAft>
+            </a:pPr>
+            <a:r>
+              <a:rPr sz="1300">
+                <a:solidFill>
+                  <a:srgbClr val="854D0E"/>
+                </a:solidFill>
+                <a:latin typeface="Calibri"/>
+              </a:rPr>
+              <a:t>—  Community Media Cooperative — media-coop.com no longer resolves; it may have closed.</a:t>
+            </a:r>
+          </a:p>
+          <a:p>
+            <a:pPr>
+              <a:lnSpc>
+                <a:spcPct val="110000"/>
+              </a:lnSpc>
+              <a:spcAft>
+                <a:spcPts val="600"/>
+              </a:spcAft>
+            </a:pPr>
+            <a:r>
+              <a:rPr sz="1300">
+                <a:solidFill>
+                  <a:srgbClr val="854D0E"/>
+                </a:solidFill>
+                <a:latin typeface="Calibri"/>
+              </a:rPr>
+              <a:t>—  Cascadia Deaf Nation — website answers “Payment Required”; it may have lapsed.</a:t>
+            </a:r>
+          </a:p>
+          <a:p>
+            <a:pPr>
+              <a:lnSpc>
+                <a:spcPct val="110000"/>
+              </a:lnSpc>
+              <a:spcAft>
+                <a:spcPts val="600"/>
+              </a:spcAft>
+            </a:pPr>
+            <a:r>
+              <a:rPr sz="1300">
+                <a:solidFill>
+                  <a:srgbClr val="854D0E"/>
+                </a:solidFill>
+                <a:latin typeface="Calibri"/>
+              </a:rPr>
+              <a:t>—  Bellingham Bay Builders — only the 2004 founders are published, not the current owner-members.</a:t>
+            </a:r>
+          </a:p>
+          <a:p>
+            <a:pPr>
+              <a:lnSpc>
+                <a:spcPct val="110000"/>
+              </a:lnSpc>
+              <a:spcAft>
+                <a:spcPts val="600"/>
+              </a:spcAft>
+            </a:pPr>
+            <a:r>
+              <a:rPr sz="1300">
+                <a:solidFill>
+                  <a:srgbClr val="854D0E"/>
+                </a:solidFill>
+                <a:latin typeface="Calibri"/>
+              </a:rPr>
+              <a:t>—  WestEdge CU, Yellow Cab Co-op, Circle of Life, CHS — no leader named on their own sites.</a:t>
+            </a:r>
+          </a:p>
+          <a:p>
+            <a:pPr>
+              <a:lnSpc>
+                <a:spcPct val="110000"/>
+              </a:lnSpc>
+              <a:spcAft>
+                <a:spcPts val="600"/>
+              </a:spcAft>
+            </a:pPr>
+            <a:r>
+              <a:rPr sz="1300">
+                <a:solidFill>
+                  <a:srgbClr val="854D0E"/>
+                </a:solidFill>
+                <a:latin typeface="Calibri"/>
+              </a:rPr>
+              <a:t>—  Tierra y Libertad — no website of its own; reach it through C2C.</a:t>
+            </a:r>
+          </a:p>
+        </p:txBody>
+      </p:sp>
+      <p:sp>
+        <p:nvSpPr>
+          <p:cNvPr id="11" name="TextBox 10"/>
+          <p:cNvSpPr txBox="1"/>
+          <p:nvPr/>
+        </p:nvSpPr>
+        <p:spPr>
+          <a:xfrm>
+            <a:off x="548640" y="4983480"/>
+            <a:ext cx="11064240" cy="731520"/>
+          </a:xfrm>
+          <a:prstGeom prst="rect">
+            <a:avLst/>
+          </a:prstGeom>
+          <a:noFill/>
+        </p:spPr>
+        <p:txBody>
+          <a:bodyPr wrap="square" anchor="t">
+            <a:spAutoFit/>
+          </a:bodyPr>
+          <a:lstStyle/>
+          <a:p>
+            <a:pPr algn="l">
+              <a:lnSpc>
+                <a:spcPct val="105000"/>
+              </a:lnSpc>
+            </a:pPr>
+            <a:r>
+              <a:rPr sz="1500" b="0" i="1">
+                <a:solidFill>
+                  <a:srgbClr val="475569"/>
+                </a:solidFill>
+                <a:latin typeface="Calibri"/>
+              </a:rPr>
+              <a:t>Every contact carries “Checked Sep 2026” and the page it was read from. Phones and names change; the date says how far to trust them.</a:t>
+            </a:r>
+          </a:p>
+        </p:txBody>
+      </p:sp>
+      <p:sp>
+        <p:nvSpPr>
+          <p:cNvPr id="12" name="TextBox 11"/>
+          <p:cNvSpPr txBox="1"/>
+          <p:nvPr/>
+        </p:nvSpPr>
+        <p:spPr>
+          <a:xfrm>
+            <a:off x="548640" y="6446520"/>
+            <a:ext cx="5486400" cy="274320"/>
+          </a:xfrm>
+          <a:prstGeom prst="rect">
+            <a:avLst/>
+          </a:prstGeom>
+          <a:noFill/>
+        </p:spPr>
+        <p:txBody>
+          <a:bodyPr wrap="square" anchor="t">
+            <a:spAutoFit/>
+          </a:bodyPr>
+          <a:lstStyle/>
+          <a:p>
+            <a:pPr algn="l">
+              <a:lnSpc>
+                <a:spcPct val="105000"/>
+              </a:lnSpc>
+            </a:pPr>
+            <a:r>
+              <a:rPr sz="900" b="0" i="0">
+                <a:solidFill>
+                  <a:srgbClr val="94A3B8"/>
+                </a:solidFill>
+                <a:latin typeface="Calibri"/>
+              </a:rPr>
+              <a:t>Co-ops of Whatcom County · RCN</a:t>
+            </a:r>
+          </a:p>
+        </p:txBody>
+      </p:sp>
+      <p:sp>
+        <p:nvSpPr>
+          <p:cNvPr id="13" name="TextBox 12"/>
+          <p:cNvSpPr txBox="1"/>
+          <p:nvPr/>
+        </p:nvSpPr>
+        <p:spPr>
+          <a:xfrm>
+            <a:off x="11247120" y="6446520"/>
+            <a:ext cx="365760" cy="274320"/>
+          </a:xfrm>
+          <a:prstGeom prst="rect">
+            <a:avLst/>
+          </a:prstGeom>
+          <a:noFill/>
+        </p:spPr>
+        <p:txBody>
+          <a:bodyPr wrap="square" anchor="t">
+            <a:spAutoFit/>
+          </a:bodyPr>
+          <a:lstStyle/>
+          <a:p>
+            <a:pPr algn="r">
+              <a:lnSpc>
+                <a:spcPct val="105000"/>
+              </a:lnSpc>
+            </a:pPr>
+            <a:r>
+              <a:rPr sz="900" b="0" i="0">
+                <a:solidFill>
+                  <a:srgbClr val="94A3B8"/>
+                </a:solidFill>
+                <a:latin typeface="Calibri"/>
+              </a:rPr>
+              <a:t>20</a:t>
+            </a:r>
+          </a:p>
+        </p:txBody>
+      </p:sp>
+    </p:spTree>
+  </p:cSld>
+  <p:clrMapOvr>
+    <a:masterClrMapping/>
+  </p:clrMapOvr>
+</p:sld>
+</file>
+
+<file path=ppt/slides/slide21.xml><?xml version="1.0" encoding="utf-8"?>
 <p:sld xmlns:a="http://schemas.openxmlformats.org/drawingml/2006/main" xmlns:p="http://schemas.openxmlformats.org/presentationml/2006/main" xmlns:r="http://schemas.openxmlformats.org/officeDocument/2006/relationships">
   <p:cSld>
     <p:bg>
